--- a/docs/presentations/CeEst_ERP_Live_Demo_Presentation.pptx
+++ b/docs/presentations/CeEst_ERP_Live_Demo_Presentation.pptx
@@ -3100,7 +3100,7 @@
     <p:bg>
       <p:bgPr>
         <a:solidFill>
-          <a:srgbClr val="0A213D"/>
+          <a:srgbClr val="FFFFFF"/>
         </a:solidFill>
         <a:effectLst/>
       </p:bgPr>
@@ -3145,16 +3145,18 @@
         <p:spPr>
           <a:xfrm>
             <a:off x="0" y="0"/>
-            <a:ext cx="12191695" cy="6858000"/>
+            <a:ext cx="4983480" cy="6858000"/>
           </a:xfrm>
           <a:prstGeom prst="rect">
             <a:avLst/>
           </a:prstGeom>
           <a:solidFill>
-            <a:srgbClr val="0A213D"/>
+            <a:srgbClr val="FFFFFF"/>
           </a:solidFill>
-          <a:ln>
-            <a:noFill/>
+          <a:ln w="12700">
+            <a:solidFill>
+              <a:srgbClr val="FFFFFF"/>
+            </a:solidFill>
           </a:ln>
         </p:spPr>
         <p:style>
@@ -3187,223 +3189,10 @@
         </p:nvSpPr>
         <p:spPr>
           <a:xfrm>
-            <a:off x="0" y="0"/>
-            <a:ext cx="4800600" cy="6858000"/>
-          </a:xfrm>
-          <a:prstGeom prst="rect">
-            <a:avLst/>
-          </a:prstGeom>
-          <a:solidFill>
-            <a:srgbClr val="0A213D"/>
-          </a:solidFill>
-          <a:ln w="12700">
-            <a:solidFill>
-              <a:srgbClr val="0A213D"/>
-            </a:solidFill>
-          </a:ln>
-        </p:spPr>
-        <p:style>
-          <a:lnRef idx="1">
-            <a:schemeClr val="accent1"/>
-          </a:lnRef>
-          <a:fillRef idx="3">
-            <a:schemeClr val="accent1"/>
-          </a:fillRef>
-          <a:effectRef idx="2">
-            <a:schemeClr val="accent1"/>
-          </a:effectRef>
-          <a:fontRef idx="minor">
-            <a:schemeClr val="lt1"/>
-          </a:fontRef>
-        </p:style>
-        <p:txBody>
-          <a:bodyPr rtlCol="0" anchor="ctr"/>
-          <a:lstStyle/>
-          <a:p>
-            <a:pPr algn="ctr"/>
-          </a:p>
-        </p:txBody>
-      </p:sp>
-      <p:pic>
-        <p:nvPicPr>
-          <p:cNvPr id="5" name="Picture 4" descr="center-estates-logo.png"/>
-          <p:cNvPicPr>
-            <a:picLocks noChangeAspect="1"/>
-          </p:cNvPicPr>
-          <p:nvPr/>
-        </p:nvPicPr>
-        <p:blipFill>
-          <a:blip r:embed="rId3"/>
-          <a:stretch>
-            <a:fillRect/>
-          </a:stretch>
-        </p:blipFill>
-        <p:spPr>
-          <a:xfrm>
-            <a:off x="594360" y="530352"/>
-            <a:ext cx="617253" cy="777240"/>
-          </a:xfrm>
-          <a:prstGeom prst="rect">
-            <a:avLst/>
-          </a:prstGeom>
-        </p:spPr>
-      </p:pic>
-      <p:sp>
-        <p:nvSpPr>
-          <p:cNvPr id="6" name="TextBox 5"/>
-          <p:cNvSpPr txBox="1"/>
-          <p:nvPr/>
-        </p:nvSpPr>
-        <p:spPr>
-          <a:xfrm>
-            <a:off x="1481328" y="612648"/>
-            <a:ext cx="2560320" cy="365760"/>
-          </a:xfrm>
-          <a:prstGeom prst="rect">
-            <a:avLst/>
-          </a:prstGeom>
-          <a:noFill/>
-        </p:spPr>
-        <p:txBody>
-          <a:bodyPr wrap="none" lIns="36576" rIns="36576" tIns="36576" bIns="36576" anchor="ctr">
-            <a:spAutoFit/>
-          </a:bodyPr>
-          <a:lstStyle/>
-          <a:p>
-            <a:pPr algn="l"/>
-            <a:r>
-              <a:rPr sz="2400" b="1">
-                <a:solidFill>
-                  <a:srgbClr val="FFFFFF"/>
-                </a:solidFill>
-                <a:latin typeface="Aptos"/>
-              </a:rPr>
-              <a:t>CeEst ERP</a:t>
-            </a:r>
-          </a:p>
-        </p:txBody>
-      </p:sp>
-      <p:sp>
-        <p:nvSpPr>
-          <p:cNvPr id="7" name="TextBox 6"/>
-          <p:cNvSpPr txBox="1"/>
-          <p:nvPr/>
-        </p:nvSpPr>
-        <p:spPr>
-          <a:xfrm>
-            <a:off x="658368" y="1874519"/>
-            <a:ext cx="3383280" cy="274320"/>
-          </a:xfrm>
-          <a:prstGeom prst="rect">
-            <a:avLst/>
-          </a:prstGeom>
-          <a:noFill/>
-        </p:spPr>
-        <p:txBody>
-          <a:bodyPr wrap="none" lIns="36576" rIns="36576" tIns="36576" bIns="36576" anchor="ctr">
-            <a:spAutoFit/>
-          </a:bodyPr>
-          <a:lstStyle/>
-          <a:p>
-            <a:pPr algn="l"/>
-            <a:r>
-              <a:rPr sz="1200" b="1">
-                <a:solidFill>
-                  <a:srgbClr val="FF9CA0"/>
-                </a:solidFill>
-                <a:latin typeface="Aptos"/>
-              </a:rPr>
-              <a:t>LIVE DEMONSTRATION</a:t>
-            </a:r>
-          </a:p>
-        </p:txBody>
-      </p:sp>
-      <p:sp>
-        <p:nvSpPr>
-          <p:cNvPr id="8" name="TextBox 7"/>
-          <p:cNvSpPr txBox="1"/>
-          <p:nvPr/>
-        </p:nvSpPr>
-        <p:spPr>
-          <a:xfrm>
-            <a:off x="621792" y="2267712"/>
-            <a:ext cx="3794760" cy="1143000"/>
-          </a:xfrm>
-          <a:prstGeom prst="rect">
-            <a:avLst/>
-          </a:prstGeom>
-          <a:noFill/>
-        </p:spPr>
-        <p:txBody>
-          <a:bodyPr wrap="none" lIns="36576" rIns="36576" tIns="36576" bIns="36576" anchor="ctr">
-            <a:spAutoFit/>
-          </a:bodyPr>
-          <a:lstStyle/>
-          <a:p>
-            <a:pPr algn="l"/>
-            <a:r>
-              <a:rPr sz="3100" b="1">
-                <a:solidFill>
-                  <a:srgbClr val="FFFFFF"/>
-                </a:solidFill>
-                <a:latin typeface="Aptos"/>
-              </a:rPr>
-              <a:t>One operating record.</a:t>
-            </a:r>
-            <a:br/>
-            <a:r>
-              <a:t>Complete estate control.</a:t>
-            </a:r>
-          </a:p>
-        </p:txBody>
-      </p:sp>
-      <p:sp>
-        <p:nvSpPr>
-          <p:cNvPr id="9" name="TextBox 8"/>
-          <p:cNvSpPr txBox="1"/>
-          <p:nvPr/>
-        </p:nvSpPr>
-        <p:spPr>
-          <a:xfrm>
-            <a:off x="658368" y="3657600"/>
-            <a:ext cx="3611880" cy="914400"/>
-          </a:xfrm>
-          <a:prstGeom prst="rect">
-            <a:avLst/>
-          </a:prstGeom>
-          <a:noFill/>
-        </p:spPr>
-        <p:txBody>
-          <a:bodyPr wrap="none" lIns="36576" rIns="36576" tIns="36576" bIns="36576" anchor="ctr">
-            <a:spAutoFit/>
-          </a:bodyPr>
-          <a:lstStyle/>
-          <a:p>
-            <a:pPr algn="l"/>
-            <a:r>
-              <a:rPr sz="1500" b="0">
-                <a:solidFill>
-                  <a:srgbClr val="DDE7F2"/>
-                </a:solidFill>
-                <a:latin typeface="Aptos"/>
-              </a:rPr>
-              <a:t>Property management, facilities operations and staff performance—connected from transaction to report.</a:t>
-            </a:r>
-          </a:p>
-        </p:txBody>
-      </p:sp>
-      <p:sp>
-        <p:nvSpPr>
-          <p:cNvPr id="10" name="Rounded Rectangle 9"/>
-          <p:cNvSpPr/>
-          <p:nvPr/>
-        </p:nvSpPr>
-        <p:spPr>
-          <a:xfrm>
-            <a:off x="658368" y="4919472"/>
-            <a:ext cx="3520440" cy="548640"/>
-          </a:xfrm>
-          <a:prstGeom prst="roundRect">
+            <a:off x="4873752" y="0"/>
+            <a:ext cx="109728" cy="6858000"/>
+          </a:xfrm>
+          <a:prstGeom prst="rect">
             <a:avLst/>
           </a:prstGeom>
           <a:solidFill>
@@ -3437,6 +3226,219 @@
           </a:p>
         </p:txBody>
       </p:sp>
+      <p:pic>
+        <p:nvPicPr>
+          <p:cNvPr id="5" name="Picture 4" descr="center-estates-logo.png"/>
+          <p:cNvPicPr>
+            <a:picLocks noChangeAspect="1"/>
+          </p:cNvPicPr>
+          <p:nvPr/>
+        </p:nvPicPr>
+        <p:blipFill>
+          <a:blip r:embed="rId3"/>
+          <a:stretch>
+            <a:fillRect/>
+          </a:stretch>
+        </p:blipFill>
+        <p:spPr>
+          <a:xfrm>
+            <a:off x="621792" y="502920"/>
+            <a:ext cx="595468" cy="749808"/>
+          </a:xfrm>
+          <a:prstGeom prst="rect">
+            <a:avLst/>
+          </a:prstGeom>
+        </p:spPr>
+      </p:pic>
+      <p:sp>
+        <p:nvSpPr>
+          <p:cNvPr id="6" name="TextBox 5"/>
+          <p:cNvSpPr txBox="1"/>
+          <p:nvPr/>
+        </p:nvSpPr>
+        <p:spPr>
+          <a:xfrm>
+            <a:off x="1481328" y="603504"/>
+            <a:ext cx="2560320" cy="365760"/>
+          </a:xfrm>
+          <a:prstGeom prst="rect">
+            <a:avLst/>
+          </a:prstGeom>
+          <a:noFill/>
+        </p:spPr>
+        <p:txBody>
+          <a:bodyPr wrap="square" lIns="36576" rIns="36576" tIns="36576" bIns="36576" anchor="ctr">
+            <a:spAutoFit/>
+          </a:bodyPr>
+          <a:lstStyle/>
+          <a:p>
+            <a:pPr algn="l"/>
+            <a:r>
+              <a:rPr sz="2300" b="1">
+                <a:solidFill>
+                  <a:srgbClr val="0A213D"/>
+                </a:solidFill>
+                <a:latin typeface="Liberation Sans"/>
+              </a:rPr>
+              <a:t>CeEst ERP</a:t>
+            </a:r>
+          </a:p>
+        </p:txBody>
+      </p:sp>
+      <p:sp>
+        <p:nvSpPr>
+          <p:cNvPr id="7" name="TextBox 6"/>
+          <p:cNvSpPr txBox="1"/>
+          <p:nvPr/>
+        </p:nvSpPr>
+        <p:spPr>
+          <a:xfrm>
+            <a:off x="658368" y="1828800"/>
+            <a:ext cx="3383280" cy="274320"/>
+          </a:xfrm>
+          <a:prstGeom prst="rect">
+            <a:avLst/>
+          </a:prstGeom>
+          <a:noFill/>
+        </p:spPr>
+        <p:txBody>
+          <a:bodyPr wrap="square" lIns="36576" rIns="36576" tIns="36576" bIns="36576" anchor="ctr">
+            <a:spAutoFit/>
+          </a:bodyPr>
+          <a:lstStyle/>
+          <a:p>
+            <a:pPr algn="l"/>
+            <a:r>
+              <a:rPr sz="1100" b="1">
+                <a:solidFill>
+                  <a:srgbClr val="DE232A"/>
+                </a:solidFill>
+                <a:latin typeface="Liberation Sans"/>
+              </a:rPr>
+              <a:t>LIVE DEMONSTRATION</a:t>
+            </a:r>
+          </a:p>
+        </p:txBody>
+      </p:sp>
+      <p:sp>
+        <p:nvSpPr>
+          <p:cNvPr id="8" name="TextBox 7"/>
+          <p:cNvSpPr txBox="1"/>
+          <p:nvPr/>
+        </p:nvSpPr>
+        <p:spPr>
+          <a:xfrm>
+            <a:off x="621792" y="2212848"/>
+            <a:ext cx="3794760" cy="1234440"/>
+          </a:xfrm>
+          <a:prstGeom prst="rect">
+            <a:avLst/>
+          </a:prstGeom>
+          <a:noFill/>
+        </p:spPr>
+        <p:txBody>
+          <a:bodyPr wrap="square" lIns="36576" rIns="36576" tIns="36576" bIns="36576" anchor="t">
+            <a:spAutoFit/>
+          </a:bodyPr>
+          <a:lstStyle/>
+          <a:p>
+            <a:pPr algn="l"/>
+            <a:r>
+              <a:rPr sz="2900" b="1">
+                <a:solidFill>
+                  <a:srgbClr val="0A213D"/>
+                </a:solidFill>
+                <a:latin typeface="Liberation Sans"/>
+              </a:rPr>
+              <a:t>One operating record.</a:t>
+            </a:r>
+            <a:br/>
+            <a:r>
+              <a:t>Complete estate control.</a:t>
+            </a:r>
+          </a:p>
+        </p:txBody>
+      </p:sp>
+      <p:sp>
+        <p:nvSpPr>
+          <p:cNvPr id="9" name="TextBox 8"/>
+          <p:cNvSpPr txBox="1"/>
+          <p:nvPr/>
+        </p:nvSpPr>
+        <p:spPr>
+          <a:xfrm>
+            <a:off x="658368" y="3675887"/>
+            <a:ext cx="3611880" cy="822960"/>
+          </a:xfrm>
+          <a:prstGeom prst="rect">
+            <a:avLst/>
+          </a:prstGeom>
+          <a:noFill/>
+        </p:spPr>
+        <p:txBody>
+          <a:bodyPr wrap="square" lIns="36576" rIns="36576" tIns="36576" bIns="36576" anchor="t">
+            <a:spAutoFit/>
+          </a:bodyPr>
+          <a:lstStyle/>
+          <a:p>
+            <a:pPr algn="l"/>
+            <a:r>
+              <a:rPr sz="1400" b="0">
+                <a:solidFill>
+                  <a:srgbClr val="37495E"/>
+                </a:solidFill>
+                <a:latin typeface="Liberation Sans"/>
+              </a:rPr>
+              <a:t>Property management, facilities operations and staff performance—connected from transaction to report.</a:t>
+            </a:r>
+          </a:p>
+        </p:txBody>
+      </p:sp>
+      <p:sp>
+        <p:nvSpPr>
+          <p:cNvPr id="10" name="Rounded Rectangle 9"/>
+          <p:cNvSpPr/>
+          <p:nvPr/>
+        </p:nvSpPr>
+        <p:spPr>
+          <a:xfrm>
+            <a:off x="658368" y="4828032"/>
+            <a:ext cx="3611880" cy="530352"/>
+          </a:xfrm>
+          <a:prstGeom prst="roundRect">
+            <a:avLst/>
+          </a:prstGeom>
+          <a:solidFill>
+            <a:srgbClr val="DE232A"/>
+          </a:solidFill>
+          <a:ln w="12700">
+            <a:solidFill>
+              <a:srgbClr val="DE232A"/>
+            </a:solidFill>
+          </a:ln>
+        </p:spPr>
+        <p:style>
+          <a:lnRef idx="1">
+            <a:schemeClr val="accent1"/>
+          </a:lnRef>
+          <a:fillRef idx="3">
+            <a:schemeClr val="accent1"/>
+          </a:fillRef>
+          <a:effectRef idx="2">
+            <a:schemeClr val="accent1"/>
+          </a:effectRef>
+          <a:fontRef idx="minor">
+            <a:schemeClr val="lt1"/>
+          </a:fontRef>
+        </p:style>
+        <p:txBody>
+          <a:bodyPr rtlCol="0" anchor="ctr"/>
+          <a:lstStyle/>
+          <a:p>
+            <a:pPr algn="ctr"/>
+          </a:p>
+        </p:txBody>
+      </p:sp>
       <p:sp>
         <p:nvSpPr>
           <p:cNvPr id="11" name="TextBox 10"/>
@@ -3445,29 +3447,29 @@
         </p:nvSpPr>
         <p:spPr>
           <a:xfrm>
-            <a:off x="822960" y="5065776"/>
-            <a:ext cx="3200400" cy="219456"/>
-          </a:xfrm>
-          <a:prstGeom prst="rect">
-            <a:avLst/>
-          </a:prstGeom>
-          <a:noFill/>
-        </p:spPr>
-        <p:txBody>
-          <a:bodyPr wrap="none" lIns="36576" rIns="36576" tIns="36576" bIns="36576" anchor="ctr">
+            <a:off x="786384" y="4974336"/>
+            <a:ext cx="3355848" cy="219456"/>
+          </a:xfrm>
+          <a:prstGeom prst="rect">
+            <a:avLst/>
+          </a:prstGeom>
+          <a:noFill/>
+        </p:spPr>
+        <p:txBody>
+          <a:bodyPr wrap="square" lIns="36576" rIns="36576" tIns="36576" bIns="36576" anchor="ctr">
             <a:spAutoFit/>
           </a:bodyPr>
           <a:lstStyle/>
           <a:p>
             <a:pPr algn="ctr"/>
             <a:r>
-              <a:rPr sz="1100" b="1">
+              <a:rPr sz="1000" b="1">
                 <a:solidFill>
                   <a:srgbClr val="FFFFFF"/>
                 </a:solidFill>
-                <a:latin typeface="Aptos"/>
-              </a:rPr>
-              <a:t>RECORD → ACT → VERIFY → REPORT</a:t>
+                <a:latin typeface="Liberation Sans"/>
+              </a:rPr>
+              <a:t>RECORD  →  ACT  →  VERIFY  →  REPORT</a:t>
             </a:r>
           </a:p>
         </p:txBody>
@@ -3480,7 +3482,7 @@
         </p:nvSpPr>
         <p:spPr>
           <a:xfrm>
-            <a:off x="658368" y="6172200"/>
+            <a:off x="658368" y="6144768"/>
             <a:ext cx="3474720" cy="228600"/>
           </a:xfrm>
           <a:prstGeom prst="rect">
@@ -3489,7 +3491,7 @@
           <a:noFill/>
         </p:spPr>
         <p:txBody>
-          <a:bodyPr wrap="none" lIns="36576" rIns="36576" tIns="36576" bIns="36576" anchor="ctr">
+          <a:bodyPr wrap="square" lIns="36576" rIns="36576" tIns="36576" bIns="36576" anchor="ctr">
             <a:spAutoFit/>
           </a:bodyPr>
           <a:lstStyle/>
@@ -3498,11 +3500,11 @@
             <a:r>
               <a:rPr sz="1000" b="0">
                 <a:solidFill>
-                  <a:srgbClr val="B9C9DC"/>
-                </a:solidFill>
-                <a:latin typeface="Aptos"/>
-              </a:rPr>
-              <a:t>Live demonstration • August 2026</a:t>
+                  <a:srgbClr val="37495E"/>
+                </a:solidFill>
+                <a:latin typeface="Liberation Sans"/>
+              </a:rPr>
+              <a:t>Live demonstration  •  August 2026</a:t>
             </a:r>
           </a:p>
         </p:txBody>
@@ -3619,7 +3621,7 @@
           <a:noFill/>
         </p:spPr>
         <p:txBody>
-          <a:bodyPr wrap="none" lIns="36576" rIns="36576" tIns="36576" bIns="36576" anchor="ctr">
+          <a:bodyPr wrap="square" lIns="36576" rIns="36576" tIns="36576" bIns="36576" anchor="ctr">
             <a:spAutoFit/>
           </a:bodyPr>
           <a:lstStyle/>
@@ -3630,7 +3632,7 @@
                 <a:solidFill>
                   <a:srgbClr val="0A213D"/>
                 </a:solidFill>
-                <a:latin typeface="Aptos"/>
+                <a:latin typeface="Liberation Sans"/>
               </a:rPr>
               <a:t>CeEst ERP</a:t>
             </a:r>
@@ -3654,7 +3656,7 @@
           <a:noFill/>
         </p:spPr>
         <p:txBody>
-          <a:bodyPr wrap="none" lIns="36576" rIns="36576" tIns="36576" bIns="36576" anchor="ctr">
+          <a:bodyPr wrap="square" lIns="36576" rIns="36576" tIns="36576" bIns="36576" anchor="ctr">
             <a:spAutoFit/>
           </a:bodyPr>
           <a:lstStyle/>
@@ -3663,9 +3665,9 @@
             <a:r>
               <a:rPr sz="800" b="1">
                 <a:solidFill>
-                  <a:srgbClr val="556982"/>
-                </a:solidFill>
-                <a:latin typeface="Aptos"/>
+                  <a:srgbClr val="37495E"/>
+                </a:solidFill>
+                <a:latin typeface="Liberation Sans"/>
               </a:rPr>
               <a:t>PROPERTY  •  FACILITY  •  PERFORMANCE</a:t>
             </a:r>
@@ -3689,7 +3691,7 @@
           <a:noFill/>
         </p:spPr>
         <p:txBody>
-          <a:bodyPr wrap="none" lIns="36576" rIns="36576" tIns="36576" bIns="36576" anchor="ctr">
+          <a:bodyPr wrap="square" lIns="36576" rIns="36576" tIns="36576" bIns="36576" anchor="ctr">
             <a:spAutoFit/>
           </a:bodyPr>
           <a:lstStyle/>
@@ -3700,7 +3702,7 @@
                 <a:solidFill>
                   <a:srgbClr val="DE232A"/>
                 </a:solidFill>
-                <a:latin typeface="Aptos"/>
+                <a:latin typeface="Liberation Sans"/>
               </a:rPr>
               <a:t>ASSET LIFECYCLE</a:t>
             </a:r>
@@ -3724,7 +3726,7 @@
           <a:noFill/>
         </p:spPr>
         <p:txBody>
-          <a:bodyPr wrap="none" lIns="36576" rIns="36576" tIns="36576" bIns="36576" anchor="ctr">
+          <a:bodyPr wrap="square" lIns="36576" rIns="36576" tIns="36576" bIns="36576" anchor="ctr">
             <a:spAutoFit/>
           </a:bodyPr>
           <a:lstStyle/>
@@ -3735,7 +3737,7 @@
                 <a:solidFill>
                   <a:srgbClr val="122034"/>
                 </a:solidFill>
-                <a:latin typeface="Aptos"/>
+                <a:latin typeface="Liberation Sans"/>
               </a:rPr>
               <a:t>Every critical asset has a passport and a plan</a:t>
             </a:r>
@@ -3759,7 +3761,7 @@
           <a:noFill/>
         </p:spPr>
         <p:txBody>
-          <a:bodyPr wrap="none" lIns="36576" rIns="36576" tIns="36576" bIns="36576" anchor="ctr">
+          <a:bodyPr wrap="square" lIns="36576" rIns="36576" tIns="36576" bIns="36576" anchor="ctr">
             <a:spAutoFit/>
           </a:bodyPr>
           <a:lstStyle/>
@@ -3768,9 +3770,9 @@
             <a:r>
               <a:rPr sz="1300" b="0">
                 <a:solidFill>
-                  <a:srgbClr val="556982"/>
-                </a:solidFill>
-                <a:latin typeface="Aptos"/>
+                  <a:srgbClr val="37495E"/>
+                </a:solidFill>
+                <a:latin typeface="Liberation Sans"/>
               </a:rPr>
               <a:t>From onboarding to preventive maintenance, condition history and replacement decisions.</a:t>
             </a:r>
@@ -3794,7 +3796,7 @@
           <a:noFill/>
         </p:spPr>
         <p:txBody>
-          <a:bodyPr wrap="none" lIns="36576" rIns="36576" tIns="36576" bIns="36576" anchor="ctr">
+          <a:bodyPr wrap="square" lIns="36576" rIns="36576" tIns="36576" bIns="36576" anchor="ctr">
             <a:spAutoFit/>
           </a:bodyPr>
           <a:lstStyle/>
@@ -3805,7 +3807,7 @@
                 <a:solidFill>
                   <a:srgbClr val="DE232A"/>
                 </a:solidFill>
-                <a:latin typeface="Aptos"/>
+                <a:latin typeface="Liberation Sans"/>
               </a:rPr>
               <a:t>09</a:t>
             </a:r>
@@ -3866,7 +3868,7 @@
                 <a:solidFill>
                   <a:srgbClr val="122034"/>
                 </a:solidFill>
-                <a:latin typeface="Aptos"/>
+                <a:latin typeface="Liberation Sans"/>
               </a:defRPr>
             </a:pPr>
             <a:r>
@@ -3882,7 +3884,7 @@
                 <a:solidFill>
                   <a:srgbClr val="122034"/>
                 </a:solidFill>
-                <a:latin typeface="Aptos"/>
+                <a:latin typeface="Liberation Sans"/>
               </a:defRPr>
             </a:pPr>
             <a:r>
@@ -3898,7 +3900,7 @@
                 <a:solidFill>
                   <a:srgbClr val="122034"/>
                 </a:solidFill>
-                <a:latin typeface="Aptos"/>
+                <a:latin typeface="Liberation Sans"/>
               </a:defRPr>
             </a:pPr>
             <a:r>
@@ -3914,7 +3916,7 @@
                 <a:solidFill>
                   <a:srgbClr val="122034"/>
                 </a:solidFill>
-                <a:latin typeface="Aptos"/>
+                <a:latin typeface="Liberation Sans"/>
               </a:defRPr>
             </a:pPr>
             <a:r>
@@ -3985,7 +3987,7 @@
           <a:noFill/>
         </p:spPr>
         <p:txBody>
-          <a:bodyPr wrap="none" lIns="36576" rIns="36576" tIns="36576" bIns="36576" anchor="ctr">
+          <a:bodyPr wrap="square" lIns="36576" rIns="36576" tIns="36576" bIns="36576" anchor="ctr">
             <a:spAutoFit/>
           </a:bodyPr>
           <a:lstStyle/>
@@ -3996,7 +3998,7 @@
                 <a:solidFill>
                   <a:srgbClr val="0A213D"/>
                 </a:solidFill>
-                <a:latin typeface="Aptos"/>
+                <a:latin typeface="Liberation Sans"/>
               </a:rPr>
               <a:t>PROOF</a:t>
             </a:r>
@@ -4020,7 +4022,7 @@
           <a:noFill/>
         </p:spPr>
         <p:txBody>
-          <a:bodyPr wrap="none" lIns="36576" rIns="36576" tIns="36576" bIns="36576" anchor="ctr">
+          <a:bodyPr wrap="square" lIns="36576" rIns="36576" tIns="36576" bIns="36576" anchor="ctr">
             <a:spAutoFit/>
           </a:bodyPr>
           <a:lstStyle/>
@@ -4031,7 +4033,7 @@
                 <a:solidFill>
                   <a:srgbClr val="0A213D"/>
                 </a:solidFill>
-                <a:latin typeface="Aptos"/>
+                <a:latin typeface="Liberation Sans"/>
               </a:rPr>
               <a:t>The asset register is operational: it drives schedules, work, compliance and lifecycle decisions.</a:t>
             </a:r>
@@ -4150,7 +4152,7 @@
           <a:noFill/>
         </p:spPr>
         <p:txBody>
-          <a:bodyPr wrap="none" lIns="36576" rIns="36576" tIns="36576" bIns="36576" anchor="ctr">
+          <a:bodyPr wrap="square" lIns="36576" rIns="36576" tIns="36576" bIns="36576" anchor="ctr">
             <a:spAutoFit/>
           </a:bodyPr>
           <a:lstStyle/>
@@ -4161,7 +4163,7 @@
                 <a:solidFill>
                   <a:srgbClr val="0A213D"/>
                 </a:solidFill>
-                <a:latin typeface="Aptos"/>
+                <a:latin typeface="Liberation Sans"/>
               </a:rPr>
               <a:t>CeEst ERP</a:t>
             </a:r>
@@ -4185,7 +4187,7 @@
           <a:noFill/>
         </p:spPr>
         <p:txBody>
-          <a:bodyPr wrap="none" lIns="36576" rIns="36576" tIns="36576" bIns="36576" anchor="ctr">
+          <a:bodyPr wrap="square" lIns="36576" rIns="36576" tIns="36576" bIns="36576" anchor="ctr">
             <a:spAutoFit/>
           </a:bodyPr>
           <a:lstStyle/>
@@ -4194,9 +4196,9 @@
             <a:r>
               <a:rPr sz="800" b="1">
                 <a:solidFill>
-                  <a:srgbClr val="556982"/>
-                </a:solidFill>
-                <a:latin typeface="Aptos"/>
+                  <a:srgbClr val="37495E"/>
+                </a:solidFill>
+                <a:latin typeface="Liberation Sans"/>
               </a:rPr>
               <a:t>PROPERTY  •  FACILITY  •  PERFORMANCE</a:t>
             </a:r>
@@ -4220,7 +4222,7 @@
           <a:noFill/>
         </p:spPr>
         <p:txBody>
-          <a:bodyPr wrap="none" lIns="36576" rIns="36576" tIns="36576" bIns="36576" anchor="ctr">
+          <a:bodyPr wrap="square" lIns="36576" rIns="36576" tIns="36576" bIns="36576" anchor="ctr">
             <a:spAutoFit/>
           </a:bodyPr>
           <a:lstStyle/>
@@ -4231,7 +4233,7 @@
                 <a:solidFill>
                   <a:srgbClr val="DE232A"/>
                 </a:solidFill>
-                <a:latin typeface="Aptos"/>
+                <a:latin typeface="Liberation Sans"/>
               </a:rPr>
               <a:t>SERVICE ARCHITECTURE</a:t>
             </a:r>
@@ -4255,7 +4257,7 @@
           <a:noFill/>
         </p:spPr>
         <p:txBody>
-          <a:bodyPr wrap="none" lIns="36576" rIns="36576" tIns="36576" bIns="36576" anchor="ctr">
+          <a:bodyPr wrap="square" lIns="36576" rIns="36576" tIns="36576" bIns="36576" anchor="ctr">
             <a:spAutoFit/>
           </a:bodyPr>
           <a:lstStyle/>
@@ -4266,7 +4268,7 @@
                 <a:solidFill>
                   <a:srgbClr val="122034"/>
                 </a:solidFill>
-                <a:latin typeface="Aptos"/>
+                <a:latin typeface="Liberation Sans"/>
               </a:rPr>
               <a:t>Define WHAT before assigning WHO</a:t>
             </a:r>
@@ -4290,7 +4292,7 @@
           <a:noFill/>
         </p:spPr>
         <p:txBody>
-          <a:bodyPr wrap="none" lIns="36576" rIns="36576" tIns="36576" bIns="36576" anchor="ctr">
+          <a:bodyPr wrap="square" lIns="36576" rIns="36576" tIns="36576" bIns="36576" anchor="ctr">
             <a:spAutoFit/>
           </a:bodyPr>
           <a:lstStyle/>
@@ -4299,9 +4301,9 @@
             <a:r>
               <a:rPr sz="1300" b="0">
                 <a:solidFill>
-                  <a:srgbClr val="556982"/>
-                </a:solidFill>
-                <a:latin typeface="Aptos"/>
+                  <a:srgbClr val="37495E"/>
+                </a:solidFill>
+                <a:latin typeface="Liberation Sans"/>
               </a:rPr>
               <a:t>Service Profiles remain stable while providers, contracts and performance can change.</a:t>
             </a:r>
@@ -4325,7 +4327,7 @@
           <a:noFill/>
         </p:spPr>
         <p:txBody>
-          <a:bodyPr wrap="none" lIns="36576" rIns="36576" tIns="36576" bIns="36576" anchor="ctr">
+          <a:bodyPr wrap="square" lIns="36576" rIns="36576" tIns="36576" bIns="36576" anchor="ctr">
             <a:spAutoFit/>
           </a:bodyPr>
           <a:lstStyle/>
@@ -4336,7 +4338,7 @@
                 <a:solidFill>
                   <a:srgbClr val="DE232A"/>
                 </a:solidFill>
-                <a:latin typeface="Aptos"/>
+                <a:latin typeface="Liberation Sans"/>
               </a:rPr>
               <a:t>10</a:t>
             </a:r>
@@ -4405,7 +4407,7 @@
           <a:noFill/>
         </p:spPr>
         <p:txBody>
-          <a:bodyPr wrap="none" lIns="36576" rIns="36576" tIns="36576" bIns="36576" anchor="ctr">
+          <a:bodyPr wrap="square" lIns="36576" rIns="36576" tIns="36576" bIns="36576" anchor="ctr">
             <a:spAutoFit/>
           </a:bodyPr>
           <a:lstStyle/>
@@ -4416,7 +4418,7 @@
                 <a:solidFill>
                   <a:srgbClr val="12365B"/>
                 </a:solidFill>
-                <a:latin typeface="Aptos"/>
+                <a:latin typeface="Liberation Sans"/>
               </a:rPr>
               <a:t>SERVICE</a:t>
             </a:r>
@@ -4444,7 +4446,7 @@
           <a:noFill/>
         </p:spPr>
         <p:txBody>
-          <a:bodyPr wrap="none" lIns="36576" rIns="36576" tIns="36576" bIns="36576" anchor="ctr">
+          <a:bodyPr wrap="square" lIns="36576" rIns="36576" tIns="36576" bIns="36576" anchor="ctr">
             <a:spAutoFit/>
           </a:bodyPr>
           <a:lstStyle/>
@@ -4453,9 +4455,9 @@
             <a:r>
               <a:rPr sz="1000" b="0">
                 <a:solidFill>
-                  <a:srgbClr val="556982"/>
-                </a:solidFill>
-                <a:latin typeface="Aptos"/>
+                  <a:srgbClr val="37495E"/>
+                </a:solidFill>
+                <a:latin typeface="Liberation Sans"/>
               </a:rPr>
               <a:t>What is required</a:t>
             </a:r>
@@ -4479,7 +4481,7 @@
           <a:noFill/>
         </p:spPr>
         <p:txBody>
-          <a:bodyPr wrap="none" lIns="36576" rIns="36576" tIns="36576" bIns="36576" anchor="ctr">
+          <a:bodyPr wrap="square" lIns="36576" rIns="36576" tIns="36576" bIns="36576" anchor="ctr">
             <a:spAutoFit/>
           </a:bodyPr>
           <a:lstStyle/>
@@ -4488,9 +4490,9 @@
             <a:r>
               <a:rPr sz="1700" b="1">
                 <a:solidFill>
-                  <a:srgbClr val="556982"/>
-                </a:solidFill>
-                <a:latin typeface="Aptos"/>
+                  <a:srgbClr val="37495E"/>
+                </a:solidFill>
+                <a:latin typeface="Liberation Sans"/>
               </a:rPr>
               <a:t>→</a:t>
             </a:r>
@@ -4559,7 +4561,7 @@
           <a:noFill/>
         </p:spPr>
         <p:txBody>
-          <a:bodyPr wrap="none" lIns="36576" rIns="36576" tIns="36576" bIns="36576" anchor="ctr">
+          <a:bodyPr wrap="square" lIns="36576" rIns="36576" tIns="36576" bIns="36576" anchor="ctr">
             <a:spAutoFit/>
           </a:bodyPr>
           <a:lstStyle/>
@@ -4570,7 +4572,7 @@
                 <a:solidFill>
                   <a:srgbClr val="DE232A"/>
                 </a:solidFill>
-                <a:latin typeface="Aptos"/>
+                <a:latin typeface="Liberation Sans"/>
               </a:rPr>
               <a:t>PROVIDER</a:t>
             </a:r>
@@ -4594,7 +4596,7 @@
           <a:noFill/>
         </p:spPr>
         <p:txBody>
-          <a:bodyPr wrap="none" lIns="36576" rIns="36576" tIns="36576" bIns="36576" anchor="ctr">
+          <a:bodyPr wrap="square" lIns="36576" rIns="36576" tIns="36576" bIns="36576" anchor="ctr">
             <a:spAutoFit/>
           </a:bodyPr>
           <a:lstStyle/>
@@ -4603,9 +4605,9 @@
             <a:r>
               <a:rPr sz="1000" b="0">
                 <a:solidFill>
-                  <a:srgbClr val="556982"/>
-                </a:solidFill>
-                <a:latin typeface="Aptos"/>
+                  <a:srgbClr val="37495E"/>
+                </a:solidFill>
+                <a:latin typeface="Liberation Sans"/>
               </a:rPr>
               <a:t>Who delivers</a:t>
             </a:r>
@@ -4629,7 +4631,7 @@
           <a:noFill/>
         </p:spPr>
         <p:txBody>
-          <a:bodyPr wrap="none" lIns="36576" rIns="36576" tIns="36576" bIns="36576" anchor="ctr">
+          <a:bodyPr wrap="square" lIns="36576" rIns="36576" tIns="36576" bIns="36576" anchor="ctr">
             <a:spAutoFit/>
           </a:bodyPr>
           <a:lstStyle/>
@@ -4638,9 +4640,9 @@
             <a:r>
               <a:rPr sz="1700" b="1">
                 <a:solidFill>
-                  <a:srgbClr val="556982"/>
-                </a:solidFill>
-                <a:latin typeface="Aptos"/>
+                  <a:srgbClr val="37495E"/>
+                </a:solidFill>
+                <a:latin typeface="Liberation Sans"/>
               </a:rPr>
               <a:t>→</a:t>
             </a:r>
@@ -4709,7 +4711,7 @@
           <a:noFill/>
         </p:spPr>
         <p:txBody>
-          <a:bodyPr wrap="none" lIns="36576" rIns="36576" tIns="36576" bIns="36576" anchor="ctr">
+          <a:bodyPr wrap="square" lIns="36576" rIns="36576" tIns="36576" bIns="36576" anchor="ctr">
             <a:spAutoFit/>
           </a:bodyPr>
           <a:lstStyle/>
@@ -4720,7 +4722,7 @@
                 <a:solidFill>
                   <a:srgbClr val="00918A"/>
                 </a:solidFill>
-                <a:latin typeface="Aptos"/>
+                <a:latin typeface="Liberation Sans"/>
               </a:rPr>
               <a:t>PROPERTY</a:t>
             </a:r>
@@ -4748,7 +4750,7 @@
           <a:noFill/>
         </p:spPr>
         <p:txBody>
-          <a:bodyPr wrap="none" lIns="36576" rIns="36576" tIns="36576" bIns="36576" anchor="ctr">
+          <a:bodyPr wrap="square" lIns="36576" rIns="36576" tIns="36576" bIns="36576" anchor="ctr">
             <a:spAutoFit/>
           </a:bodyPr>
           <a:lstStyle/>
@@ -4757,9 +4759,9 @@
             <a:r>
               <a:rPr sz="1000" b="0">
                 <a:solidFill>
-                  <a:srgbClr val="556982"/>
-                </a:solidFill>
-                <a:latin typeface="Aptos"/>
+                  <a:srgbClr val="37495E"/>
+                </a:solidFill>
+                <a:latin typeface="Liberation Sans"/>
               </a:rPr>
               <a:t>Where it applies</a:t>
             </a:r>
@@ -4783,7 +4785,7 @@
           <a:noFill/>
         </p:spPr>
         <p:txBody>
-          <a:bodyPr wrap="none" lIns="36576" rIns="36576" tIns="36576" bIns="36576" anchor="ctr">
+          <a:bodyPr wrap="square" lIns="36576" rIns="36576" tIns="36576" bIns="36576" anchor="ctr">
             <a:spAutoFit/>
           </a:bodyPr>
           <a:lstStyle/>
@@ -4792,9 +4794,9 @@
             <a:r>
               <a:rPr sz="1700" b="1">
                 <a:solidFill>
-                  <a:srgbClr val="556982"/>
-                </a:solidFill>
-                <a:latin typeface="Aptos"/>
+                  <a:srgbClr val="37495E"/>
+                </a:solidFill>
+                <a:latin typeface="Liberation Sans"/>
               </a:rPr>
               <a:t>→</a:t>
             </a:r>
@@ -4863,7 +4865,7 @@
           <a:noFill/>
         </p:spPr>
         <p:txBody>
-          <a:bodyPr wrap="none" lIns="36576" rIns="36576" tIns="36576" bIns="36576" anchor="ctr">
+          <a:bodyPr wrap="square" lIns="36576" rIns="36576" tIns="36576" bIns="36576" anchor="ctr">
             <a:spAutoFit/>
           </a:bodyPr>
           <a:lstStyle/>
@@ -4874,7 +4876,7 @@
                 <a:solidFill>
                   <a:srgbClr val="EA8614"/>
                 </a:solidFill>
-                <a:latin typeface="Aptos"/>
+                <a:latin typeface="Liberation Sans"/>
               </a:rPr>
               <a:t>CONTRACT /</a:t>
             </a:r>
@@ -4902,7 +4904,7 @@
           <a:noFill/>
         </p:spPr>
         <p:txBody>
-          <a:bodyPr wrap="none" lIns="36576" rIns="36576" tIns="36576" bIns="36576" anchor="ctr">
+          <a:bodyPr wrap="square" lIns="36576" rIns="36576" tIns="36576" bIns="36576" anchor="ctr">
             <a:spAutoFit/>
           </a:bodyPr>
           <a:lstStyle/>
@@ -4911,9 +4913,9 @@
             <a:r>
               <a:rPr sz="1000" b="0">
                 <a:solidFill>
-                  <a:srgbClr val="556982"/>
-                </a:solidFill>
-                <a:latin typeface="Aptos"/>
+                  <a:srgbClr val="37495E"/>
+                </a:solidFill>
+                <a:latin typeface="Liberation Sans"/>
               </a:rPr>
               <a:t>Expected standard</a:t>
             </a:r>
@@ -4937,7 +4939,7 @@
           <a:noFill/>
         </p:spPr>
         <p:txBody>
-          <a:bodyPr wrap="none" lIns="36576" rIns="36576" tIns="36576" bIns="36576" anchor="ctr">
+          <a:bodyPr wrap="square" lIns="36576" rIns="36576" tIns="36576" bIns="36576" anchor="ctr">
             <a:spAutoFit/>
           </a:bodyPr>
           <a:lstStyle/>
@@ -4946,9 +4948,9 @@
             <a:r>
               <a:rPr sz="1700" b="1">
                 <a:solidFill>
-                  <a:srgbClr val="556982"/>
-                </a:solidFill>
-                <a:latin typeface="Aptos"/>
+                  <a:srgbClr val="37495E"/>
+                </a:solidFill>
+                <a:latin typeface="Liberation Sans"/>
               </a:rPr>
               <a:t>→</a:t>
             </a:r>
@@ -5017,7 +5019,7 @@
           <a:noFill/>
         </p:spPr>
         <p:txBody>
-          <a:bodyPr wrap="none" lIns="36576" rIns="36576" tIns="36576" bIns="36576" anchor="ctr">
+          <a:bodyPr wrap="square" lIns="36576" rIns="36576" tIns="36576" bIns="36576" anchor="ctr">
             <a:spAutoFit/>
           </a:bodyPr>
           <a:lstStyle/>
@@ -5028,7 +5030,7 @@
                 <a:solidFill>
                   <a:srgbClr val="0A213D"/>
                 </a:solidFill>
-                <a:latin typeface="Aptos"/>
+                <a:latin typeface="Liberation Sans"/>
               </a:rPr>
               <a:t>WORK &amp;</a:t>
             </a:r>
@@ -5056,7 +5058,7 @@
           <a:noFill/>
         </p:spPr>
         <p:txBody>
-          <a:bodyPr wrap="none" lIns="36576" rIns="36576" tIns="36576" bIns="36576" anchor="ctr">
+          <a:bodyPr wrap="square" lIns="36576" rIns="36576" tIns="36576" bIns="36576" anchor="ctr">
             <a:spAutoFit/>
           </a:bodyPr>
           <a:lstStyle/>
@@ -5065,9 +5067,9 @@
             <a:r>
               <a:rPr sz="1000" b="0">
                 <a:solidFill>
-                  <a:srgbClr val="556982"/>
-                </a:solidFill>
-                <a:latin typeface="Aptos"/>
+                  <a:srgbClr val="37495E"/>
+                </a:solidFill>
+                <a:latin typeface="Liberation Sans"/>
               </a:rPr>
               <a:t>Evidence</a:t>
             </a:r>
@@ -5091,7 +5093,7 @@
           <a:noFill/>
         </p:spPr>
         <p:txBody>
-          <a:bodyPr wrap="none" lIns="36576" rIns="36576" tIns="36576" bIns="36576" anchor="ctr">
+          <a:bodyPr wrap="square" lIns="36576" rIns="36576" tIns="36576" bIns="36576" anchor="ctr">
             <a:spAutoFit/>
           </a:bodyPr>
           <a:lstStyle/>
@@ -5100,9 +5102,9 @@
             <a:r>
               <a:rPr sz="1700" b="1">
                 <a:solidFill>
-                  <a:srgbClr val="556982"/>
-                </a:solidFill>
-                <a:latin typeface="Aptos"/>
+                  <a:srgbClr val="37495E"/>
+                </a:solidFill>
+                <a:latin typeface="Liberation Sans"/>
               </a:rPr>
               <a:t>→</a:t>
             </a:r>
@@ -5171,7 +5173,7 @@
           <a:noFill/>
         </p:spPr>
         <p:txBody>
-          <a:bodyPr wrap="none" lIns="36576" rIns="36576" tIns="36576" bIns="36576" anchor="ctr">
+          <a:bodyPr wrap="square" lIns="36576" rIns="36576" tIns="36576" bIns="36576" anchor="ctr">
             <a:spAutoFit/>
           </a:bodyPr>
           <a:lstStyle/>
@@ -5182,7 +5184,7 @@
                 <a:solidFill>
                   <a:srgbClr val="16A34A"/>
                 </a:solidFill>
-                <a:latin typeface="Aptos"/>
+                <a:latin typeface="Liberation Sans"/>
               </a:rPr>
               <a:t>KPI / COST</a:t>
             </a:r>
@@ -5206,7 +5208,7 @@
           <a:noFill/>
         </p:spPr>
         <p:txBody>
-          <a:bodyPr wrap="none" lIns="36576" rIns="36576" tIns="36576" bIns="36576" anchor="ctr">
+          <a:bodyPr wrap="square" lIns="36576" rIns="36576" tIns="36576" bIns="36576" anchor="ctr">
             <a:spAutoFit/>
           </a:bodyPr>
           <a:lstStyle/>
@@ -5215,9 +5217,9 @@
             <a:r>
               <a:rPr sz="1000" b="0">
                 <a:solidFill>
-                  <a:srgbClr val="556982"/>
-                </a:solidFill>
-                <a:latin typeface="Aptos"/>
+                  <a:srgbClr val="37495E"/>
+                </a:solidFill>
+                <a:latin typeface="Liberation Sans"/>
               </a:rPr>
               <a:t>Outcome</a:t>
             </a:r>
@@ -5254,7 +5256,7 @@
                 <a:solidFill>
                   <a:srgbClr val="122034"/>
                 </a:solidFill>
-                <a:latin typeface="Aptos"/>
+                <a:latin typeface="Liberation Sans"/>
               </a:defRPr>
             </a:pPr>
             <a:r>
@@ -5270,7 +5272,7 @@
                 <a:solidFill>
                   <a:srgbClr val="122034"/>
                 </a:solidFill>
-                <a:latin typeface="Aptos"/>
+                <a:latin typeface="Liberation Sans"/>
               </a:defRPr>
             </a:pPr>
             <a:r>
@@ -5341,7 +5343,7 @@
           <a:noFill/>
         </p:spPr>
         <p:txBody>
-          <a:bodyPr wrap="none" lIns="36576" rIns="36576" tIns="36576" bIns="36576" anchor="ctr">
+          <a:bodyPr wrap="square" lIns="36576" rIns="36576" tIns="36576" bIns="36576" anchor="ctr">
             <a:spAutoFit/>
           </a:bodyPr>
           <a:lstStyle/>
@@ -5352,7 +5354,7 @@
                 <a:solidFill>
                   <a:srgbClr val="0A213D"/>
                 </a:solidFill>
-                <a:latin typeface="Aptos"/>
+                <a:latin typeface="Liberation Sans"/>
               </a:rPr>
               <a:t>PROOF</a:t>
             </a:r>
@@ -5376,7 +5378,7 @@
           <a:noFill/>
         </p:spPr>
         <p:txBody>
-          <a:bodyPr wrap="none" lIns="36576" rIns="36576" tIns="36576" bIns="36576" anchor="ctr">
+          <a:bodyPr wrap="square" lIns="36576" rIns="36576" tIns="36576" bIns="36576" anchor="ctr">
             <a:spAutoFit/>
           </a:bodyPr>
           <a:lstStyle/>
@@ -5387,7 +5389,7 @@
                 <a:solidFill>
                   <a:srgbClr val="0A213D"/>
                 </a:solidFill>
-                <a:latin typeface="Aptos"/>
+                <a:latin typeface="Liberation Sans"/>
               </a:rPr>
               <a:t>Provider selection is separated from the enduring service standard used for SLA and KPI measurement.</a:t>
             </a:r>
@@ -5506,7 +5508,7 @@
           <a:noFill/>
         </p:spPr>
         <p:txBody>
-          <a:bodyPr wrap="none" lIns="36576" rIns="36576" tIns="36576" bIns="36576" anchor="ctr">
+          <a:bodyPr wrap="square" lIns="36576" rIns="36576" tIns="36576" bIns="36576" anchor="ctr">
             <a:spAutoFit/>
           </a:bodyPr>
           <a:lstStyle/>
@@ -5517,7 +5519,7 @@
                 <a:solidFill>
                   <a:srgbClr val="0A213D"/>
                 </a:solidFill>
-                <a:latin typeface="Aptos"/>
+                <a:latin typeface="Liberation Sans"/>
               </a:rPr>
               <a:t>CeEst ERP</a:t>
             </a:r>
@@ -5541,7 +5543,7 @@
           <a:noFill/>
         </p:spPr>
         <p:txBody>
-          <a:bodyPr wrap="none" lIns="36576" rIns="36576" tIns="36576" bIns="36576" anchor="ctr">
+          <a:bodyPr wrap="square" lIns="36576" rIns="36576" tIns="36576" bIns="36576" anchor="ctr">
             <a:spAutoFit/>
           </a:bodyPr>
           <a:lstStyle/>
@@ -5550,9 +5552,9 @@
             <a:r>
               <a:rPr sz="800" b="1">
                 <a:solidFill>
-                  <a:srgbClr val="556982"/>
-                </a:solidFill>
-                <a:latin typeface="Aptos"/>
+                  <a:srgbClr val="37495E"/>
+                </a:solidFill>
+                <a:latin typeface="Liberation Sans"/>
               </a:rPr>
               <a:t>PROPERTY  •  FACILITY  •  PERFORMANCE</a:t>
             </a:r>
@@ -5576,7 +5578,7 @@
           <a:noFill/>
         </p:spPr>
         <p:txBody>
-          <a:bodyPr wrap="none" lIns="36576" rIns="36576" tIns="36576" bIns="36576" anchor="ctr">
+          <a:bodyPr wrap="square" lIns="36576" rIns="36576" tIns="36576" bIns="36576" anchor="ctr">
             <a:spAutoFit/>
           </a:bodyPr>
           <a:lstStyle/>
@@ -5587,7 +5589,7 @@
                 <a:solidFill>
                   <a:srgbClr val="DE232A"/>
                 </a:solidFill>
-                <a:latin typeface="Aptos"/>
+                <a:latin typeface="Liberation Sans"/>
               </a:rPr>
               <a:t>PERFORMANCE</a:t>
             </a:r>
@@ -5611,7 +5613,7 @@
           <a:noFill/>
         </p:spPr>
         <p:txBody>
-          <a:bodyPr wrap="none" lIns="36576" rIns="36576" tIns="36576" bIns="36576" anchor="ctr">
+          <a:bodyPr wrap="square" lIns="36576" rIns="36576" tIns="36576" bIns="36576" anchor="ctr">
             <a:spAutoFit/>
           </a:bodyPr>
           <a:lstStyle/>
@@ -5622,7 +5624,7 @@
                 <a:solidFill>
                   <a:srgbClr val="122034"/>
                 </a:solidFill>
-                <a:latin typeface="Aptos"/>
+                <a:latin typeface="Liberation Sans"/>
               </a:rPr>
               <a:t>Transactions become management insight</a:t>
             </a:r>
@@ -5646,7 +5648,7 @@
           <a:noFill/>
         </p:spPr>
         <p:txBody>
-          <a:bodyPr wrap="none" lIns="36576" rIns="36576" tIns="36576" bIns="36576" anchor="ctr">
+          <a:bodyPr wrap="square" lIns="36576" rIns="36576" tIns="36576" bIns="36576" anchor="ctr">
             <a:spAutoFit/>
           </a:bodyPr>
           <a:lstStyle/>
@@ -5655,9 +5657,9 @@
             <a:r>
               <a:rPr sz="1300" b="0">
                 <a:solidFill>
-                  <a:srgbClr val="556982"/>
-                </a:solidFill>
-                <a:latin typeface="Aptos"/>
+                  <a:srgbClr val="37495E"/>
+                </a:solidFill>
+                <a:latin typeface="Liberation Sans"/>
               </a:rPr>
               <a:t>Use trends and exceptions to answer: What happened? Why? What needs action next?</a:t>
             </a:r>
@@ -5681,7 +5683,7 @@
           <a:noFill/>
         </p:spPr>
         <p:txBody>
-          <a:bodyPr wrap="none" lIns="36576" rIns="36576" tIns="36576" bIns="36576" anchor="ctr">
+          <a:bodyPr wrap="square" lIns="36576" rIns="36576" tIns="36576" bIns="36576" anchor="ctr">
             <a:spAutoFit/>
           </a:bodyPr>
           <a:lstStyle/>
@@ -5692,7 +5694,7 @@
                 <a:solidFill>
                   <a:srgbClr val="DE232A"/>
                 </a:solidFill>
-                <a:latin typeface="Aptos"/>
+                <a:latin typeface="Liberation Sans"/>
               </a:rPr>
               <a:t>11</a:t>
             </a:r>
@@ -5806,7 +5808,7 @@
           <a:noFill/>
         </p:spPr>
         <p:txBody>
-          <a:bodyPr wrap="none" lIns="36576" rIns="36576" tIns="36576" bIns="36576" anchor="ctr">
+          <a:bodyPr wrap="square" lIns="36576" rIns="36576" tIns="36576" bIns="36576" anchor="ctr">
             <a:spAutoFit/>
           </a:bodyPr>
           <a:lstStyle/>
@@ -5817,9 +5819,9 @@
                 <a:solidFill>
                   <a:srgbClr val="16A34A"/>
                 </a:solidFill>
-                <a:latin typeface="Aptos"/>
-              </a:rPr>
-              <a:t>95%</a:t>
+                <a:latin typeface="Liberation Sans"/>
+              </a:rPr>
+              <a:t>✓</a:t>
             </a:r>
           </a:p>
         </p:txBody>
@@ -5841,7 +5843,7 @@
           <a:noFill/>
         </p:spPr>
         <p:txBody>
-          <a:bodyPr wrap="none" lIns="36576" rIns="36576" tIns="36576" bIns="36576" anchor="ctr">
+          <a:bodyPr wrap="square" lIns="36576" rIns="36576" tIns="36576" bIns="36576" anchor="ctr">
             <a:spAutoFit/>
           </a:bodyPr>
           <a:lstStyle/>
@@ -5852,7 +5854,7 @@
                 <a:solidFill>
                   <a:srgbClr val="122034"/>
                 </a:solidFill>
-                <a:latin typeface="Aptos"/>
+                <a:latin typeface="Liberation Sans"/>
               </a:rPr>
               <a:t>PPM compliance</a:t>
             </a:r>
@@ -5868,26 +5870,26 @@
         <p:spPr>
           <a:xfrm>
             <a:off x="822960" y="2852928"/>
-            <a:ext cx="2240280" cy="1819656"/>
-          </a:xfrm>
-          <a:prstGeom prst="rect">
-            <a:avLst/>
-          </a:prstGeom>
-          <a:noFill/>
-        </p:spPr>
-        <p:txBody>
-          <a:bodyPr wrap="none" lIns="36576" rIns="36576" tIns="36576" bIns="36576" anchor="ctr">
-            <a:spAutoFit/>
-          </a:bodyPr>
-          <a:lstStyle/>
-          <a:p>
-            <a:pPr algn="l"/>
-            <a:r>
-              <a:rPr sz="1100" b="0">
-                <a:solidFill>
-                  <a:srgbClr val="556982"/>
-                </a:solidFill>
-                <a:latin typeface="Aptos"/>
+            <a:ext cx="2240280" cy="1764792"/>
+          </a:xfrm>
+          <a:prstGeom prst="rect">
+            <a:avLst/>
+          </a:prstGeom>
+          <a:noFill/>
+        </p:spPr>
+        <p:txBody>
+          <a:bodyPr wrap="square" lIns="18288" rIns="18288" tIns="18288" bIns="18288" anchor="t">
+            <a:spAutoFit/>
+          </a:bodyPr>
+          <a:lstStyle/>
+          <a:p>
+            <a:pPr algn="l"/>
+            <a:r>
+              <a:rPr sz="1150" b="0">
+                <a:solidFill>
+                  <a:srgbClr val="37495E"/>
+                </a:solidFill>
+                <a:latin typeface="Liberation Sans"/>
               </a:rPr>
               <a:t>Completed on time, overdue and upcoming preventive work.</a:t>
             </a:r>
@@ -6001,7 +6003,7 @@
           <a:noFill/>
         </p:spPr>
         <p:txBody>
-          <a:bodyPr wrap="none" lIns="36576" rIns="36576" tIns="36576" bIns="36576" anchor="ctr">
+          <a:bodyPr wrap="square" lIns="36576" rIns="36576" tIns="36576" bIns="36576" anchor="ctr">
             <a:spAutoFit/>
           </a:bodyPr>
           <a:lstStyle/>
@@ -6012,9 +6014,9 @@
                 <a:solidFill>
                   <a:srgbClr val="DE232A"/>
                 </a:solidFill>
-                <a:latin typeface="Aptos"/>
-              </a:rPr>
-              <a:t>SLA</a:t>
+                <a:latin typeface="Liberation Sans"/>
+              </a:rPr>
+              <a:t>◷</a:t>
             </a:r>
           </a:p>
         </p:txBody>
@@ -6036,7 +6038,7 @@
           <a:noFill/>
         </p:spPr>
         <p:txBody>
-          <a:bodyPr wrap="none" lIns="36576" rIns="36576" tIns="36576" bIns="36576" anchor="ctr">
+          <a:bodyPr wrap="square" lIns="36576" rIns="36576" tIns="36576" bIns="36576" anchor="ctr">
             <a:spAutoFit/>
           </a:bodyPr>
           <a:lstStyle/>
@@ -6047,7 +6049,7 @@
                 <a:solidFill>
                   <a:srgbClr val="122034"/>
                 </a:solidFill>
-                <a:latin typeface="Aptos"/>
+                <a:latin typeface="Liberation Sans"/>
               </a:rPr>
               <a:t>SLA performance</a:t>
             </a:r>
@@ -6063,26 +6065,26 @@
         <p:spPr>
           <a:xfrm>
             <a:off x="3730752" y="2852928"/>
-            <a:ext cx="2240280" cy="1819656"/>
-          </a:xfrm>
-          <a:prstGeom prst="rect">
-            <a:avLst/>
-          </a:prstGeom>
-          <a:noFill/>
-        </p:spPr>
-        <p:txBody>
-          <a:bodyPr wrap="none" lIns="36576" rIns="36576" tIns="36576" bIns="36576" anchor="ctr">
-            <a:spAutoFit/>
-          </a:bodyPr>
-          <a:lstStyle/>
-          <a:p>
-            <a:pPr algn="l"/>
-            <a:r>
-              <a:rPr sz="1100" b="0">
-                <a:solidFill>
-                  <a:srgbClr val="556982"/>
-                </a:solidFill>
-                <a:latin typeface="Aptos"/>
+            <a:ext cx="2240280" cy="1764792"/>
+          </a:xfrm>
+          <a:prstGeom prst="rect">
+            <a:avLst/>
+          </a:prstGeom>
+          <a:noFill/>
+        </p:spPr>
+        <p:txBody>
+          <a:bodyPr wrap="square" lIns="18288" rIns="18288" tIns="18288" bIns="18288" anchor="t">
+            <a:spAutoFit/>
+          </a:bodyPr>
+          <a:lstStyle/>
+          <a:p>
+            <a:pPr algn="l"/>
+            <a:r>
+              <a:rPr sz="1150" b="0">
+                <a:solidFill>
+                  <a:srgbClr val="37495E"/>
+                </a:solidFill>
+                <a:latin typeface="Liberation Sans"/>
               </a:rPr>
               <a:t>Response and resolution time by priority, team and provider.</a:t>
             </a:r>
@@ -6196,7 +6198,7 @@
           <a:noFill/>
         </p:spPr>
         <p:txBody>
-          <a:bodyPr wrap="none" lIns="36576" rIns="36576" tIns="36576" bIns="36576" anchor="ctr">
+          <a:bodyPr wrap="square" lIns="36576" rIns="36576" tIns="36576" bIns="36576" anchor="ctr">
             <a:spAutoFit/>
           </a:bodyPr>
           <a:lstStyle/>
@@ -6207,9 +6209,9 @@
                 <a:solidFill>
                   <a:srgbClr val="EA8614"/>
                 </a:solidFill>
-                <a:latin typeface="Aptos"/>
-              </a:rPr>
-              <a:t>KES</a:t>
+                <a:latin typeface="Liberation Sans"/>
+              </a:rPr>
+              <a:t>↗</a:t>
             </a:r>
           </a:p>
         </p:txBody>
@@ -6231,7 +6233,7 @@
           <a:noFill/>
         </p:spPr>
         <p:txBody>
-          <a:bodyPr wrap="none" lIns="36576" rIns="36576" tIns="36576" bIns="36576" anchor="ctr">
+          <a:bodyPr wrap="square" lIns="36576" rIns="36576" tIns="36576" bIns="36576" anchor="ctr">
             <a:spAutoFit/>
           </a:bodyPr>
           <a:lstStyle/>
@@ -6242,7 +6244,7 @@
                 <a:solidFill>
                   <a:srgbClr val="122034"/>
                 </a:solidFill>
-                <a:latin typeface="Aptos"/>
+                <a:latin typeface="Liberation Sans"/>
               </a:rPr>
               <a:t>Financial control</a:t>
             </a:r>
@@ -6258,26 +6260,26 @@
         <p:spPr>
           <a:xfrm>
             <a:off x="6638544" y="2852928"/>
-            <a:ext cx="2240280" cy="1819656"/>
-          </a:xfrm>
-          <a:prstGeom prst="rect">
-            <a:avLst/>
-          </a:prstGeom>
-          <a:noFill/>
-        </p:spPr>
-        <p:txBody>
-          <a:bodyPr wrap="none" lIns="36576" rIns="36576" tIns="36576" bIns="36576" anchor="ctr">
-            <a:spAutoFit/>
-          </a:bodyPr>
-          <a:lstStyle/>
-          <a:p>
-            <a:pPr algn="l"/>
-            <a:r>
-              <a:rPr sz="1100" b="0">
-                <a:solidFill>
-                  <a:srgbClr val="556982"/>
-                </a:solidFill>
-                <a:latin typeface="Aptos"/>
+            <a:ext cx="2240280" cy="1764792"/>
+          </a:xfrm>
+          <a:prstGeom prst="rect">
+            <a:avLst/>
+          </a:prstGeom>
+          <a:noFill/>
+        </p:spPr>
+        <p:txBody>
+          <a:bodyPr wrap="square" lIns="18288" rIns="18288" tIns="18288" bIns="18288" anchor="t">
+            <a:spAutoFit/>
+          </a:bodyPr>
+          <a:lstStyle/>
+          <a:p>
+            <a:pPr algn="l"/>
+            <a:r>
+              <a:rPr sz="1150" b="0">
+                <a:solidFill>
+                  <a:srgbClr val="37495E"/>
+                </a:solidFill>
+                <a:latin typeface="Liberation Sans"/>
               </a:rPr>
               <a:t>Expected vs actual collections, arrears ageing and budget variance.</a:t>
             </a:r>
@@ -6391,7 +6393,7 @@
           <a:noFill/>
         </p:spPr>
         <p:txBody>
-          <a:bodyPr wrap="none" lIns="36576" rIns="36576" tIns="36576" bIns="36576" anchor="ctr">
+          <a:bodyPr wrap="square" lIns="36576" rIns="36576" tIns="36576" bIns="36576" anchor="ctr">
             <a:spAutoFit/>
           </a:bodyPr>
           <a:lstStyle/>
@@ -6402,7 +6404,7 @@
                 <a:solidFill>
                   <a:srgbClr val="12365B"/>
                 </a:solidFill>
-                <a:latin typeface="Aptos"/>
+                <a:latin typeface="Liberation Sans"/>
               </a:rPr>
               <a:t>!</a:t>
             </a:r>
@@ -6426,7 +6428,7 @@
           <a:noFill/>
         </p:spPr>
         <p:txBody>
-          <a:bodyPr wrap="none" lIns="36576" rIns="36576" tIns="36576" bIns="36576" anchor="ctr">
+          <a:bodyPr wrap="square" lIns="36576" rIns="36576" tIns="36576" bIns="36576" anchor="ctr">
             <a:spAutoFit/>
           </a:bodyPr>
           <a:lstStyle/>
@@ -6437,7 +6439,7 @@
                 <a:solidFill>
                   <a:srgbClr val="122034"/>
                 </a:solidFill>
-                <a:latin typeface="Aptos"/>
+                <a:latin typeface="Liberation Sans"/>
               </a:rPr>
               <a:t>Risk &amp; compliance</a:t>
             </a:r>
@@ -6453,26 +6455,26 @@
         <p:spPr>
           <a:xfrm>
             <a:off x="9546336" y="2852928"/>
-            <a:ext cx="1828800" cy="1819656"/>
-          </a:xfrm>
-          <a:prstGeom prst="rect">
-            <a:avLst/>
-          </a:prstGeom>
-          <a:noFill/>
-        </p:spPr>
-        <p:txBody>
-          <a:bodyPr wrap="none" lIns="36576" rIns="36576" tIns="36576" bIns="36576" anchor="ctr">
-            <a:spAutoFit/>
-          </a:bodyPr>
-          <a:lstStyle/>
-          <a:p>
-            <a:pPr algn="l"/>
-            <a:r>
-              <a:rPr sz="1100" b="0">
-                <a:solidFill>
-                  <a:srgbClr val="556982"/>
-                </a:solidFill>
-                <a:latin typeface="Aptos"/>
+            <a:ext cx="1828800" cy="1764792"/>
+          </a:xfrm>
+          <a:prstGeom prst="rect">
+            <a:avLst/>
+          </a:prstGeom>
+          <a:noFill/>
+        </p:spPr>
+        <p:txBody>
+          <a:bodyPr wrap="square" lIns="18288" rIns="18288" tIns="18288" bIns="18288" anchor="t">
+            <a:spAutoFit/>
+          </a:bodyPr>
+          <a:lstStyle/>
+          <a:p>
+            <a:pPr algn="l"/>
+            <a:r>
+              <a:rPr sz="1150" b="0">
+                <a:solidFill>
+                  <a:srgbClr val="37495E"/>
+                </a:solidFill>
+                <a:latin typeface="Liberation Sans"/>
               </a:rPr>
               <a:t>Expiries, incidents, recurring defects and approvals.</a:t>
             </a:r>
@@ -6496,7 +6498,7 @@
           <a:noFill/>
         </p:spPr>
         <p:txBody>
-          <a:bodyPr wrap="none" lIns="36576" rIns="36576" tIns="36576" bIns="36576" anchor="ctr">
+          <a:bodyPr wrap="square" lIns="36576" rIns="36576" tIns="36576" bIns="36576" anchor="ctr">
             <a:spAutoFit/>
           </a:bodyPr>
           <a:lstStyle/>
@@ -6507,7 +6509,7 @@
                 <a:solidFill>
                   <a:srgbClr val="122034"/>
                 </a:solidFill>
-                <a:latin typeface="Aptos"/>
+                <a:latin typeface="Liberation Sans"/>
               </a:rPr>
               <a:t>Drill from every metric to the source record during the demo.</a:t>
             </a:r>
@@ -6576,7 +6578,7 @@
           <a:noFill/>
         </p:spPr>
         <p:txBody>
-          <a:bodyPr wrap="none" lIns="36576" rIns="36576" tIns="36576" bIns="36576" anchor="ctr">
+          <a:bodyPr wrap="square" lIns="36576" rIns="36576" tIns="36576" bIns="36576" anchor="ctr">
             <a:spAutoFit/>
           </a:bodyPr>
           <a:lstStyle/>
@@ -6587,7 +6589,7 @@
                 <a:solidFill>
                   <a:srgbClr val="0A213D"/>
                 </a:solidFill>
-                <a:latin typeface="Aptos"/>
+                <a:latin typeface="Liberation Sans"/>
               </a:rPr>
               <a:t>PROOF</a:t>
             </a:r>
@@ -6611,7 +6613,7 @@
           <a:noFill/>
         </p:spPr>
         <p:txBody>
-          <a:bodyPr wrap="none" lIns="36576" rIns="36576" tIns="36576" bIns="36576" anchor="ctr">
+          <a:bodyPr wrap="square" lIns="36576" rIns="36576" tIns="36576" bIns="36576" anchor="ctr">
             <a:spAutoFit/>
           </a:bodyPr>
           <a:lstStyle/>
@@ -6622,7 +6624,7 @@
                 <a:solidFill>
                   <a:srgbClr val="0A213D"/>
                 </a:solidFill>
-                <a:latin typeface="Aptos"/>
+                <a:latin typeface="Liberation Sans"/>
               </a:rPr>
               <a:t>The system measures performance objectively using the same records created during daily work.</a:t>
             </a:r>
@@ -6741,7 +6743,7 @@
           <a:noFill/>
         </p:spPr>
         <p:txBody>
-          <a:bodyPr wrap="none" lIns="36576" rIns="36576" tIns="36576" bIns="36576" anchor="ctr">
+          <a:bodyPr wrap="square" lIns="36576" rIns="36576" tIns="36576" bIns="36576" anchor="ctr">
             <a:spAutoFit/>
           </a:bodyPr>
           <a:lstStyle/>
@@ -6752,7 +6754,7 @@
                 <a:solidFill>
                   <a:srgbClr val="0A213D"/>
                 </a:solidFill>
-                <a:latin typeface="Aptos"/>
+                <a:latin typeface="Liberation Sans"/>
               </a:rPr>
               <a:t>CeEst ERP</a:t>
             </a:r>
@@ -6776,7 +6778,7 @@
           <a:noFill/>
         </p:spPr>
         <p:txBody>
-          <a:bodyPr wrap="none" lIns="36576" rIns="36576" tIns="36576" bIns="36576" anchor="ctr">
+          <a:bodyPr wrap="square" lIns="36576" rIns="36576" tIns="36576" bIns="36576" anchor="ctr">
             <a:spAutoFit/>
           </a:bodyPr>
           <a:lstStyle/>
@@ -6785,9 +6787,9 @@
             <a:r>
               <a:rPr sz="800" b="1">
                 <a:solidFill>
-                  <a:srgbClr val="556982"/>
-                </a:solidFill>
-                <a:latin typeface="Aptos"/>
+                  <a:srgbClr val="37495E"/>
+                </a:solidFill>
+                <a:latin typeface="Liberation Sans"/>
               </a:rPr>
               <a:t>PROPERTY  •  FACILITY  •  PERFORMANCE</a:t>
             </a:r>
@@ -6811,7 +6813,7 @@
           <a:noFill/>
         </p:spPr>
         <p:txBody>
-          <a:bodyPr wrap="none" lIns="36576" rIns="36576" tIns="36576" bIns="36576" anchor="ctr">
+          <a:bodyPr wrap="square" lIns="36576" rIns="36576" tIns="36576" bIns="36576" anchor="ctr">
             <a:spAutoFit/>
           </a:bodyPr>
           <a:lstStyle/>
@@ -6822,7 +6824,7 @@
                 <a:solidFill>
                   <a:srgbClr val="DE232A"/>
                 </a:solidFill>
-                <a:latin typeface="Aptos"/>
+                <a:latin typeface="Liberation Sans"/>
               </a:rPr>
               <a:t>REPORTING</a:t>
             </a:r>
@@ -6846,7 +6848,7 @@
           <a:noFill/>
         </p:spPr>
         <p:txBody>
-          <a:bodyPr wrap="none" lIns="36576" rIns="36576" tIns="36576" bIns="36576" anchor="ctr">
+          <a:bodyPr wrap="square" lIns="36576" rIns="36576" tIns="36576" bIns="36576" anchor="ctr">
             <a:spAutoFit/>
           </a:bodyPr>
           <a:lstStyle/>
@@ -6857,7 +6859,7 @@
                 <a:solidFill>
                   <a:srgbClr val="122034"/>
                 </a:solidFill>
-                <a:latin typeface="Aptos"/>
+                <a:latin typeface="Liberation Sans"/>
               </a:rPr>
               <a:t>One data source, different audiences</a:t>
             </a:r>
@@ -6881,7 +6883,7 @@
           <a:noFill/>
         </p:spPr>
         <p:txBody>
-          <a:bodyPr wrap="none" lIns="36576" rIns="36576" tIns="36576" bIns="36576" anchor="ctr">
+          <a:bodyPr wrap="square" lIns="36576" rIns="36576" tIns="36576" bIns="36576" anchor="ctr">
             <a:spAutoFit/>
           </a:bodyPr>
           <a:lstStyle/>
@@ -6890,9 +6892,9 @@
             <a:r>
               <a:rPr sz="1300" b="0">
                 <a:solidFill>
-                  <a:srgbClr val="556982"/>
-                </a:solidFill>
-                <a:latin typeface="Aptos"/>
+                  <a:srgbClr val="37495E"/>
+                </a:solidFill>
+                <a:latin typeface="Liberation Sans"/>
               </a:rPr>
               <a:t>Operational registers, tenant documents and landlord-ready management packs.</a:t>
             </a:r>
@@ -6916,7 +6918,7 @@
           <a:noFill/>
         </p:spPr>
         <p:txBody>
-          <a:bodyPr wrap="none" lIns="36576" rIns="36576" tIns="36576" bIns="36576" anchor="ctr">
+          <a:bodyPr wrap="square" lIns="36576" rIns="36576" tIns="36576" bIns="36576" anchor="ctr">
             <a:spAutoFit/>
           </a:bodyPr>
           <a:lstStyle/>
@@ -6927,7 +6929,7 @@
                 <a:solidFill>
                   <a:srgbClr val="DE232A"/>
                 </a:solidFill>
-                <a:latin typeface="Aptos"/>
+                <a:latin typeface="Liberation Sans"/>
               </a:rPr>
               <a:t>12</a:t>
             </a:r>
@@ -7041,7 +7043,7 @@
           <a:noFill/>
         </p:spPr>
         <p:txBody>
-          <a:bodyPr wrap="none" lIns="36576" rIns="36576" tIns="36576" bIns="36576" anchor="ctr">
+          <a:bodyPr wrap="square" lIns="36576" rIns="36576" tIns="36576" bIns="36576" anchor="ctr">
             <a:spAutoFit/>
           </a:bodyPr>
           <a:lstStyle/>
@@ -7052,7 +7054,7 @@
                 <a:solidFill>
                   <a:srgbClr val="12365B"/>
                 </a:solidFill>
-                <a:latin typeface="Aptos"/>
+                <a:latin typeface="Liberation Sans"/>
               </a:rPr>
               <a:t>▤</a:t>
             </a:r>
@@ -7076,7 +7078,7 @@
           <a:noFill/>
         </p:spPr>
         <p:txBody>
-          <a:bodyPr wrap="none" lIns="36576" rIns="36576" tIns="36576" bIns="36576" anchor="ctr">
+          <a:bodyPr wrap="square" lIns="36576" rIns="36576" tIns="36576" bIns="36576" anchor="ctr">
             <a:spAutoFit/>
           </a:bodyPr>
           <a:lstStyle/>
@@ -7087,7 +7089,7 @@
                 <a:solidFill>
                   <a:srgbClr val="122034"/>
                 </a:solidFill>
-                <a:latin typeface="Aptos"/>
+                <a:latin typeface="Liberation Sans"/>
               </a:rPr>
               <a:t>Operational</a:t>
             </a:r>
@@ -7103,26 +7105,26 @@
         <p:spPr>
           <a:xfrm>
             <a:off x="822960" y="2834640"/>
-            <a:ext cx="2971800" cy="2002536"/>
-          </a:xfrm>
-          <a:prstGeom prst="rect">
-            <a:avLst/>
-          </a:prstGeom>
-          <a:noFill/>
-        </p:spPr>
-        <p:txBody>
-          <a:bodyPr wrap="none" lIns="36576" rIns="36576" tIns="36576" bIns="36576" anchor="ctr">
-            <a:spAutoFit/>
-          </a:bodyPr>
-          <a:lstStyle/>
-          <a:p>
-            <a:pPr algn="l"/>
-            <a:r>
-              <a:rPr sz="1100" b="0">
-                <a:solidFill>
-                  <a:srgbClr val="556982"/>
-                </a:solidFill>
-                <a:latin typeface="Aptos"/>
+            <a:ext cx="2971800" cy="1947672"/>
+          </a:xfrm>
+          <a:prstGeom prst="rect">
+            <a:avLst/>
+          </a:prstGeom>
+          <a:noFill/>
+        </p:spPr>
+        <p:txBody>
+          <a:bodyPr wrap="square" lIns="18288" rIns="18288" tIns="18288" bIns="18288" anchor="t">
+            <a:spAutoFit/>
+          </a:bodyPr>
+          <a:lstStyle/>
+          <a:p>
+            <a:pPr algn="l"/>
+            <a:r>
+              <a:rPr sz="1150" b="0">
+                <a:solidFill>
+                  <a:srgbClr val="37495E"/>
+                </a:solidFill>
+                <a:latin typeface="Liberation Sans"/>
               </a:rPr>
               <a:t>Work orders, PPM, compliance, incidents, utilities and provider performance.</a:t>
             </a:r>
@@ -7236,7 +7238,7 @@
           <a:noFill/>
         </p:spPr>
         <p:txBody>
-          <a:bodyPr wrap="none" lIns="36576" rIns="36576" tIns="36576" bIns="36576" anchor="ctr">
+          <a:bodyPr wrap="square" lIns="36576" rIns="36576" tIns="36576" bIns="36576" anchor="ctr">
             <a:spAutoFit/>
           </a:bodyPr>
           <a:lstStyle/>
@@ -7247,7 +7249,7 @@
                 <a:solidFill>
                   <a:srgbClr val="DE232A"/>
                 </a:solidFill>
-                <a:latin typeface="Aptos"/>
+                <a:latin typeface="Liberation Sans"/>
               </a:rPr>
               <a:t>KES</a:t>
             </a:r>
@@ -7271,7 +7273,7 @@
           <a:noFill/>
         </p:spPr>
         <p:txBody>
-          <a:bodyPr wrap="none" lIns="36576" rIns="36576" tIns="36576" bIns="36576" anchor="ctr">
+          <a:bodyPr wrap="square" lIns="36576" rIns="36576" tIns="36576" bIns="36576" anchor="ctr">
             <a:spAutoFit/>
           </a:bodyPr>
           <a:lstStyle/>
@@ -7282,7 +7284,7 @@
                 <a:solidFill>
                   <a:srgbClr val="122034"/>
                 </a:solidFill>
-                <a:latin typeface="Aptos"/>
+                <a:latin typeface="Liberation Sans"/>
               </a:rPr>
               <a:t>Financial</a:t>
             </a:r>
@@ -7298,26 +7300,26 @@
         <p:spPr>
           <a:xfrm>
             <a:off x="4416552" y="2834640"/>
-            <a:ext cx="2971800" cy="2002536"/>
-          </a:xfrm>
-          <a:prstGeom prst="rect">
-            <a:avLst/>
-          </a:prstGeom>
-          <a:noFill/>
-        </p:spPr>
-        <p:txBody>
-          <a:bodyPr wrap="none" lIns="36576" rIns="36576" tIns="36576" bIns="36576" anchor="ctr">
-            <a:spAutoFit/>
-          </a:bodyPr>
-          <a:lstStyle/>
-          <a:p>
-            <a:pPr algn="l"/>
-            <a:r>
-              <a:rPr sz="1100" b="0">
-                <a:solidFill>
-                  <a:srgbClr val="556982"/>
-                </a:solidFill>
-                <a:latin typeface="Aptos"/>
+            <a:ext cx="2971800" cy="1947672"/>
+          </a:xfrm>
+          <a:prstGeom prst="rect">
+            <a:avLst/>
+          </a:prstGeom>
+          <a:noFill/>
+        </p:spPr>
+        <p:txBody>
+          <a:bodyPr wrap="square" lIns="18288" rIns="18288" tIns="18288" bIns="18288" anchor="t">
+            <a:spAutoFit/>
+          </a:bodyPr>
+          <a:lstStyle/>
+          <a:p>
+            <a:pPr algn="l"/>
+            <a:r>
+              <a:rPr sz="1150" b="0">
+                <a:solidFill>
+                  <a:srgbClr val="37495E"/>
+                </a:solidFill>
+                <a:latin typeface="Liberation Sans"/>
               </a:rPr>
               <a:t>Billing and collection, receipts and expenditure, arrears, VAT and budget versus actual.</a:t>
             </a:r>
@@ -7431,7 +7433,7 @@
           <a:noFill/>
         </p:spPr>
         <p:txBody>
-          <a:bodyPr wrap="none" lIns="36576" rIns="36576" tIns="36576" bIns="36576" anchor="ctr">
+          <a:bodyPr wrap="square" lIns="36576" rIns="36576" tIns="36576" bIns="36576" anchor="ctr">
             <a:spAutoFit/>
           </a:bodyPr>
           <a:lstStyle/>
@@ -7442,7 +7444,7 @@
                 <a:solidFill>
                   <a:srgbClr val="00918A"/>
                 </a:solidFill>
-                <a:latin typeface="Aptos"/>
+                <a:latin typeface="Liberation Sans"/>
               </a:rPr>
               <a:t>⌂</a:t>
             </a:r>
@@ -7466,7 +7468,7 @@
           <a:noFill/>
         </p:spPr>
         <p:txBody>
-          <a:bodyPr wrap="none" lIns="36576" rIns="36576" tIns="36576" bIns="36576" anchor="ctr">
+          <a:bodyPr wrap="square" lIns="36576" rIns="36576" tIns="36576" bIns="36576" anchor="ctr">
             <a:spAutoFit/>
           </a:bodyPr>
           <a:lstStyle/>
@@ -7477,7 +7479,7 @@
                 <a:solidFill>
                   <a:srgbClr val="122034"/>
                 </a:solidFill>
-                <a:latin typeface="Aptos"/>
+                <a:latin typeface="Liberation Sans"/>
               </a:rPr>
               <a:t>Tenancy</a:t>
             </a:r>
@@ -7493,26 +7495,26 @@
         <p:spPr>
           <a:xfrm>
             <a:off x="8010144" y="2834640"/>
-            <a:ext cx="2971800" cy="2002536"/>
-          </a:xfrm>
-          <a:prstGeom prst="rect">
-            <a:avLst/>
-          </a:prstGeom>
-          <a:noFill/>
-        </p:spPr>
-        <p:txBody>
-          <a:bodyPr wrap="none" lIns="36576" rIns="36576" tIns="36576" bIns="36576" anchor="ctr">
-            <a:spAutoFit/>
-          </a:bodyPr>
-          <a:lstStyle/>
-          <a:p>
-            <a:pPr algn="l"/>
-            <a:r>
-              <a:rPr sz="1100" b="0">
-                <a:solidFill>
-                  <a:srgbClr val="556982"/>
-                </a:solidFill>
-                <a:latin typeface="Aptos"/>
+            <a:ext cx="2971800" cy="1947672"/>
+          </a:xfrm>
+          <a:prstGeom prst="rect">
+            <a:avLst/>
+          </a:prstGeom>
+          <a:noFill/>
+        </p:spPr>
+        <p:txBody>
+          <a:bodyPr wrap="square" lIns="18288" rIns="18288" tIns="18288" bIns="18288" anchor="t">
+            <a:spAutoFit/>
+          </a:bodyPr>
+          <a:lstStyle/>
+          <a:p>
+            <a:pPr algn="l"/>
+            <a:r>
+              <a:rPr sz="1150" b="0">
+                <a:solidFill>
+                  <a:srgbClr val="37495E"/>
+                </a:solidFill>
+                <a:latin typeface="Liberation Sans"/>
               </a:rPr>
               <a:t>Occupancy, vacancy, lease expiry, movements and tenant statements.</a:t>
             </a:r>
@@ -7549,7 +7551,7 @@
                 <a:solidFill>
                   <a:srgbClr val="122034"/>
                 </a:solidFill>
-                <a:latin typeface="Aptos"/>
+                <a:latin typeface="Liberation Sans"/>
               </a:defRPr>
             </a:pPr>
             <a:r>
@@ -7565,7 +7567,7 @@
                 <a:solidFill>
                   <a:srgbClr val="122034"/>
                 </a:solidFill>
-                <a:latin typeface="Aptos"/>
+                <a:latin typeface="Liberation Sans"/>
               </a:defRPr>
             </a:pPr>
             <a:r>
@@ -7581,7 +7583,7 @@
                 <a:solidFill>
                   <a:srgbClr val="122034"/>
                 </a:solidFill>
-                <a:latin typeface="Aptos"/>
+                <a:latin typeface="Liberation Sans"/>
               </a:defRPr>
             </a:pPr>
             <a:r>
@@ -7652,7 +7654,7 @@
           <a:noFill/>
         </p:spPr>
         <p:txBody>
-          <a:bodyPr wrap="none" lIns="36576" rIns="36576" tIns="36576" bIns="36576" anchor="ctr">
+          <a:bodyPr wrap="square" lIns="36576" rIns="36576" tIns="36576" bIns="36576" anchor="ctr">
             <a:spAutoFit/>
           </a:bodyPr>
           <a:lstStyle/>
@@ -7663,7 +7665,7 @@
                 <a:solidFill>
                   <a:srgbClr val="0A213D"/>
                 </a:solidFill>
-                <a:latin typeface="Aptos"/>
+                <a:latin typeface="Liberation Sans"/>
               </a:rPr>
               <a:t>PROOF</a:t>
             </a:r>
@@ -7687,7 +7689,7 @@
           <a:noFill/>
         </p:spPr>
         <p:txBody>
-          <a:bodyPr wrap="none" lIns="36576" rIns="36576" tIns="36576" bIns="36576" anchor="ctr">
+          <a:bodyPr wrap="square" lIns="36576" rIns="36576" tIns="36576" bIns="36576" anchor="ctr">
             <a:spAutoFit/>
           </a:bodyPr>
           <a:lstStyle/>
@@ -7698,7 +7700,7 @@
                 <a:solidFill>
                   <a:srgbClr val="0A213D"/>
                 </a:solidFill>
-                <a:latin typeface="Aptos"/>
+                <a:latin typeface="Liberation Sans"/>
               </a:rPr>
               <a:t>Management and landlord reports reuse live records instead of separate spreadsheets.</a:t>
             </a:r>
@@ -7817,7 +7819,7 @@
           <a:noFill/>
         </p:spPr>
         <p:txBody>
-          <a:bodyPr wrap="none" lIns="36576" rIns="36576" tIns="36576" bIns="36576" anchor="ctr">
+          <a:bodyPr wrap="square" lIns="36576" rIns="36576" tIns="36576" bIns="36576" anchor="ctr">
             <a:spAutoFit/>
           </a:bodyPr>
           <a:lstStyle/>
@@ -7828,7 +7830,7 @@
                 <a:solidFill>
                   <a:srgbClr val="0A213D"/>
                 </a:solidFill>
-                <a:latin typeface="Aptos"/>
+                <a:latin typeface="Liberation Sans"/>
               </a:rPr>
               <a:t>CeEst ERP</a:t>
             </a:r>
@@ -7852,7 +7854,7 @@
           <a:noFill/>
         </p:spPr>
         <p:txBody>
-          <a:bodyPr wrap="none" lIns="36576" rIns="36576" tIns="36576" bIns="36576" anchor="ctr">
+          <a:bodyPr wrap="square" lIns="36576" rIns="36576" tIns="36576" bIns="36576" anchor="ctr">
             <a:spAutoFit/>
           </a:bodyPr>
           <a:lstStyle/>
@@ -7861,9 +7863,9 @@
             <a:r>
               <a:rPr sz="800" b="1">
                 <a:solidFill>
-                  <a:srgbClr val="556982"/>
-                </a:solidFill>
-                <a:latin typeface="Aptos"/>
+                  <a:srgbClr val="37495E"/>
+                </a:solidFill>
+                <a:latin typeface="Liberation Sans"/>
               </a:rPr>
               <a:t>PROPERTY  •  FACILITY  •  PERFORMANCE</a:t>
             </a:r>
@@ -7887,7 +7889,7 @@
           <a:noFill/>
         </p:spPr>
         <p:txBody>
-          <a:bodyPr wrap="none" lIns="36576" rIns="36576" tIns="36576" bIns="36576" anchor="ctr">
+          <a:bodyPr wrap="square" lIns="36576" rIns="36576" tIns="36576" bIns="36576" anchor="ctr">
             <a:spAutoFit/>
           </a:bodyPr>
           <a:lstStyle/>
@@ -7898,7 +7900,7 @@
                 <a:solidFill>
                   <a:srgbClr val="DE232A"/>
                 </a:solidFill>
-                <a:latin typeface="Aptos"/>
+                <a:latin typeface="Liberation Sans"/>
               </a:rPr>
               <a:t>LIVE DEMONSTRATION</a:t>
             </a:r>
@@ -7922,7 +7924,7 @@
           <a:noFill/>
         </p:spPr>
         <p:txBody>
-          <a:bodyPr wrap="none" lIns="36576" rIns="36576" tIns="36576" bIns="36576" anchor="ctr">
+          <a:bodyPr wrap="square" lIns="36576" rIns="36576" tIns="36576" bIns="36576" anchor="ctr">
             <a:spAutoFit/>
           </a:bodyPr>
           <a:lstStyle/>
@@ -7933,7 +7935,7 @@
                 <a:solidFill>
                   <a:srgbClr val="122034"/>
                 </a:solidFill>
-                <a:latin typeface="Aptos"/>
+                <a:latin typeface="Liberation Sans"/>
               </a:rPr>
               <a:t>Recommended 27-minute run of show</a:t>
             </a:r>
@@ -7957,7 +7959,7 @@
           <a:noFill/>
         </p:spPr>
         <p:txBody>
-          <a:bodyPr wrap="none" lIns="36576" rIns="36576" tIns="36576" bIns="36576" anchor="ctr">
+          <a:bodyPr wrap="square" lIns="36576" rIns="36576" tIns="36576" bIns="36576" anchor="ctr">
             <a:spAutoFit/>
           </a:bodyPr>
           <a:lstStyle/>
@@ -7966,9 +7968,9 @@
             <a:r>
               <a:rPr sz="1300" b="0">
                 <a:solidFill>
-                  <a:srgbClr val="556982"/>
-                </a:solidFill>
-                <a:latin typeface="Aptos"/>
+                  <a:srgbClr val="37495E"/>
+                </a:solidFill>
+                <a:latin typeface="Liberation Sans"/>
               </a:rPr>
               <a:t>Keep the audience inside one property and one coherent story.</a:t>
             </a:r>
@@ -7992,7 +7994,7 @@
           <a:noFill/>
         </p:spPr>
         <p:txBody>
-          <a:bodyPr wrap="none" lIns="36576" rIns="36576" tIns="36576" bIns="36576" anchor="ctr">
+          <a:bodyPr wrap="square" lIns="36576" rIns="36576" tIns="36576" bIns="36576" anchor="ctr">
             <a:spAutoFit/>
           </a:bodyPr>
           <a:lstStyle/>
@@ -8003,7 +8005,7 @@
                 <a:solidFill>
                   <a:srgbClr val="DE232A"/>
                 </a:solidFill>
-                <a:latin typeface="Aptos"/>
+                <a:latin typeface="Liberation Sans"/>
               </a:rPr>
               <a:t>13</a:t>
             </a:r>
@@ -8072,7 +8074,7 @@
           <a:noFill/>
         </p:spPr>
         <p:txBody>
-          <a:bodyPr wrap="none" lIns="36576" rIns="36576" tIns="36576" bIns="36576" anchor="ctr">
+          <a:bodyPr wrap="square" lIns="36576" rIns="36576" tIns="36576" bIns="36576" anchor="ctr">
             <a:spAutoFit/>
           </a:bodyPr>
           <a:lstStyle/>
@@ -8083,7 +8085,7 @@
                 <a:solidFill>
                   <a:srgbClr val="DE232A"/>
                 </a:solidFill>
-                <a:latin typeface="Aptos"/>
+                <a:latin typeface="Liberation Sans"/>
               </a:rPr>
               <a:t>2 min</a:t>
             </a:r>
@@ -8107,7 +8109,7 @@
           <a:noFill/>
         </p:spPr>
         <p:txBody>
-          <a:bodyPr wrap="none" lIns="36576" rIns="36576" tIns="36576" bIns="36576" anchor="ctr">
+          <a:bodyPr wrap="square" lIns="36576" rIns="36576" tIns="36576" bIns="36576" anchor="ctr">
             <a:spAutoFit/>
           </a:bodyPr>
           <a:lstStyle/>
@@ -8118,7 +8120,7 @@
                 <a:solidFill>
                   <a:srgbClr val="122034"/>
                 </a:solidFill>
-                <a:latin typeface="Aptos"/>
+                <a:latin typeface="Liberation Sans"/>
               </a:rPr>
               <a:t>Companion</a:t>
             </a:r>
@@ -8142,7 +8144,7 @@
           <a:noFill/>
         </p:spPr>
         <p:txBody>
-          <a:bodyPr wrap="none" lIns="36576" rIns="36576" tIns="36576" bIns="36576" anchor="ctr">
+          <a:bodyPr wrap="square" lIns="36576" rIns="36576" tIns="36576" bIns="36576" anchor="ctr">
             <a:spAutoFit/>
           </a:bodyPr>
           <a:lstStyle/>
@@ -8151,9 +8153,9 @@
             <a:r>
               <a:rPr sz="1100" b="0">
                 <a:solidFill>
-                  <a:srgbClr val="556982"/>
-                </a:solidFill>
-                <a:latin typeface="Aptos"/>
+                  <a:srgbClr val="37495E"/>
+                </a:solidFill>
+                <a:latin typeface="Liberation Sans"/>
               </a:rPr>
               <a:t>Today’s priorities and selected property</a:t>
             </a:r>
@@ -8222,7 +8224,7 @@
           <a:noFill/>
         </p:spPr>
         <p:txBody>
-          <a:bodyPr wrap="none" lIns="36576" rIns="36576" tIns="36576" bIns="36576" anchor="ctr">
+          <a:bodyPr wrap="square" lIns="36576" rIns="36576" tIns="36576" bIns="36576" anchor="ctr">
             <a:spAutoFit/>
           </a:bodyPr>
           <a:lstStyle/>
@@ -8233,7 +8235,7 @@
                 <a:solidFill>
                   <a:srgbClr val="DE232A"/>
                 </a:solidFill>
-                <a:latin typeface="Aptos"/>
+                <a:latin typeface="Liberation Sans"/>
               </a:rPr>
               <a:t>4 min</a:t>
             </a:r>
@@ -8257,7 +8259,7 @@
           <a:noFill/>
         </p:spPr>
         <p:txBody>
-          <a:bodyPr wrap="none" lIns="36576" rIns="36576" tIns="36576" bIns="36576" anchor="ctr">
+          <a:bodyPr wrap="square" lIns="36576" rIns="36576" tIns="36576" bIns="36576" anchor="ctr">
             <a:spAutoFit/>
           </a:bodyPr>
           <a:lstStyle/>
@@ -8268,7 +8270,7 @@
                 <a:solidFill>
                   <a:srgbClr val="122034"/>
                 </a:solidFill>
-                <a:latin typeface="Aptos"/>
+                <a:latin typeface="Liberation Sans"/>
               </a:rPr>
               <a:t>Property &amp; tenancy</a:t>
             </a:r>
@@ -8292,7 +8294,7 @@
           <a:noFill/>
         </p:spPr>
         <p:txBody>
-          <a:bodyPr wrap="none" lIns="36576" rIns="36576" tIns="36576" bIns="36576" anchor="ctr">
+          <a:bodyPr wrap="square" lIns="36576" rIns="36576" tIns="36576" bIns="36576" anchor="ctr">
             <a:spAutoFit/>
           </a:bodyPr>
           <a:lstStyle/>
@@ -8301,9 +8303,9 @@
             <a:r>
               <a:rPr sz="1100" b="0">
                 <a:solidFill>
-                  <a:srgbClr val="556982"/>
-                </a:solidFill>
-                <a:latin typeface="Aptos"/>
+                  <a:srgbClr val="37495E"/>
+                </a:solidFill>
+                <a:latin typeface="Liberation Sans"/>
               </a:rPr>
               <a:t>Unit billing schedule and active lease</a:t>
             </a:r>
@@ -8372,7 +8374,7 @@
           <a:noFill/>
         </p:spPr>
         <p:txBody>
-          <a:bodyPr wrap="none" lIns="36576" rIns="36576" tIns="36576" bIns="36576" anchor="ctr">
+          <a:bodyPr wrap="square" lIns="36576" rIns="36576" tIns="36576" bIns="36576" anchor="ctr">
             <a:spAutoFit/>
           </a:bodyPr>
           <a:lstStyle/>
@@ -8383,7 +8385,7 @@
                 <a:solidFill>
                   <a:srgbClr val="DE232A"/>
                 </a:solidFill>
-                <a:latin typeface="Aptos"/>
+                <a:latin typeface="Liberation Sans"/>
               </a:rPr>
               <a:t>4 min</a:t>
             </a:r>
@@ -8407,7 +8409,7 @@
           <a:noFill/>
         </p:spPr>
         <p:txBody>
-          <a:bodyPr wrap="none" lIns="36576" rIns="36576" tIns="36576" bIns="36576" anchor="ctr">
+          <a:bodyPr wrap="square" lIns="36576" rIns="36576" tIns="36576" bIns="36576" anchor="ctr">
             <a:spAutoFit/>
           </a:bodyPr>
           <a:lstStyle/>
@@ -8418,7 +8420,7 @@
                 <a:solidFill>
                   <a:srgbClr val="122034"/>
                 </a:solidFill>
-                <a:latin typeface="Aptos"/>
+                <a:latin typeface="Liberation Sans"/>
               </a:rPr>
               <a:t>Billing &amp; collections</a:t>
             </a:r>
@@ -8442,7 +8444,7 @@
           <a:noFill/>
         </p:spPr>
         <p:txBody>
-          <a:bodyPr wrap="none" lIns="36576" rIns="36576" tIns="36576" bIns="36576" anchor="ctr">
+          <a:bodyPr wrap="square" lIns="36576" rIns="36576" tIns="36576" bIns="36576" anchor="ctr">
             <a:spAutoFit/>
           </a:bodyPr>
           <a:lstStyle/>
@@ -8451,9 +8453,9 @@
             <a:r>
               <a:rPr sz="1100" b="0">
                 <a:solidFill>
-                  <a:srgbClr val="556982"/>
-                </a:solidFill>
-                <a:latin typeface="Aptos"/>
+                  <a:srgbClr val="37495E"/>
+                </a:solidFill>
+                <a:latin typeface="Liberation Sans"/>
               </a:rPr>
               <a:t>Invoice source, receipt and outstanding balance</a:t>
             </a:r>
@@ -8522,7 +8524,7 @@
           <a:noFill/>
         </p:spPr>
         <p:txBody>
-          <a:bodyPr wrap="none" lIns="36576" rIns="36576" tIns="36576" bIns="36576" anchor="ctr">
+          <a:bodyPr wrap="square" lIns="36576" rIns="36576" tIns="36576" bIns="36576" anchor="ctr">
             <a:spAutoFit/>
           </a:bodyPr>
           <a:lstStyle/>
@@ -8533,7 +8535,7 @@
                 <a:solidFill>
                   <a:srgbClr val="DE232A"/>
                 </a:solidFill>
-                <a:latin typeface="Aptos"/>
+                <a:latin typeface="Liberation Sans"/>
               </a:rPr>
               <a:t>3 min</a:t>
             </a:r>
@@ -8557,7 +8559,7 @@
           <a:noFill/>
         </p:spPr>
         <p:txBody>
-          <a:bodyPr wrap="none" lIns="36576" rIns="36576" tIns="36576" bIns="36576" anchor="ctr">
+          <a:bodyPr wrap="square" lIns="36576" rIns="36576" tIns="36576" bIns="36576" anchor="ctr">
             <a:spAutoFit/>
           </a:bodyPr>
           <a:lstStyle/>
@@ -8568,7 +8570,7 @@
                 <a:solidFill>
                   <a:srgbClr val="122034"/>
                 </a:solidFill>
-                <a:latin typeface="Aptos"/>
+                <a:latin typeface="Liberation Sans"/>
               </a:rPr>
               <a:t>Tenant portal</a:t>
             </a:r>
@@ -8592,7 +8594,7 @@
           <a:noFill/>
         </p:spPr>
         <p:txBody>
-          <a:bodyPr wrap="none" lIns="36576" rIns="36576" tIns="36576" bIns="36576" anchor="ctr">
+          <a:bodyPr wrap="square" lIns="36576" rIns="36576" tIns="36576" bIns="36576" anchor="ctr">
             <a:spAutoFit/>
           </a:bodyPr>
           <a:lstStyle/>
@@ -8601,9 +8603,9 @@
             <a:r>
               <a:rPr sz="1100" b="0">
                 <a:solidFill>
-                  <a:srgbClr val="556982"/>
-                </a:solidFill>
-                <a:latin typeface="Aptos"/>
+                  <a:srgbClr val="37495E"/>
+                </a:solidFill>
+                <a:latin typeface="Liberation Sans"/>
               </a:rPr>
               <a:t>Submit one maintenance issue</a:t>
             </a:r>
@@ -8672,7 +8674,7 @@
           <a:noFill/>
         </p:spPr>
         <p:txBody>
-          <a:bodyPr wrap="none" lIns="36576" rIns="36576" tIns="36576" bIns="36576" anchor="ctr">
+          <a:bodyPr wrap="square" lIns="36576" rIns="36576" tIns="36576" bIns="36576" anchor="ctr">
             <a:spAutoFit/>
           </a:bodyPr>
           <a:lstStyle/>
@@ -8683,7 +8685,7 @@
                 <a:solidFill>
                   <a:srgbClr val="DE232A"/>
                 </a:solidFill>
-                <a:latin typeface="Aptos"/>
+                <a:latin typeface="Liberation Sans"/>
               </a:rPr>
               <a:t>6 min</a:t>
             </a:r>
@@ -8707,7 +8709,7 @@
           <a:noFill/>
         </p:spPr>
         <p:txBody>
-          <a:bodyPr wrap="none" lIns="36576" rIns="36576" tIns="36576" bIns="36576" anchor="ctr">
+          <a:bodyPr wrap="square" lIns="36576" rIns="36576" tIns="36576" bIns="36576" anchor="ctr">
             <a:spAutoFit/>
           </a:bodyPr>
           <a:lstStyle/>
@@ -8718,7 +8720,7 @@
                 <a:solidFill>
                   <a:srgbClr val="122034"/>
                 </a:solidFill>
-                <a:latin typeface="Aptos"/>
+                <a:latin typeface="Liberation Sans"/>
               </a:rPr>
               <a:t>Facility workflow</a:t>
             </a:r>
@@ -8742,7 +8744,7 @@
           <a:noFill/>
         </p:spPr>
         <p:txBody>
-          <a:bodyPr wrap="none" lIns="36576" rIns="36576" tIns="36576" bIns="36576" anchor="ctr">
+          <a:bodyPr wrap="square" lIns="36576" rIns="36576" tIns="36576" bIns="36576" anchor="ctr">
             <a:spAutoFit/>
           </a:bodyPr>
           <a:lstStyle/>
@@ -8751,9 +8753,9 @@
             <a:r>
               <a:rPr sz="1100" b="0">
                 <a:solidFill>
-                  <a:srgbClr val="556982"/>
-                </a:solidFill>
-                <a:latin typeface="Aptos"/>
+                  <a:srgbClr val="37495E"/>
+                </a:solidFill>
+                <a:latin typeface="Liberation Sans"/>
               </a:rPr>
               <a:t>Triage, SLA, assignment, evidence and verification</a:t>
             </a:r>
@@ -8822,7 +8824,7 @@
           <a:noFill/>
         </p:spPr>
         <p:txBody>
-          <a:bodyPr wrap="none" lIns="36576" rIns="36576" tIns="36576" bIns="36576" anchor="ctr">
+          <a:bodyPr wrap="square" lIns="36576" rIns="36576" tIns="36576" bIns="36576" anchor="ctr">
             <a:spAutoFit/>
           </a:bodyPr>
           <a:lstStyle/>
@@ -8833,7 +8835,7 @@
                 <a:solidFill>
                   <a:srgbClr val="DE232A"/>
                 </a:solidFill>
-                <a:latin typeface="Aptos"/>
+                <a:latin typeface="Liberation Sans"/>
               </a:rPr>
               <a:t>3 min</a:t>
             </a:r>
@@ -8857,7 +8859,7 @@
           <a:noFill/>
         </p:spPr>
         <p:txBody>
-          <a:bodyPr wrap="none" lIns="36576" rIns="36576" tIns="36576" bIns="36576" anchor="ctr">
+          <a:bodyPr wrap="square" lIns="36576" rIns="36576" tIns="36576" bIns="36576" anchor="ctr">
             <a:spAutoFit/>
           </a:bodyPr>
           <a:lstStyle/>
@@ -8868,7 +8870,7 @@
                 <a:solidFill>
                   <a:srgbClr val="122034"/>
                 </a:solidFill>
-                <a:latin typeface="Aptos"/>
+                <a:latin typeface="Liberation Sans"/>
               </a:rPr>
               <a:t>Asset &amp; PPM</a:t>
             </a:r>
@@ -8892,7 +8894,7 @@
           <a:noFill/>
         </p:spPr>
         <p:txBody>
-          <a:bodyPr wrap="none" lIns="36576" rIns="36576" tIns="36576" bIns="36576" anchor="ctr">
+          <a:bodyPr wrap="square" lIns="36576" rIns="36576" tIns="36576" bIns="36576" anchor="ctr">
             <a:spAutoFit/>
           </a:bodyPr>
           <a:lstStyle/>
@@ -8901,9 +8903,9 @@
             <a:r>
               <a:rPr sz="1100" b="0">
                 <a:solidFill>
-                  <a:srgbClr val="556982"/>
-                </a:solidFill>
-                <a:latin typeface="Aptos"/>
+                  <a:srgbClr val="37495E"/>
+                </a:solidFill>
+                <a:latin typeface="Liberation Sans"/>
               </a:rPr>
               <a:t>Asset passport, calendar and compliance</a:t>
             </a:r>
@@ -8972,7 +8974,7 @@
           <a:noFill/>
         </p:spPr>
         <p:txBody>
-          <a:bodyPr wrap="none" lIns="36576" rIns="36576" tIns="36576" bIns="36576" anchor="ctr">
+          <a:bodyPr wrap="square" lIns="36576" rIns="36576" tIns="36576" bIns="36576" anchor="ctr">
             <a:spAutoFit/>
           </a:bodyPr>
           <a:lstStyle/>
@@ -8983,7 +8985,7 @@
                 <a:solidFill>
                   <a:srgbClr val="DE232A"/>
                 </a:solidFill>
-                <a:latin typeface="Aptos"/>
+                <a:latin typeface="Liberation Sans"/>
               </a:rPr>
               <a:t>3 min</a:t>
             </a:r>
@@ -9007,7 +9009,7 @@
           <a:noFill/>
         </p:spPr>
         <p:txBody>
-          <a:bodyPr wrap="none" lIns="36576" rIns="36576" tIns="36576" bIns="36576" anchor="ctr">
+          <a:bodyPr wrap="square" lIns="36576" rIns="36576" tIns="36576" bIns="36576" anchor="ctr">
             <a:spAutoFit/>
           </a:bodyPr>
           <a:lstStyle/>
@@ -9018,7 +9020,7 @@
                 <a:solidFill>
                   <a:srgbClr val="122034"/>
                 </a:solidFill>
-                <a:latin typeface="Aptos"/>
+                <a:latin typeface="Liberation Sans"/>
               </a:rPr>
               <a:t>Performance &amp; reports</a:t>
             </a:r>
@@ -9042,7 +9044,7 @@
           <a:noFill/>
         </p:spPr>
         <p:txBody>
-          <a:bodyPr wrap="none" lIns="36576" rIns="36576" tIns="36576" bIns="36576" anchor="ctr">
+          <a:bodyPr wrap="square" lIns="36576" rIns="36576" tIns="36576" bIns="36576" anchor="ctr">
             <a:spAutoFit/>
           </a:bodyPr>
           <a:lstStyle/>
@@ -9051,9 +9053,9 @@
             <a:r>
               <a:rPr sz="1100" b="0">
                 <a:solidFill>
-                  <a:srgbClr val="556982"/>
-                </a:solidFill>
-                <a:latin typeface="Aptos"/>
+                  <a:srgbClr val="37495E"/>
+                </a:solidFill>
+                <a:latin typeface="Liberation Sans"/>
               </a:rPr>
               <a:t>KPI drill-down and landlord output</a:t>
             </a:r>
@@ -9122,7 +9124,7 @@
           <a:noFill/>
         </p:spPr>
         <p:txBody>
-          <a:bodyPr wrap="none" lIns="36576" rIns="36576" tIns="36576" bIns="36576" anchor="ctr">
+          <a:bodyPr wrap="square" lIns="36576" rIns="36576" tIns="36576" bIns="36576" anchor="ctr">
             <a:spAutoFit/>
           </a:bodyPr>
           <a:lstStyle/>
@@ -9133,7 +9135,7 @@
                 <a:solidFill>
                   <a:srgbClr val="DE232A"/>
                 </a:solidFill>
-                <a:latin typeface="Aptos"/>
+                <a:latin typeface="Liberation Sans"/>
               </a:rPr>
               <a:t>2 min</a:t>
             </a:r>
@@ -9157,7 +9159,7 @@
           <a:noFill/>
         </p:spPr>
         <p:txBody>
-          <a:bodyPr wrap="none" lIns="36576" rIns="36576" tIns="36576" bIns="36576" anchor="ctr">
+          <a:bodyPr wrap="square" lIns="36576" rIns="36576" tIns="36576" bIns="36576" anchor="ctr">
             <a:spAutoFit/>
           </a:bodyPr>
           <a:lstStyle/>
@@ -9168,7 +9170,7 @@
                 <a:solidFill>
                   <a:srgbClr val="122034"/>
                 </a:solidFill>
-                <a:latin typeface="Aptos"/>
+                <a:latin typeface="Liberation Sans"/>
               </a:rPr>
               <a:t>Close</a:t>
             </a:r>
@@ -9192,7 +9194,7 @@
           <a:noFill/>
         </p:spPr>
         <p:txBody>
-          <a:bodyPr wrap="none" lIns="36576" rIns="36576" tIns="36576" bIns="36576" anchor="ctr">
+          <a:bodyPr wrap="square" lIns="36576" rIns="36576" tIns="36576" bIns="36576" anchor="ctr">
             <a:spAutoFit/>
           </a:bodyPr>
           <a:lstStyle/>
@@ -9201,9 +9203,9 @@
             <a:r>
               <a:rPr sz="1100" b="0">
                 <a:solidFill>
-                  <a:srgbClr val="556982"/>
-                </a:solidFill>
-                <a:latin typeface="Aptos"/>
+                  <a:srgbClr val="37495E"/>
+                </a:solidFill>
+                <a:latin typeface="Liberation Sans"/>
               </a:rPr>
               <a:t>Return to Companion and recap proof chain</a:t>
             </a:r>
@@ -9272,7 +9274,7 @@
           <a:noFill/>
         </p:spPr>
         <p:txBody>
-          <a:bodyPr wrap="none" lIns="36576" rIns="36576" tIns="36576" bIns="36576" anchor="ctr">
+          <a:bodyPr wrap="square" lIns="36576" rIns="36576" tIns="36576" bIns="36576" anchor="ctr">
             <a:spAutoFit/>
           </a:bodyPr>
           <a:lstStyle/>
@@ -9283,7 +9285,7 @@
                 <a:solidFill>
                   <a:srgbClr val="0A213D"/>
                 </a:solidFill>
-                <a:latin typeface="Aptos"/>
+                <a:latin typeface="Liberation Sans"/>
               </a:rPr>
               <a:t>PROOF</a:t>
             </a:r>
@@ -9307,7 +9309,7 @@
           <a:noFill/>
         </p:spPr>
         <p:txBody>
-          <a:bodyPr wrap="none" lIns="36576" rIns="36576" tIns="36576" bIns="36576" anchor="ctr">
+          <a:bodyPr wrap="square" lIns="36576" rIns="36576" tIns="36576" bIns="36576" anchor="ctr">
             <a:spAutoFit/>
           </a:bodyPr>
           <a:lstStyle/>
@@ -9318,7 +9320,7 @@
                 <a:solidFill>
                   <a:srgbClr val="0A213D"/>
                 </a:solidFill>
-                <a:latin typeface="Aptos"/>
+                <a:latin typeface="Liberation Sans"/>
               </a:rPr>
               <a:t>Perform one meaningful action live; use prepared records for the broader lifecycle and reporting story.</a:t>
             </a:r>
@@ -9437,7 +9439,7 @@
           <a:noFill/>
         </p:spPr>
         <p:txBody>
-          <a:bodyPr wrap="none" lIns="36576" rIns="36576" tIns="36576" bIns="36576" anchor="ctr">
+          <a:bodyPr wrap="square" lIns="36576" rIns="36576" tIns="36576" bIns="36576" anchor="ctr">
             <a:spAutoFit/>
           </a:bodyPr>
           <a:lstStyle/>
@@ -9448,7 +9450,7 @@
                 <a:solidFill>
                   <a:srgbClr val="0A213D"/>
                 </a:solidFill>
-                <a:latin typeface="Aptos"/>
+                <a:latin typeface="Liberation Sans"/>
               </a:rPr>
               <a:t>CeEst ERP</a:t>
             </a:r>
@@ -9472,7 +9474,7 @@
           <a:noFill/>
         </p:spPr>
         <p:txBody>
-          <a:bodyPr wrap="none" lIns="36576" rIns="36576" tIns="36576" bIns="36576" anchor="ctr">
+          <a:bodyPr wrap="square" lIns="36576" rIns="36576" tIns="36576" bIns="36576" anchor="ctr">
             <a:spAutoFit/>
           </a:bodyPr>
           <a:lstStyle/>
@@ -9481,9 +9483,9 @@
             <a:r>
               <a:rPr sz="800" b="1">
                 <a:solidFill>
-                  <a:srgbClr val="556982"/>
-                </a:solidFill>
-                <a:latin typeface="Aptos"/>
+                  <a:srgbClr val="37495E"/>
+                </a:solidFill>
+                <a:latin typeface="Liberation Sans"/>
               </a:rPr>
               <a:t>PROPERTY  •  FACILITY  •  PERFORMANCE</a:t>
             </a:r>
@@ -9507,7 +9509,7 @@
           <a:noFill/>
         </p:spPr>
         <p:txBody>
-          <a:bodyPr wrap="none" lIns="36576" rIns="36576" tIns="36576" bIns="36576" anchor="ctr">
+          <a:bodyPr wrap="square" lIns="36576" rIns="36576" tIns="36576" bIns="36576" anchor="ctr">
             <a:spAutoFit/>
           </a:bodyPr>
           <a:lstStyle/>
@@ -9518,7 +9520,7 @@
                 <a:solidFill>
                   <a:srgbClr val="DE232A"/>
                 </a:solidFill>
-                <a:latin typeface="Aptos"/>
+                <a:latin typeface="Liberation Sans"/>
               </a:rPr>
               <a:t>PRESENTER GUARDRAILS</a:t>
             </a:r>
@@ -9542,7 +9544,7 @@
           <a:noFill/>
         </p:spPr>
         <p:txBody>
-          <a:bodyPr wrap="none" lIns="36576" rIns="36576" tIns="36576" bIns="36576" anchor="ctr">
+          <a:bodyPr wrap="square" lIns="36576" rIns="36576" tIns="36576" bIns="36576" anchor="ctr">
             <a:spAutoFit/>
           </a:bodyPr>
           <a:lstStyle/>
@@ -9553,7 +9555,7 @@
                 <a:solidFill>
                   <a:srgbClr val="122034"/>
                 </a:solidFill>
-                <a:latin typeface="Aptos"/>
+                <a:latin typeface="Liberation Sans"/>
               </a:rPr>
               <a:t>What to claim—and what to position as roadmap</a:t>
             </a:r>
@@ -9577,7 +9579,7 @@
           <a:noFill/>
         </p:spPr>
         <p:txBody>
-          <a:bodyPr wrap="none" lIns="36576" rIns="36576" tIns="36576" bIns="36576" anchor="ctr">
+          <a:bodyPr wrap="square" lIns="36576" rIns="36576" tIns="36576" bIns="36576" anchor="ctr">
             <a:spAutoFit/>
           </a:bodyPr>
           <a:lstStyle/>
@@ -9586,9 +9588,9 @@
             <a:r>
               <a:rPr sz="1300" b="0">
                 <a:solidFill>
-                  <a:srgbClr val="556982"/>
-                </a:solidFill>
-                <a:latin typeface="Aptos"/>
+                  <a:srgbClr val="37495E"/>
+                </a:solidFill>
+                <a:latin typeface="Liberation Sans"/>
               </a:rPr>
               <a:t>Credibility matters more than covering every feature.</a:t>
             </a:r>
@@ -9612,7 +9614,7 @@
           <a:noFill/>
         </p:spPr>
         <p:txBody>
-          <a:bodyPr wrap="none" lIns="36576" rIns="36576" tIns="36576" bIns="36576" anchor="ctr">
+          <a:bodyPr wrap="square" lIns="36576" rIns="36576" tIns="36576" bIns="36576" anchor="ctr">
             <a:spAutoFit/>
           </a:bodyPr>
           <a:lstStyle/>
@@ -9623,7 +9625,7 @@
                 <a:solidFill>
                   <a:srgbClr val="DE232A"/>
                 </a:solidFill>
-                <a:latin typeface="Aptos"/>
+                <a:latin typeface="Liberation Sans"/>
               </a:rPr>
               <a:t>14</a:t>
             </a:r>
@@ -9737,7 +9739,7 @@
           <a:noFill/>
         </p:spPr>
         <p:txBody>
-          <a:bodyPr wrap="none" lIns="36576" rIns="36576" tIns="36576" bIns="36576" anchor="ctr">
+          <a:bodyPr wrap="square" lIns="36576" rIns="36576" tIns="36576" bIns="36576" anchor="ctr">
             <a:spAutoFit/>
           </a:bodyPr>
           <a:lstStyle/>
@@ -9748,7 +9750,7 @@
                 <a:solidFill>
                   <a:srgbClr val="16A34A"/>
                 </a:solidFill>
-                <a:latin typeface="Aptos"/>
+                <a:latin typeface="Liberation Sans"/>
               </a:rPr>
               <a:t>✓</a:t>
             </a:r>
@@ -9772,7 +9774,7 @@
           <a:noFill/>
         </p:spPr>
         <p:txBody>
-          <a:bodyPr wrap="none" lIns="36576" rIns="36576" tIns="36576" bIns="36576" anchor="ctr">
+          <a:bodyPr wrap="square" lIns="36576" rIns="36576" tIns="36576" bIns="36576" anchor="ctr">
             <a:spAutoFit/>
           </a:bodyPr>
           <a:lstStyle/>
@@ -9783,7 +9785,7 @@
                 <a:solidFill>
                   <a:srgbClr val="122034"/>
                 </a:solidFill>
-                <a:latin typeface="Aptos"/>
+                <a:latin typeface="Liberation Sans"/>
               </a:rPr>
               <a:t>Show live</a:t>
             </a:r>
@@ -9799,26 +9801,26 @@
         <p:spPr>
           <a:xfrm>
             <a:off x="868680" y="2834640"/>
-            <a:ext cx="2999232" cy="2459736"/>
-          </a:xfrm>
-          <a:prstGeom prst="rect">
-            <a:avLst/>
-          </a:prstGeom>
-          <a:noFill/>
-        </p:spPr>
-        <p:txBody>
-          <a:bodyPr wrap="none" lIns="36576" rIns="36576" tIns="36576" bIns="36576" anchor="ctr">
-            <a:spAutoFit/>
-          </a:bodyPr>
-          <a:lstStyle/>
-          <a:p>
-            <a:pPr algn="l"/>
-            <a:r>
-              <a:rPr sz="1100" b="0">
-                <a:solidFill>
-                  <a:srgbClr val="556982"/>
-                </a:solidFill>
-                <a:latin typeface="Aptos"/>
+            <a:ext cx="2999232" cy="2404872"/>
+          </a:xfrm>
+          <a:prstGeom prst="rect">
+            <a:avLst/>
+          </a:prstGeom>
+          <a:noFill/>
+        </p:spPr>
+        <p:txBody>
+          <a:bodyPr wrap="square" lIns="18288" rIns="18288" tIns="18288" bIns="18288" anchor="t">
+            <a:spAutoFit/>
+          </a:bodyPr>
+          <a:lstStyle/>
+          <a:p>
+            <a:pPr algn="l"/>
+            <a:r>
+              <a:rPr sz="1150" b="0">
+                <a:solidFill>
+                  <a:srgbClr val="37495E"/>
+                </a:solidFill>
+                <a:latin typeface="Liberation Sans"/>
               </a:rPr>
               <a:t>Property scoping, tenant/lease records, issue reporting, work orders, PPM, service profiles/providers, reports and Companion workflows.</a:t>
             </a:r>
@@ -9932,7 +9934,7 @@
           <a:noFill/>
         </p:spPr>
         <p:txBody>
-          <a:bodyPr wrap="none" lIns="36576" rIns="36576" tIns="36576" bIns="36576" anchor="ctr">
+          <a:bodyPr wrap="square" lIns="36576" rIns="36576" tIns="36576" bIns="36576" anchor="ctr">
             <a:spAutoFit/>
           </a:bodyPr>
           <a:lstStyle/>
@@ -9943,7 +9945,7 @@
                 <a:solidFill>
                   <a:srgbClr val="EA8614"/>
                 </a:solidFill>
-                <a:latin typeface="Aptos"/>
+                <a:latin typeface="Liberation Sans"/>
               </a:rPr>
               <a:t>!</a:t>
             </a:r>
@@ -9967,7 +9969,7 @@
           <a:noFill/>
         </p:spPr>
         <p:txBody>
-          <a:bodyPr wrap="none" lIns="36576" rIns="36576" tIns="36576" bIns="36576" anchor="ctr">
+          <a:bodyPr wrap="square" lIns="36576" rIns="36576" tIns="36576" bIns="36576" anchor="ctr">
             <a:spAutoFit/>
           </a:bodyPr>
           <a:lstStyle/>
@@ -9978,7 +9980,7 @@
                 <a:solidFill>
                   <a:srgbClr val="122034"/>
                 </a:solidFill>
-                <a:latin typeface="Aptos"/>
+                <a:latin typeface="Liberation Sans"/>
               </a:rPr>
               <a:t>Describe carefully</a:t>
             </a:r>
@@ -9994,26 +9996,26 @@
         <p:spPr>
           <a:xfrm>
             <a:off x="4590288" y="2834640"/>
-            <a:ext cx="2999232" cy="2459736"/>
-          </a:xfrm>
-          <a:prstGeom prst="rect">
-            <a:avLst/>
-          </a:prstGeom>
-          <a:noFill/>
-        </p:spPr>
-        <p:txBody>
-          <a:bodyPr wrap="none" lIns="36576" rIns="36576" tIns="36576" bIns="36576" anchor="ctr">
-            <a:spAutoFit/>
-          </a:bodyPr>
-          <a:lstStyle/>
-          <a:p>
-            <a:pPr algn="l"/>
-            <a:r>
-              <a:rPr sz="1100" b="0">
-                <a:solidFill>
-                  <a:srgbClr val="556982"/>
-                </a:solidFill>
-                <a:latin typeface="Aptos"/>
+            <a:ext cx="2999232" cy="2404872"/>
+          </a:xfrm>
+          <a:prstGeom prst="rect">
+            <a:avLst/>
+          </a:prstGeom>
+          <a:noFill/>
+        </p:spPr>
+        <p:txBody>
+          <a:bodyPr wrap="square" lIns="18288" rIns="18288" tIns="18288" bIns="18288" anchor="t">
+            <a:spAutoFit/>
+          </a:bodyPr>
+          <a:lstStyle/>
+          <a:p>
+            <a:pPr algn="l"/>
+            <a:r>
+              <a:rPr sz="1150" b="0">
+                <a:solidFill>
+                  <a:srgbClr val="37495E"/>
+                </a:solidFill>
+                <a:latin typeface="Liberation Sans"/>
               </a:rPr>
               <a:t>External email/SMS delivery, live payment gateways and scheduled automations only when the environment is configured and tested.</a:t>
             </a:r>
@@ -10127,7 +10129,7 @@
           <a:noFill/>
         </p:spPr>
         <p:txBody>
-          <a:bodyPr wrap="none" lIns="36576" rIns="36576" tIns="36576" bIns="36576" anchor="ctr">
+          <a:bodyPr wrap="square" lIns="36576" rIns="36576" tIns="36576" bIns="36576" anchor="ctr">
             <a:spAutoFit/>
           </a:bodyPr>
           <a:lstStyle/>
@@ -10138,7 +10140,7 @@
                 <a:solidFill>
                   <a:srgbClr val="DE232A"/>
                 </a:solidFill>
-                <a:latin typeface="Aptos"/>
+                <a:latin typeface="Liberation Sans"/>
               </a:rPr>
               <a:t>→</a:t>
             </a:r>
@@ -10162,7 +10164,7 @@
           <a:noFill/>
         </p:spPr>
         <p:txBody>
-          <a:bodyPr wrap="none" lIns="36576" rIns="36576" tIns="36576" bIns="36576" anchor="ctr">
+          <a:bodyPr wrap="square" lIns="36576" rIns="36576" tIns="36576" bIns="36576" anchor="ctr">
             <a:spAutoFit/>
           </a:bodyPr>
           <a:lstStyle/>
@@ -10173,7 +10175,7 @@
                 <a:solidFill>
                   <a:srgbClr val="122034"/>
                 </a:solidFill>
-                <a:latin typeface="Aptos"/>
+                <a:latin typeface="Liberation Sans"/>
               </a:rPr>
               <a:t>Position as integration</a:t>
             </a:r>
@@ -10189,26 +10191,26 @@
         <p:spPr>
           <a:xfrm>
             <a:off x="8311896" y="2834640"/>
-            <a:ext cx="2999232" cy="2459736"/>
-          </a:xfrm>
-          <a:prstGeom prst="rect">
-            <a:avLst/>
-          </a:prstGeom>
-          <a:noFill/>
-        </p:spPr>
-        <p:txBody>
-          <a:bodyPr wrap="none" lIns="36576" rIns="36576" tIns="36576" bIns="36576" anchor="ctr">
-            <a:spAutoFit/>
-          </a:bodyPr>
-          <a:lstStyle/>
-          <a:p>
-            <a:pPr algn="l"/>
-            <a:r>
-              <a:rPr sz="1100" b="0">
-                <a:solidFill>
-                  <a:srgbClr val="556982"/>
-                </a:solidFill>
-                <a:latin typeface="Aptos"/>
+            <a:ext cx="2999232" cy="2404872"/>
+          </a:xfrm>
+          <a:prstGeom prst="rect">
+            <a:avLst/>
+          </a:prstGeom>
+          <a:noFill/>
+        </p:spPr>
+        <p:txBody>
+          <a:bodyPr wrap="square" lIns="18288" rIns="18288" tIns="18288" bIns="18288" anchor="t">
+            <a:spAutoFit/>
+          </a:bodyPr>
+          <a:lstStyle/>
+          <a:p>
+            <a:pPr algn="l"/>
+            <a:r>
+              <a:rPr sz="1150" b="0">
+                <a:solidFill>
+                  <a:srgbClr val="37495E"/>
+                </a:solidFill>
+                <a:latin typeface="Liberation Sans"/>
               </a:rPr>
               <a:t>Specific smart-meter devices, third-party accounting systems and provider-specific APIs require vendor credentials and interface work.</a:t>
             </a:r>
@@ -10277,7 +10279,7 @@
           <a:noFill/>
         </p:spPr>
         <p:txBody>
-          <a:bodyPr wrap="none" lIns="36576" rIns="36576" tIns="36576" bIns="36576" anchor="ctr">
+          <a:bodyPr wrap="square" lIns="36576" rIns="36576" tIns="36576" bIns="36576" anchor="ctr">
             <a:spAutoFit/>
           </a:bodyPr>
           <a:lstStyle/>
@@ -10288,7 +10290,7 @@
                 <a:solidFill>
                   <a:srgbClr val="0A213D"/>
                 </a:solidFill>
-                <a:latin typeface="Aptos"/>
+                <a:latin typeface="Liberation Sans"/>
               </a:rPr>
               <a:t>PROOF</a:t>
             </a:r>
@@ -10312,7 +10314,7 @@
           <a:noFill/>
         </p:spPr>
         <p:txBody>
-          <a:bodyPr wrap="none" lIns="36576" rIns="36576" tIns="36576" bIns="36576" anchor="ctr">
+          <a:bodyPr wrap="square" lIns="36576" rIns="36576" tIns="36576" bIns="36576" anchor="ctr">
             <a:spAutoFit/>
           </a:bodyPr>
           <a:lstStyle/>
@@ -10323,7 +10325,7 @@
                 <a:solidFill>
                   <a:srgbClr val="0A213D"/>
                 </a:solidFill>
-                <a:latin typeface="Aptos"/>
+                <a:latin typeface="Liberation Sans"/>
               </a:rPr>
               <a:t>Never claim a feature is live unless it works in the environment being demonstrated.</a:t>
             </a:r>
@@ -10442,7 +10444,7 @@
           <a:noFill/>
         </p:spPr>
         <p:txBody>
-          <a:bodyPr wrap="none" lIns="36576" rIns="36576" tIns="36576" bIns="36576" anchor="ctr">
+          <a:bodyPr wrap="square" lIns="36576" rIns="36576" tIns="36576" bIns="36576" anchor="ctr">
             <a:spAutoFit/>
           </a:bodyPr>
           <a:lstStyle/>
@@ -10453,7 +10455,7 @@
                 <a:solidFill>
                   <a:srgbClr val="0A213D"/>
                 </a:solidFill>
-                <a:latin typeface="Aptos"/>
+                <a:latin typeface="Liberation Sans"/>
               </a:rPr>
               <a:t>CeEst ERP</a:t>
             </a:r>
@@ -10477,7 +10479,7 @@
           <a:noFill/>
         </p:spPr>
         <p:txBody>
-          <a:bodyPr wrap="none" lIns="36576" rIns="36576" tIns="36576" bIns="36576" anchor="ctr">
+          <a:bodyPr wrap="square" lIns="36576" rIns="36576" tIns="36576" bIns="36576" anchor="ctr">
             <a:spAutoFit/>
           </a:bodyPr>
           <a:lstStyle/>
@@ -10486,9 +10488,9 @@
             <a:r>
               <a:rPr sz="800" b="1">
                 <a:solidFill>
-                  <a:srgbClr val="556982"/>
-                </a:solidFill>
-                <a:latin typeface="Aptos"/>
+                  <a:srgbClr val="37495E"/>
+                </a:solidFill>
+                <a:latin typeface="Liberation Sans"/>
               </a:rPr>
               <a:t>PROPERTY  •  FACILITY  •  PERFORMANCE</a:t>
             </a:r>
@@ -10512,7 +10514,7 @@
           <a:noFill/>
         </p:spPr>
         <p:txBody>
-          <a:bodyPr wrap="none" lIns="36576" rIns="36576" tIns="36576" bIns="36576" anchor="ctr">
+          <a:bodyPr wrap="square" lIns="36576" rIns="36576" tIns="36576" bIns="36576" anchor="ctr">
             <a:spAutoFit/>
           </a:bodyPr>
           <a:lstStyle/>
@@ -10523,7 +10525,7 @@
                 <a:solidFill>
                   <a:srgbClr val="DE232A"/>
                 </a:solidFill>
-                <a:latin typeface="Aptos"/>
+                <a:latin typeface="Liberation Sans"/>
               </a:rPr>
               <a:t>DEMO READINESS</a:t>
             </a:r>
@@ -10547,7 +10549,7 @@
           <a:noFill/>
         </p:spPr>
         <p:txBody>
-          <a:bodyPr wrap="none" lIns="36576" rIns="36576" tIns="36576" bIns="36576" anchor="ctr">
+          <a:bodyPr wrap="square" lIns="36576" rIns="36576" tIns="36576" bIns="36576" anchor="ctr">
             <a:spAutoFit/>
           </a:bodyPr>
           <a:lstStyle/>
@@ -10558,7 +10560,7 @@
                 <a:solidFill>
                   <a:srgbClr val="122034"/>
                 </a:solidFill>
-                <a:latin typeface="Aptos"/>
+                <a:latin typeface="Liberation Sans"/>
               </a:rPr>
               <a:t>Final pre-flight checklist</a:t>
             </a:r>
@@ -10582,7 +10584,7 @@
           <a:noFill/>
         </p:spPr>
         <p:txBody>
-          <a:bodyPr wrap="none" lIns="36576" rIns="36576" tIns="36576" bIns="36576" anchor="ctr">
+          <a:bodyPr wrap="square" lIns="36576" rIns="36576" tIns="36576" bIns="36576" anchor="ctr">
             <a:spAutoFit/>
           </a:bodyPr>
           <a:lstStyle/>
@@ -10591,9 +10593,9 @@
             <a:r>
               <a:rPr sz="1300" b="0">
                 <a:solidFill>
-                  <a:srgbClr val="556982"/>
-                </a:solidFill>
-                <a:latin typeface="Aptos"/>
+                  <a:srgbClr val="37495E"/>
+                </a:solidFill>
+                <a:latin typeface="Liberation Sans"/>
               </a:rPr>
               <a:t>Run this on the same device, browser and network that will be used in the meeting.</a:t>
             </a:r>
@@ -10617,7 +10619,7 @@
           <a:noFill/>
         </p:spPr>
         <p:txBody>
-          <a:bodyPr wrap="none" lIns="36576" rIns="36576" tIns="36576" bIns="36576" anchor="ctr">
+          <a:bodyPr wrap="square" lIns="36576" rIns="36576" tIns="36576" bIns="36576" anchor="ctr">
             <a:spAutoFit/>
           </a:bodyPr>
           <a:lstStyle/>
@@ -10628,7 +10630,7 @@
                 <a:solidFill>
                   <a:srgbClr val="DE232A"/>
                 </a:solidFill>
-                <a:latin typeface="Aptos"/>
+                <a:latin typeface="Liberation Sans"/>
               </a:rPr>
               <a:t>15</a:t>
             </a:r>
@@ -10697,7 +10699,7 @@
           <a:noFill/>
         </p:spPr>
         <p:txBody>
-          <a:bodyPr wrap="none" lIns="36576" rIns="36576" tIns="36576" bIns="36576" anchor="ctr">
+          <a:bodyPr wrap="square" lIns="36576" rIns="36576" tIns="36576" bIns="36576" anchor="ctr">
             <a:spAutoFit/>
           </a:bodyPr>
           <a:lstStyle/>
@@ -10708,7 +10710,7 @@
                 <a:solidFill>
                   <a:srgbClr val="DE232A"/>
                 </a:solidFill>
-                <a:latin typeface="Aptos"/>
+                <a:latin typeface="Liberation Sans"/>
               </a:rPr>
               <a:t>□</a:t>
             </a:r>
@@ -10732,7 +10734,7 @@
           <a:noFill/>
         </p:spPr>
         <p:txBody>
-          <a:bodyPr wrap="none" lIns="36576" rIns="36576" tIns="36576" bIns="36576" anchor="ctr">
+          <a:bodyPr wrap="square" lIns="36576" rIns="36576" tIns="36576" bIns="36576" anchor="ctr">
             <a:spAutoFit/>
           </a:bodyPr>
           <a:lstStyle/>
@@ -10743,7 +10745,7 @@
                 <a:solidFill>
                   <a:srgbClr val="122034"/>
                 </a:solidFill>
-                <a:latin typeface="Aptos"/>
+                <a:latin typeface="Liberation Sans"/>
               </a:rPr>
               <a:t>Login and session persistence</a:t>
             </a:r>
@@ -10812,7 +10814,7 @@
           <a:noFill/>
         </p:spPr>
         <p:txBody>
-          <a:bodyPr wrap="none" lIns="36576" rIns="36576" tIns="36576" bIns="36576" anchor="ctr">
+          <a:bodyPr wrap="square" lIns="36576" rIns="36576" tIns="36576" bIns="36576" anchor="ctr">
             <a:spAutoFit/>
           </a:bodyPr>
           <a:lstStyle/>
@@ -10823,7 +10825,7 @@
                 <a:solidFill>
                   <a:srgbClr val="DE232A"/>
                 </a:solidFill>
-                <a:latin typeface="Aptos"/>
+                <a:latin typeface="Liberation Sans"/>
               </a:rPr>
               <a:t>□</a:t>
             </a:r>
@@ -10847,7 +10849,7 @@
           <a:noFill/>
         </p:spPr>
         <p:txBody>
-          <a:bodyPr wrap="none" lIns="36576" rIns="36576" tIns="36576" bIns="36576" anchor="ctr">
+          <a:bodyPr wrap="square" lIns="36576" rIns="36576" tIns="36576" bIns="36576" anchor="ctr">
             <a:spAutoFit/>
           </a:bodyPr>
           <a:lstStyle/>
@@ -10858,7 +10860,7 @@
                 <a:solidFill>
                   <a:srgbClr val="122034"/>
                 </a:solidFill>
-                <a:latin typeface="Aptos"/>
+                <a:latin typeface="Liberation Sans"/>
               </a:rPr>
               <a:t>Correct organization and selected property</a:t>
             </a:r>
@@ -10927,7 +10929,7 @@
           <a:noFill/>
         </p:spPr>
         <p:txBody>
-          <a:bodyPr wrap="none" lIns="36576" rIns="36576" tIns="36576" bIns="36576" anchor="ctr">
+          <a:bodyPr wrap="square" lIns="36576" rIns="36576" tIns="36576" bIns="36576" anchor="ctr">
             <a:spAutoFit/>
           </a:bodyPr>
           <a:lstStyle/>
@@ -10938,7 +10940,7 @@
                 <a:solidFill>
                   <a:srgbClr val="DE232A"/>
                 </a:solidFill>
-                <a:latin typeface="Aptos"/>
+                <a:latin typeface="Liberation Sans"/>
               </a:rPr>
               <a:t>□</a:t>
             </a:r>
@@ -10962,7 +10964,7 @@
           <a:noFill/>
         </p:spPr>
         <p:txBody>
-          <a:bodyPr wrap="none" lIns="36576" rIns="36576" tIns="36576" bIns="36576" anchor="ctr">
+          <a:bodyPr wrap="square" lIns="36576" rIns="36576" tIns="36576" bIns="36576" anchor="ctr">
             <a:spAutoFit/>
           </a:bodyPr>
           <a:lstStyle/>
@@ -10973,7 +10975,7 @@
                 <a:solidFill>
                   <a:srgbClr val="122034"/>
                 </a:solidFill>
-                <a:latin typeface="Aptos"/>
+                <a:latin typeface="Liberation Sans"/>
               </a:rPr>
               <a:t>Property, tenant, asset and provider records populated</a:t>
             </a:r>
@@ -11042,7 +11044,7 @@
           <a:noFill/>
         </p:spPr>
         <p:txBody>
-          <a:bodyPr wrap="none" lIns="36576" rIns="36576" tIns="36576" bIns="36576" anchor="ctr">
+          <a:bodyPr wrap="square" lIns="36576" rIns="36576" tIns="36576" bIns="36576" anchor="ctr">
             <a:spAutoFit/>
           </a:bodyPr>
           <a:lstStyle/>
@@ -11053,7 +11055,7 @@
                 <a:solidFill>
                   <a:srgbClr val="DE232A"/>
                 </a:solidFill>
-                <a:latin typeface="Aptos"/>
+                <a:latin typeface="Liberation Sans"/>
               </a:rPr>
               <a:t>□</a:t>
             </a:r>
@@ -11077,7 +11079,7 @@
           <a:noFill/>
         </p:spPr>
         <p:txBody>
-          <a:bodyPr wrap="none" lIns="36576" rIns="36576" tIns="36576" bIns="36576" anchor="ctr">
+          <a:bodyPr wrap="square" lIns="36576" rIns="36576" tIns="36576" bIns="36576" anchor="ctr">
             <a:spAutoFit/>
           </a:bodyPr>
           <a:lstStyle/>
@@ -11088,7 +11090,7 @@
                 <a:solidFill>
                   <a:srgbClr val="122034"/>
                 </a:solidFill>
-                <a:latin typeface="Aptos"/>
+                <a:latin typeface="Liberation Sans"/>
               </a:rPr>
               <a:t>Open, due and overdue work represented</a:t>
             </a:r>
@@ -11157,7 +11159,7 @@
           <a:noFill/>
         </p:spPr>
         <p:txBody>
-          <a:bodyPr wrap="none" lIns="36576" rIns="36576" tIns="36576" bIns="36576" anchor="ctr">
+          <a:bodyPr wrap="square" lIns="36576" rIns="36576" tIns="36576" bIns="36576" anchor="ctr">
             <a:spAutoFit/>
           </a:bodyPr>
           <a:lstStyle/>
@@ -11168,7 +11170,7 @@
                 <a:solidFill>
                   <a:srgbClr val="DE232A"/>
                 </a:solidFill>
-                <a:latin typeface="Aptos"/>
+                <a:latin typeface="Liberation Sans"/>
               </a:rPr>
               <a:t>□</a:t>
             </a:r>
@@ -11192,7 +11194,7 @@
           <a:noFill/>
         </p:spPr>
         <p:txBody>
-          <a:bodyPr wrap="none" lIns="36576" rIns="36576" tIns="36576" bIns="36576" anchor="ctr">
+          <a:bodyPr wrap="square" lIns="36576" rIns="36576" tIns="36576" bIns="36576" anchor="ctr">
             <a:spAutoFit/>
           </a:bodyPr>
           <a:lstStyle/>
@@ -11203,7 +11205,7 @@
                 <a:solidFill>
                   <a:srgbClr val="122034"/>
                 </a:solidFill>
-                <a:latin typeface="Aptos"/>
+                <a:latin typeface="Liberation Sans"/>
               </a:rPr>
               <a:t>Tenant issue submission and generated reference</a:t>
             </a:r>
@@ -11272,7 +11274,7 @@
           <a:noFill/>
         </p:spPr>
         <p:txBody>
-          <a:bodyPr wrap="none" lIns="36576" rIns="36576" tIns="36576" bIns="36576" anchor="ctr">
+          <a:bodyPr wrap="square" lIns="36576" rIns="36576" tIns="36576" bIns="36576" anchor="ctr">
             <a:spAutoFit/>
           </a:bodyPr>
           <a:lstStyle/>
@@ -11283,7 +11285,7 @@
                 <a:solidFill>
                   <a:srgbClr val="DE232A"/>
                 </a:solidFill>
-                <a:latin typeface="Aptos"/>
+                <a:latin typeface="Liberation Sans"/>
               </a:rPr>
               <a:t>□</a:t>
             </a:r>
@@ -11307,7 +11309,7 @@
           <a:noFill/>
         </p:spPr>
         <p:txBody>
-          <a:bodyPr wrap="none" lIns="36576" rIns="36576" tIns="36576" bIns="36576" anchor="ctr">
+          <a:bodyPr wrap="square" lIns="36576" rIns="36576" tIns="36576" bIns="36576" anchor="ctr">
             <a:spAutoFit/>
           </a:bodyPr>
           <a:lstStyle/>
@@ -11318,7 +11320,7 @@
                 <a:solidFill>
                   <a:srgbClr val="122034"/>
                 </a:solidFill>
-                <a:latin typeface="Aptos"/>
+                <a:latin typeface="Liberation Sans"/>
               </a:rPr>
               <a:t>Work-order detail and SLA fields</a:t>
             </a:r>
@@ -11387,7 +11389,7 @@
           <a:noFill/>
         </p:spPr>
         <p:txBody>
-          <a:bodyPr wrap="none" lIns="36576" rIns="36576" tIns="36576" bIns="36576" anchor="ctr">
+          <a:bodyPr wrap="square" lIns="36576" rIns="36576" tIns="36576" bIns="36576" anchor="ctr">
             <a:spAutoFit/>
           </a:bodyPr>
           <a:lstStyle/>
@@ -11398,7 +11400,7 @@
                 <a:solidFill>
                   <a:srgbClr val="DE232A"/>
                 </a:solidFill>
-                <a:latin typeface="Aptos"/>
+                <a:latin typeface="Liberation Sans"/>
               </a:rPr>
               <a:t>□</a:t>
             </a:r>
@@ -11422,7 +11424,7 @@
           <a:noFill/>
         </p:spPr>
         <p:txBody>
-          <a:bodyPr wrap="none" lIns="36576" rIns="36576" tIns="36576" bIns="36576" anchor="ctr">
+          <a:bodyPr wrap="square" lIns="36576" rIns="36576" tIns="36576" bIns="36576" anchor="ctr">
             <a:spAutoFit/>
           </a:bodyPr>
           <a:lstStyle/>
@@ -11433,7 +11435,7 @@
                 <a:solidFill>
                   <a:srgbClr val="122034"/>
                 </a:solidFill>
-                <a:latin typeface="Aptos"/>
+                <a:latin typeface="Liberation Sans"/>
               </a:rPr>
               <a:t>PPM and compliance calendar</a:t>
             </a:r>
@@ -11502,7 +11504,7 @@
           <a:noFill/>
         </p:spPr>
         <p:txBody>
-          <a:bodyPr wrap="none" lIns="36576" rIns="36576" tIns="36576" bIns="36576" anchor="ctr">
+          <a:bodyPr wrap="square" lIns="36576" rIns="36576" tIns="36576" bIns="36576" anchor="ctr">
             <a:spAutoFit/>
           </a:bodyPr>
           <a:lstStyle/>
@@ -11513,7 +11515,7 @@
                 <a:solidFill>
                   <a:srgbClr val="DE232A"/>
                 </a:solidFill>
-                <a:latin typeface="Aptos"/>
+                <a:latin typeface="Liberation Sans"/>
               </a:rPr>
               <a:t>□</a:t>
             </a:r>
@@ -11537,7 +11539,7 @@
           <a:noFill/>
         </p:spPr>
         <p:txBody>
-          <a:bodyPr wrap="none" lIns="36576" rIns="36576" tIns="36576" bIns="36576" anchor="ctr">
+          <a:bodyPr wrap="square" lIns="36576" rIns="36576" tIns="36576" bIns="36576" anchor="ctr">
             <a:spAutoFit/>
           </a:bodyPr>
           <a:lstStyle/>
@@ -11548,7 +11550,7 @@
                 <a:solidFill>
                   <a:srgbClr val="122034"/>
                 </a:solidFill>
-                <a:latin typeface="Aptos"/>
+                <a:latin typeface="Liberation Sans"/>
               </a:rPr>
               <a:t>Companion tasks and notifications</a:t>
             </a:r>
@@ -11617,7 +11619,7 @@
           <a:noFill/>
         </p:spPr>
         <p:txBody>
-          <a:bodyPr wrap="none" lIns="36576" rIns="36576" tIns="36576" bIns="36576" anchor="ctr">
+          <a:bodyPr wrap="square" lIns="36576" rIns="36576" tIns="36576" bIns="36576" anchor="ctr">
             <a:spAutoFit/>
           </a:bodyPr>
           <a:lstStyle/>
@@ -11628,7 +11630,7 @@
                 <a:solidFill>
                   <a:srgbClr val="DE232A"/>
                 </a:solidFill>
-                <a:latin typeface="Aptos"/>
+                <a:latin typeface="Liberation Sans"/>
               </a:rPr>
               <a:t>□</a:t>
             </a:r>
@@ -11652,7 +11654,7 @@
           <a:noFill/>
         </p:spPr>
         <p:txBody>
-          <a:bodyPr wrap="none" lIns="36576" rIns="36576" tIns="36576" bIns="36576" anchor="ctr">
+          <a:bodyPr wrap="square" lIns="36576" rIns="36576" tIns="36576" bIns="36576" anchor="ctr">
             <a:spAutoFit/>
           </a:bodyPr>
           <a:lstStyle/>
@@ -11663,7 +11665,7 @@
                 <a:solidFill>
                   <a:srgbClr val="122034"/>
                 </a:solidFill>
-                <a:latin typeface="Aptos"/>
+                <a:latin typeface="Liberation Sans"/>
               </a:rPr>
               <a:t>PDF report opens and is legible</a:t>
             </a:r>
@@ -11732,7 +11734,7 @@
           <a:noFill/>
         </p:spPr>
         <p:txBody>
-          <a:bodyPr wrap="none" lIns="36576" rIns="36576" tIns="36576" bIns="36576" anchor="ctr">
+          <a:bodyPr wrap="square" lIns="36576" rIns="36576" tIns="36576" bIns="36576" anchor="ctr">
             <a:spAutoFit/>
           </a:bodyPr>
           <a:lstStyle/>
@@ -11743,7 +11745,7 @@
                 <a:solidFill>
                   <a:srgbClr val="DE232A"/>
                 </a:solidFill>
-                <a:latin typeface="Aptos"/>
+                <a:latin typeface="Liberation Sans"/>
               </a:rPr>
               <a:t>□</a:t>
             </a:r>
@@ -11767,7 +11769,7 @@
           <a:noFill/>
         </p:spPr>
         <p:txBody>
-          <a:bodyPr wrap="none" lIns="36576" rIns="36576" tIns="36576" bIns="36576" anchor="ctr">
+          <a:bodyPr wrap="square" lIns="36576" rIns="36576" tIns="36576" bIns="36576" anchor="ctr">
             <a:spAutoFit/>
           </a:bodyPr>
           <a:lstStyle/>
@@ -11778,7 +11780,7 @@
                 <a:solidFill>
                   <a:srgbClr val="122034"/>
                 </a:solidFill>
-                <a:latin typeface="Aptos"/>
+                <a:latin typeface="Liberation Sans"/>
               </a:rPr>
               <a:t>Backup screenshots/video available</a:t>
             </a:r>
@@ -11847,7 +11849,7 @@
           <a:noFill/>
         </p:spPr>
         <p:txBody>
-          <a:bodyPr wrap="none" lIns="36576" rIns="36576" tIns="36576" bIns="36576" anchor="ctr">
+          <a:bodyPr wrap="square" lIns="36576" rIns="36576" tIns="36576" bIns="36576" anchor="ctr">
             <a:spAutoFit/>
           </a:bodyPr>
           <a:lstStyle/>
@@ -11858,7 +11860,7 @@
                 <a:solidFill>
                   <a:srgbClr val="0A213D"/>
                 </a:solidFill>
-                <a:latin typeface="Aptos"/>
+                <a:latin typeface="Liberation Sans"/>
               </a:rPr>
               <a:t>PROOF</a:t>
             </a:r>
@@ -11882,7 +11884,7 @@
           <a:noFill/>
         </p:spPr>
         <p:txBody>
-          <a:bodyPr wrap="none" lIns="36576" rIns="36576" tIns="36576" bIns="36576" anchor="ctr">
+          <a:bodyPr wrap="square" lIns="36576" rIns="36576" tIns="36576" bIns="36576" anchor="ctr">
             <a:spAutoFit/>
           </a:bodyPr>
           <a:lstStyle/>
@@ -11893,7 +11895,7 @@
                 <a:solidFill>
                   <a:srgbClr val="0A213D"/>
                 </a:solidFill>
-                <a:latin typeface="Aptos"/>
+                <a:latin typeface="Liberation Sans"/>
               </a:rPr>
               <a:t>Stop and switch to the backup path if latency, authentication or integrations are unstable.</a:t>
             </a:r>
@@ -12012,7 +12014,7 @@
           <a:noFill/>
         </p:spPr>
         <p:txBody>
-          <a:bodyPr wrap="none" lIns="36576" rIns="36576" tIns="36576" bIns="36576" anchor="ctr">
+          <a:bodyPr wrap="square" lIns="36576" rIns="36576" tIns="36576" bIns="36576" anchor="ctr">
             <a:spAutoFit/>
           </a:bodyPr>
           <a:lstStyle/>
@@ -12023,7 +12025,7 @@
                 <a:solidFill>
                   <a:srgbClr val="0A213D"/>
                 </a:solidFill>
-                <a:latin typeface="Aptos"/>
+                <a:latin typeface="Liberation Sans"/>
               </a:rPr>
               <a:t>CeEst ERP</a:t>
             </a:r>
@@ -12047,7 +12049,7 @@
           <a:noFill/>
         </p:spPr>
         <p:txBody>
-          <a:bodyPr wrap="none" lIns="36576" rIns="36576" tIns="36576" bIns="36576" anchor="ctr">
+          <a:bodyPr wrap="square" lIns="36576" rIns="36576" tIns="36576" bIns="36576" anchor="ctr">
             <a:spAutoFit/>
           </a:bodyPr>
           <a:lstStyle/>
@@ -12056,9 +12058,9 @@
             <a:r>
               <a:rPr sz="800" b="1">
                 <a:solidFill>
-                  <a:srgbClr val="556982"/>
-                </a:solidFill>
-                <a:latin typeface="Aptos"/>
+                  <a:srgbClr val="37495E"/>
+                </a:solidFill>
+                <a:latin typeface="Liberation Sans"/>
               </a:rPr>
               <a:t>PROPERTY  •  FACILITY  •  PERFORMANCE</a:t>
             </a:r>
@@ -12082,7 +12084,7 @@
           <a:noFill/>
         </p:spPr>
         <p:txBody>
-          <a:bodyPr wrap="none" lIns="36576" rIns="36576" tIns="36576" bIns="36576" anchor="ctr">
+          <a:bodyPr wrap="square" lIns="36576" rIns="36576" tIns="36576" bIns="36576" anchor="ctr">
             <a:spAutoFit/>
           </a:bodyPr>
           <a:lstStyle/>
@@ -12093,7 +12095,7 @@
                 <a:solidFill>
                   <a:srgbClr val="DE232A"/>
                 </a:solidFill>
-                <a:latin typeface="Aptos"/>
+                <a:latin typeface="Liberation Sans"/>
               </a:rPr>
               <a:t>CLOSE</a:t>
             </a:r>
@@ -12117,7 +12119,7 @@
           <a:noFill/>
         </p:spPr>
         <p:txBody>
-          <a:bodyPr wrap="none" lIns="36576" rIns="36576" tIns="36576" bIns="36576" anchor="ctr">
+          <a:bodyPr wrap="square" lIns="36576" rIns="36576" tIns="36576" bIns="36576" anchor="ctr">
             <a:spAutoFit/>
           </a:bodyPr>
           <a:lstStyle/>
@@ -12128,7 +12130,7 @@
                 <a:solidFill>
                   <a:srgbClr val="122034"/>
                 </a:solidFill>
-                <a:latin typeface="Aptos"/>
+                <a:latin typeface="Liberation Sans"/>
               </a:rPr>
               <a:t>CeEst is an operating control system</a:t>
             </a:r>
@@ -12152,7 +12154,7 @@
           <a:noFill/>
         </p:spPr>
         <p:txBody>
-          <a:bodyPr wrap="none" lIns="36576" rIns="36576" tIns="36576" bIns="36576" anchor="ctr">
+          <a:bodyPr wrap="square" lIns="36576" rIns="36576" tIns="36576" bIns="36576" anchor="ctr">
             <a:spAutoFit/>
           </a:bodyPr>
           <a:lstStyle/>
@@ -12161,9 +12163,9 @@
             <a:r>
               <a:rPr sz="1300" b="0">
                 <a:solidFill>
-                  <a:srgbClr val="556982"/>
-                </a:solidFill>
-                <a:latin typeface="Aptos"/>
+                  <a:srgbClr val="37495E"/>
+                </a:solidFill>
+                <a:latin typeface="Liberation Sans"/>
               </a:rPr>
               <a:t>A single live record connects tenants, staff, providers, assets, money and management evidence.</a:t>
             </a:r>
@@ -12187,7 +12189,7 @@
           <a:noFill/>
         </p:spPr>
         <p:txBody>
-          <a:bodyPr wrap="none" lIns="36576" rIns="36576" tIns="36576" bIns="36576" anchor="ctr">
+          <a:bodyPr wrap="square" lIns="36576" rIns="36576" tIns="36576" bIns="36576" anchor="ctr">
             <a:spAutoFit/>
           </a:bodyPr>
           <a:lstStyle/>
@@ -12198,7 +12200,7 @@
                 <a:solidFill>
                   <a:srgbClr val="DE232A"/>
                 </a:solidFill>
-                <a:latin typeface="Aptos"/>
+                <a:latin typeface="Liberation Sans"/>
               </a:rPr>
               <a:t>16</a:t>
             </a:r>
@@ -12267,7 +12269,7 @@
           <a:noFill/>
         </p:spPr>
         <p:txBody>
-          <a:bodyPr wrap="none" lIns="36576" rIns="36576" tIns="36576" bIns="36576" anchor="ctr">
+          <a:bodyPr wrap="square" lIns="36576" rIns="36576" tIns="36576" bIns="36576" anchor="ctr">
             <a:spAutoFit/>
           </a:bodyPr>
           <a:lstStyle/>
@@ -12278,7 +12280,7 @@
                 <a:solidFill>
                   <a:srgbClr val="FFFFFF"/>
                 </a:solidFill>
-                <a:latin typeface="Aptos"/>
+                <a:latin typeface="Liberation Sans"/>
               </a:rPr>
               <a:t>RECORD  →  PLAN  →  ASSIGN  →  EXECUTE  →  VERIFY  →  MEASURE  →  REPORT  →  IMPROVE</a:t>
             </a:r>
@@ -12302,7 +12304,7 @@
           <a:noFill/>
         </p:spPr>
         <p:txBody>
-          <a:bodyPr wrap="none" lIns="36576" rIns="36576" tIns="36576" bIns="36576" anchor="ctr">
+          <a:bodyPr wrap="square" lIns="36576" rIns="36576" tIns="36576" bIns="36576" anchor="ctr">
             <a:spAutoFit/>
           </a:bodyPr>
           <a:lstStyle/>
@@ -12313,7 +12315,7 @@
                 <a:solidFill>
                   <a:srgbClr val="122034"/>
                 </a:solidFill>
-                <a:latin typeface="Aptos"/>
+                <a:latin typeface="Liberation Sans"/>
               </a:rPr>
               <a:t>The facility is onboarded. Work is planned. Issues are controlled. Performance is measured. Reports are ready.</a:t>
             </a:r>
@@ -12337,7 +12339,7 @@
           <a:noFill/>
         </p:spPr>
         <p:txBody>
-          <a:bodyPr wrap="none" lIns="36576" rIns="36576" tIns="36576" bIns="36576" anchor="ctr">
+          <a:bodyPr wrap="square" lIns="36576" rIns="36576" tIns="36576" bIns="36576" anchor="ctr">
             <a:spAutoFit/>
           </a:bodyPr>
           <a:lstStyle/>
@@ -12348,7 +12350,7 @@
                 <a:solidFill>
                   <a:srgbClr val="DE232A"/>
                 </a:solidFill>
-                <a:latin typeface="Aptos"/>
+                <a:latin typeface="Liberation Sans"/>
               </a:rPr>
               <a:t>Questions &amp; live scenarios</a:t>
             </a:r>
@@ -12417,7 +12419,7 @@
           <a:noFill/>
         </p:spPr>
         <p:txBody>
-          <a:bodyPr wrap="none" lIns="36576" rIns="36576" tIns="36576" bIns="36576" anchor="ctr">
+          <a:bodyPr wrap="square" lIns="36576" rIns="36576" tIns="36576" bIns="36576" anchor="ctr">
             <a:spAutoFit/>
           </a:bodyPr>
           <a:lstStyle/>
@@ -12428,7 +12430,7 @@
                 <a:solidFill>
                   <a:srgbClr val="0A213D"/>
                 </a:solidFill>
-                <a:latin typeface="Aptos"/>
+                <a:latin typeface="Liberation Sans"/>
               </a:rPr>
               <a:t>PROOF</a:t>
             </a:r>
@@ -12452,7 +12454,7 @@
           <a:noFill/>
         </p:spPr>
         <p:txBody>
-          <a:bodyPr wrap="none" lIns="36576" rIns="36576" tIns="36576" bIns="36576" anchor="ctr">
+          <a:bodyPr wrap="square" lIns="36576" rIns="36576" tIns="36576" bIns="36576" anchor="ctr">
             <a:spAutoFit/>
           </a:bodyPr>
           <a:lstStyle/>
@@ -12463,7 +12465,7 @@
                 <a:solidFill>
                   <a:srgbClr val="0A213D"/>
                 </a:solidFill>
-                <a:latin typeface="Aptos"/>
+                <a:latin typeface="Liberation Sans"/>
               </a:rPr>
               <a:t>One operating record. Complete estate control.</a:t>
             </a:r>
@@ -12582,7 +12584,7 @@
           <a:noFill/>
         </p:spPr>
         <p:txBody>
-          <a:bodyPr wrap="none" lIns="36576" rIns="36576" tIns="36576" bIns="36576" anchor="ctr">
+          <a:bodyPr wrap="square" lIns="36576" rIns="36576" tIns="36576" bIns="36576" anchor="ctr">
             <a:spAutoFit/>
           </a:bodyPr>
           <a:lstStyle/>
@@ -12593,7 +12595,7 @@
                 <a:solidFill>
                   <a:srgbClr val="0A213D"/>
                 </a:solidFill>
-                <a:latin typeface="Aptos"/>
+                <a:latin typeface="Liberation Sans"/>
               </a:rPr>
               <a:t>CeEst ERP</a:t>
             </a:r>
@@ -12617,7 +12619,7 @@
           <a:noFill/>
         </p:spPr>
         <p:txBody>
-          <a:bodyPr wrap="none" lIns="36576" rIns="36576" tIns="36576" bIns="36576" anchor="ctr">
+          <a:bodyPr wrap="square" lIns="36576" rIns="36576" tIns="36576" bIns="36576" anchor="ctr">
             <a:spAutoFit/>
           </a:bodyPr>
           <a:lstStyle/>
@@ -12626,9 +12628,9 @@
             <a:r>
               <a:rPr sz="800" b="1">
                 <a:solidFill>
-                  <a:srgbClr val="556982"/>
-                </a:solidFill>
-                <a:latin typeface="Aptos"/>
+                  <a:srgbClr val="37495E"/>
+                </a:solidFill>
+                <a:latin typeface="Liberation Sans"/>
               </a:rPr>
               <a:t>PROPERTY  •  FACILITY  •  PERFORMANCE</a:t>
             </a:r>
@@ -12652,7 +12654,7 @@
           <a:noFill/>
         </p:spPr>
         <p:txBody>
-          <a:bodyPr wrap="none" lIns="36576" rIns="36576" tIns="36576" bIns="36576" anchor="ctr">
+          <a:bodyPr wrap="square" lIns="36576" rIns="36576" tIns="36576" bIns="36576" anchor="ctr">
             <a:spAutoFit/>
           </a:bodyPr>
           <a:lstStyle/>
@@ -12663,7 +12665,7 @@
                 <a:solidFill>
                   <a:srgbClr val="DE232A"/>
                 </a:solidFill>
-                <a:latin typeface="Aptos"/>
+                <a:latin typeface="Liberation Sans"/>
               </a:rPr>
               <a:t>DEMO STORY</a:t>
             </a:r>
@@ -12687,7 +12689,7 @@
           <a:noFill/>
         </p:spPr>
         <p:txBody>
-          <a:bodyPr wrap="none" lIns="36576" rIns="36576" tIns="36576" bIns="36576" anchor="ctr">
+          <a:bodyPr wrap="square" lIns="36576" rIns="36576" tIns="36576" bIns="36576" anchor="ctr">
             <a:spAutoFit/>
           </a:bodyPr>
           <a:lstStyle/>
@@ -12698,7 +12700,7 @@
                 <a:solidFill>
                   <a:srgbClr val="122034"/>
                 </a:solidFill>
-                <a:latin typeface="Aptos"/>
+                <a:latin typeface="Liberation Sans"/>
               </a:rPr>
               <a:t>From property record to management evidence</a:t>
             </a:r>
@@ -12722,7 +12724,7 @@
           <a:noFill/>
         </p:spPr>
         <p:txBody>
-          <a:bodyPr wrap="none" lIns="36576" rIns="36576" tIns="36576" bIns="36576" anchor="ctr">
+          <a:bodyPr wrap="square" lIns="36576" rIns="36576" tIns="36576" bIns="36576" anchor="ctr">
             <a:spAutoFit/>
           </a:bodyPr>
           <a:lstStyle/>
@@ -12731,9 +12733,9 @@
             <a:r>
               <a:rPr sz="1300" b="0">
                 <a:solidFill>
-                  <a:srgbClr val="556982"/>
-                </a:solidFill>
-                <a:latin typeface="Aptos"/>
+                  <a:srgbClr val="37495E"/>
+                </a:solidFill>
+                <a:latin typeface="Liberation Sans"/>
               </a:rPr>
               <a:t>A focused 25–30 minute journey—not a tour of every menu.</a:t>
             </a:r>
@@ -12757,7 +12759,7 @@
           <a:noFill/>
         </p:spPr>
         <p:txBody>
-          <a:bodyPr wrap="none" lIns="36576" rIns="36576" tIns="36576" bIns="36576" anchor="ctr">
+          <a:bodyPr wrap="square" lIns="36576" rIns="36576" tIns="36576" bIns="36576" anchor="ctr">
             <a:spAutoFit/>
           </a:bodyPr>
           <a:lstStyle/>
@@ -12768,7 +12770,7 @@
                 <a:solidFill>
                   <a:srgbClr val="DE232A"/>
                 </a:solidFill>
-                <a:latin typeface="Aptos"/>
+                <a:latin typeface="Liberation Sans"/>
               </a:rPr>
               <a:t>01</a:t>
             </a:r>
@@ -12882,7 +12884,7 @@
           <a:noFill/>
         </p:spPr>
         <p:txBody>
-          <a:bodyPr wrap="none" lIns="36576" rIns="36576" tIns="36576" bIns="36576" anchor="ctr">
+          <a:bodyPr wrap="square" lIns="36576" rIns="36576" tIns="36576" bIns="36576" anchor="ctr">
             <a:spAutoFit/>
           </a:bodyPr>
           <a:lstStyle/>
@@ -12893,7 +12895,7 @@
                 <a:solidFill>
                   <a:srgbClr val="122034"/>
                 </a:solidFill>
-                <a:latin typeface="Aptos"/>
+                <a:latin typeface="Liberation Sans"/>
               </a:rPr>
               <a:t>01  RECORD</a:t>
             </a:r>
@@ -12909,26 +12911,26 @@
         <p:spPr>
           <a:xfrm>
             <a:off x="822960" y="2990088"/>
-            <a:ext cx="3017520" cy="493776"/>
-          </a:xfrm>
-          <a:prstGeom prst="rect">
-            <a:avLst/>
-          </a:prstGeom>
-          <a:noFill/>
-        </p:spPr>
-        <p:txBody>
-          <a:bodyPr wrap="none" lIns="36576" rIns="36576" tIns="36576" bIns="36576" anchor="ctr">
-            <a:spAutoFit/>
-          </a:bodyPr>
-          <a:lstStyle/>
-          <a:p>
-            <a:pPr algn="l"/>
-            <a:r>
-              <a:rPr sz="1100" b="0">
-                <a:solidFill>
-                  <a:srgbClr val="556982"/>
-                </a:solidFill>
-                <a:latin typeface="Aptos"/>
+            <a:ext cx="3017520" cy="438912"/>
+          </a:xfrm>
+          <a:prstGeom prst="rect">
+            <a:avLst/>
+          </a:prstGeom>
+          <a:noFill/>
+        </p:spPr>
+        <p:txBody>
+          <a:bodyPr wrap="square" lIns="18288" rIns="18288" tIns="18288" bIns="18288" anchor="t">
+            <a:spAutoFit/>
+          </a:bodyPr>
+          <a:lstStyle/>
+          <a:p>
+            <a:pPr algn="l"/>
+            <a:r>
+              <a:rPr sz="1150" b="0">
+                <a:solidFill>
+                  <a:srgbClr val="37495E"/>
+                </a:solidFill>
+                <a:latin typeface="Liberation Sans"/>
               </a:rPr>
               <a:t>Property, tenant, asset and service masters</a:t>
             </a:r>
@@ -13042,7 +13044,7 @@
           <a:noFill/>
         </p:spPr>
         <p:txBody>
-          <a:bodyPr wrap="none" lIns="36576" rIns="36576" tIns="36576" bIns="36576" anchor="ctr">
+          <a:bodyPr wrap="square" lIns="36576" rIns="36576" tIns="36576" bIns="36576" anchor="ctr">
             <a:spAutoFit/>
           </a:bodyPr>
           <a:lstStyle/>
@@ -13053,7 +13055,7 @@
                 <a:solidFill>
                   <a:srgbClr val="122034"/>
                 </a:solidFill>
-                <a:latin typeface="Aptos"/>
+                <a:latin typeface="Liberation Sans"/>
               </a:rPr>
               <a:t>02  PLAN</a:t>
             </a:r>
@@ -13069,26 +13071,26 @@
         <p:spPr>
           <a:xfrm>
             <a:off x="4617720" y="2990088"/>
-            <a:ext cx="3017520" cy="493776"/>
-          </a:xfrm>
-          <a:prstGeom prst="rect">
-            <a:avLst/>
-          </a:prstGeom>
-          <a:noFill/>
-        </p:spPr>
-        <p:txBody>
-          <a:bodyPr wrap="none" lIns="36576" rIns="36576" tIns="36576" bIns="36576" anchor="ctr">
-            <a:spAutoFit/>
-          </a:bodyPr>
-          <a:lstStyle/>
-          <a:p>
-            <a:pPr algn="l"/>
-            <a:r>
-              <a:rPr sz="1100" b="0">
-                <a:solidFill>
-                  <a:srgbClr val="556982"/>
-                </a:solidFill>
-                <a:latin typeface="Aptos"/>
+            <a:ext cx="3017520" cy="438912"/>
+          </a:xfrm>
+          <a:prstGeom prst="rect">
+            <a:avLst/>
+          </a:prstGeom>
+          <a:noFill/>
+        </p:spPr>
+        <p:txBody>
+          <a:bodyPr wrap="square" lIns="18288" rIns="18288" tIns="18288" bIns="18288" anchor="t">
+            <a:spAutoFit/>
+          </a:bodyPr>
+          <a:lstStyle/>
+          <a:p>
+            <a:pPr algn="l"/>
+            <a:r>
+              <a:rPr sz="1150" b="0">
+                <a:solidFill>
+                  <a:srgbClr val="37495E"/>
+                </a:solidFill>
+                <a:latin typeface="Liberation Sans"/>
               </a:rPr>
               <a:t>Billing schedules, PPM and compliance calendars</a:t>
             </a:r>
@@ -13202,7 +13204,7 @@
           <a:noFill/>
         </p:spPr>
         <p:txBody>
-          <a:bodyPr wrap="none" lIns="36576" rIns="36576" tIns="36576" bIns="36576" anchor="ctr">
+          <a:bodyPr wrap="square" lIns="36576" rIns="36576" tIns="36576" bIns="36576" anchor="ctr">
             <a:spAutoFit/>
           </a:bodyPr>
           <a:lstStyle/>
@@ -13213,7 +13215,7 @@
                 <a:solidFill>
                   <a:srgbClr val="122034"/>
                 </a:solidFill>
-                <a:latin typeface="Aptos"/>
+                <a:latin typeface="Liberation Sans"/>
               </a:rPr>
               <a:t>03  EXECUTE</a:t>
             </a:r>
@@ -13229,26 +13231,26 @@
         <p:spPr>
           <a:xfrm>
             <a:off x="8412480" y="2990088"/>
-            <a:ext cx="3017520" cy="493776"/>
-          </a:xfrm>
-          <a:prstGeom prst="rect">
-            <a:avLst/>
-          </a:prstGeom>
-          <a:noFill/>
-        </p:spPr>
-        <p:txBody>
-          <a:bodyPr wrap="none" lIns="36576" rIns="36576" tIns="36576" bIns="36576" anchor="ctr">
-            <a:spAutoFit/>
-          </a:bodyPr>
-          <a:lstStyle/>
-          <a:p>
-            <a:pPr algn="l"/>
-            <a:r>
-              <a:rPr sz="1100" b="0">
-                <a:solidFill>
-                  <a:srgbClr val="556982"/>
-                </a:solidFill>
-                <a:latin typeface="Aptos"/>
+            <a:ext cx="3017520" cy="438912"/>
+          </a:xfrm>
+          <a:prstGeom prst="rect">
+            <a:avLst/>
+          </a:prstGeom>
+          <a:noFill/>
+        </p:spPr>
+        <p:txBody>
+          <a:bodyPr wrap="square" lIns="18288" rIns="18288" tIns="18288" bIns="18288" anchor="t">
+            <a:spAutoFit/>
+          </a:bodyPr>
+          <a:lstStyle/>
+          <a:p>
+            <a:pPr algn="l"/>
+            <a:r>
+              <a:rPr sz="1150" b="0">
+                <a:solidFill>
+                  <a:srgbClr val="37495E"/>
+                </a:solidFill>
+                <a:latin typeface="Liberation Sans"/>
               </a:rPr>
               <a:t>Tasks, tickets, work orders and collections</a:t>
             </a:r>
@@ -13362,7 +13364,7 @@
           <a:noFill/>
         </p:spPr>
         <p:txBody>
-          <a:bodyPr wrap="none" lIns="36576" rIns="36576" tIns="36576" bIns="36576" anchor="ctr">
+          <a:bodyPr wrap="square" lIns="36576" rIns="36576" tIns="36576" bIns="36576" anchor="ctr">
             <a:spAutoFit/>
           </a:bodyPr>
           <a:lstStyle/>
@@ -13373,7 +13375,7 @@
                 <a:solidFill>
                   <a:srgbClr val="122034"/>
                 </a:solidFill>
-                <a:latin typeface="Aptos"/>
+                <a:latin typeface="Liberation Sans"/>
               </a:rPr>
               <a:t>04  VERIFY</a:t>
             </a:r>
@@ -13389,26 +13391,26 @@
         <p:spPr>
           <a:xfrm>
             <a:off x="822960" y="4498848"/>
-            <a:ext cx="3017520" cy="493776"/>
-          </a:xfrm>
-          <a:prstGeom prst="rect">
-            <a:avLst/>
-          </a:prstGeom>
-          <a:noFill/>
-        </p:spPr>
-        <p:txBody>
-          <a:bodyPr wrap="none" lIns="36576" rIns="36576" tIns="36576" bIns="36576" anchor="ctr">
-            <a:spAutoFit/>
-          </a:bodyPr>
-          <a:lstStyle/>
-          <a:p>
-            <a:pPr algn="l"/>
-            <a:r>
-              <a:rPr sz="1100" b="0">
-                <a:solidFill>
-                  <a:srgbClr val="556982"/>
-                </a:solidFill>
-                <a:latin typeface="Aptos"/>
+            <a:ext cx="3017520" cy="438912"/>
+          </a:xfrm>
+          <a:prstGeom prst="rect">
+            <a:avLst/>
+          </a:prstGeom>
+          <a:noFill/>
+        </p:spPr>
+        <p:txBody>
+          <a:bodyPr wrap="square" lIns="18288" rIns="18288" tIns="18288" bIns="18288" anchor="t">
+            <a:spAutoFit/>
+          </a:bodyPr>
+          <a:lstStyle/>
+          <a:p>
+            <a:pPr algn="l"/>
+            <a:r>
+              <a:rPr sz="1150" b="0">
+                <a:solidFill>
+                  <a:srgbClr val="37495E"/>
+                </a:solidFill>
+                <a:latin typeface="Liberation Sans"/>
               </a:rPr>
               <a:t>Approvals, evidence, SLA and audit trail</a:t>
             </a:r>
@@ -13522,7 +13524,7 @@
           <a:noFill/>
         </p:spPr>
         <p:txBody>
-          <a:bodyPr wrap="none" lIns="36576" rIns="36576" tIns="36576" bIns="36576" anchor="ctr">
+          <a:bodyPr wrap="square" lIns="36576" rIns="36576" tIns="36576" bIns="36576" anchor="ctr">
             <a:spAutoFit/>
           </a:bodyPr>
           <a:lstStyle/>
@@ -13533,7 +13535,7 @@
                 <a:solidFill>
                   <a:srgbClr val="122034"/>
                 </a:solidFill>
-                <a:latin typeface="Aptos"/>
+                <a:latin typeface="Liberation Sans"/>
               </a:rPr>
               <a:t>05  MEASURE</a:t>
             </a:r>
@@ -13549,26 +13551,26 @@
         <p:spPr>
           <a:xfrm>
             <a:off x="4617720" y="4498848"/>
-            <a:ext cx="3017520" cy="493776"/>
-          </a:xfrm>
-          <a:prstGeom prst="rect">
-            <a:avLst/>
-          </a:prstGeom>
-          <a:noFill/>
-        </p:spPr>
-        <p:txBody>
-          <a:bodyPr wrap="none" lIns="36576" rIns="36576" tIns="36576" bIns="36576" anchor="ctr">
-            <a:spAutoFit/>
-          </a:bodyPr>
-          <a:lstStyle/>
-          <a:p>
-            <a:pPr algn="l"/>
-            <a:r>
-              <a:rPr sz="1100" b="0">
-                <a:solidFill>
-                  <a:srgbClr val="556982"/>
-                </a:solidFill>
-                <a:latin typeface="Aptos"/>
+            <a:ext cx="3017520" cy="438912"/>
+          </a:xfrm>
+          <a:prstGeom prst="rect">
+            <a:avLst/>
+          </a:prstGeom>
+          <a:noFill/>
+        </p:spPr>
+        <p:txBody>
+          <a:bodyPr wrap="square" lIns="18288" rIns="18288" tIns="18288" bIns="18288" anchor="t">
+            <a:spAutoFit/>
+          </a:bodyPr>
+          <a:lstStyle/>
+          <a:p>
+            <a:pPr algn="l"/>
+            <a:r>
+              <a:rPr sz="1150" b="0">
+                <a:solidFill>
+                  <a:srgbClr val="37495E"/>
+                </a:solidFill>
+                <a:latin typeface="Liberation Sans"/>
               </a:rPr>
               <a:t>KPIs, trends, ageing and performance</a:t>
             </a:r>
@@ -13682,7 +13684,7 @@
           <a:noFill/>
         </p:spPr>
         <p:txBody>
-          <a:bodyPr wrap="none" lIns="36576" rIns="36576" tIns="36576" bIns="36576" anchor="ctr">
+          <a:bodyPr wrap="square" lIns="36576" rIns="36576" tIns="36576" bIns="36576" anchor="ctr">
             <a:spAutoFit/>
           </a:bodyPr>
           <a:lstStyle/>
@@ -13693,7 +13695,7 @@
                 <a:solidFill>
                   <a:srgbClr val="122034"/>
                 </a:solidFill>
-                <a:latin typeface="Aptos"/>
+                <a:latin typeface="Liberation Sans"/>
               </a:rPr>
               <a:t>06  REPORT</a:t>
             </a:r>
@@ -13709,26 +13711,26 @@
         <p:spPr>
           <a:xfrm>
             <a:off x="8412480" y="4498848"/>
-            <a:ext cx="3017520" cy="493776"/>
-          </a:xfrm>
-          <a:prstGeom prst="rect">
-            <a:avLst/>
-          </a:prstGeom>
-          <a:noFill/>
-        </p:spPr>
-        <p:txBody>
-          <a:bodyPr wrap="none" lIns="36576" rIns="36576" tIns="36576" bIns="36576" anchor="ctr">
-            <a:spAutoFit/>
-          </a:bodyPr>
-          <a:lstStyle/>
-          <a:p>
-            <a:pPr algn="l"/>
-            <a:r>
-              <a:rPr sz="1100" b="0">
-                <a:solidFill>
-                  <a:srgbClr val="556982"/>
-                </a:solidFill>
-                <a:latin typeface="Aptos"/>
+            <a:ext cx="3017520" cy="438912"/>
+          </a:xfrm>
+          <a:prstGeom prst="rect">
+            <a:avLst/>
+          </a:prstGeom>
+          <a:noFill/>
+        </p:spPr>
+        <p:txBody>
+          <a:bodyPr wrap="square" lIns="18288" rIns="18288" tIns="18288" bIns="18288" anchor="t">
+            <a:spAutoFit/>
+          </a:bodyPr>
+          <a:lstStyle/>
+          <a:p>
+            <a:pPr algn="l"/>
+            <a:r>
+              <a:rPr sz="1150" b="0">
+                <a:solidFill>
+                  <a:srgbClr val="37495E"/>
+                </a:solidFill>
+                <a:latin typeface="Liberation Sans"/>
               </a:rPr>
               <a:t>Tenant, manager and landlord outputs</a:t>
             </a:r>
@@ -13797,7 +13799,7 @@
           <a:noFill/>
         </p:spPr>
         <p:txBody>
-          <a:bodyPr wrap="none" lIns="36576" rIns="36576" tIns="36576" bIns="36576" anchor="ctr">
+          <a:bodyPr wrap="square" lIns="36576" rIns="36576" tIns="36576" bIns="36576" anchor="ctr">
             <a:spAutoFit/>
           </a:bodyPr>
           <a:lstStyle/>
@@ -13808,7 +13810,7 @@
                 <a:solidFill>
                   <a:srgbClr val="0A213D"/>
                 </a:solidFill>
-                <a:latin typeface="Aptos"/>
+                <a:latin typeface="Liberation Sans"/>
               </a:rPr>
               <a:t>PROOF</a:t>
             </a:r>
@@ -13832,7 +13834,7 @@
           <a:noFill/>
         </p:spPr>
         <p:txBody>
-          <a:bodyPr wrap="none" lIns="36576" rIns="36576" tIns="36576" bIns="36576" anchor="ctr">
+          <a:bodyPr wrap="square" lIns="36576" rIns="36576" tIns="36576" bIns="36576" anchor="ctr">
             <a:spAutoFit/>
           </a:bodyPr>
           <a:lstStyle/>
@@ -13843,7 +13845,7 @@
                 <a:solidFill>
                   <a:srgbClr val="0A213D"/>
                 </a:solidFill>
-                <a:latin typeface="Aptos"/>
+                <a:latin typeface="Liberation Sans"/>
               </a:rPr>
               <a:t>Every dashboard number is traceable to an underlying transaction and responsible person.</a:t>
             </a:r>
@@ -13962,7 +13964,7 @@
           <a:noFill/>
         </p:spPr>
         <p:txBody>
-          <a:bodyPr wrap="none" lIns="36576" rIns="36576" tIns="36576" bIns="36576" anchor="ctr">
+          <a:bodyPr wrap="square" lIns="36576" rIns="36576" tIns="36576" bIns="36576" anchor="ctr">
             <a:spAutoFit/>
           </a:bodyPr>
           <a:lstStyle/>
@@ -13973,7 +13975,7 @@
                 <a:solidFill>
                   <a:srgbClr val="0A213D"/>
                 </a:solidFill>
-                <a:latin typeface="Aptos"/>
+                <a:latin typeface="Liberation Sans"/>
               </a:rPr>
               <a:t>CeEst ERP</a:t>
             </a:r>
@@ -13997,7 +13999,7 @@
           <a:noFill/>
         </p:spPr>
         <p:txBody>
-          <a:bodyPr wrap="none" lIns="36576" rIns="36576" tIns="36576" bIns="36576" anchor="ctr">
+          <a:bodyPr wrap="square" lIns="36576" rIns="36576" tIns="36576" bIns="36576" anchor="ctr">
             <a:spAutoFit/>
           </a:bodyPr>
           <a:lstStyle/>
@@ -14006,9 +14008,9 @@
             <a:r>
               <a:rPr sz="800" b="1">
                 <a:solidFill>
-                  <a:srgbClr val="556982"/>
-                </a:solidFill>
-                <a:latin typeface="Aptos"/>
+                  <a:srgbClr val="37495E"/>
+                </a:solidFill>
+                <a:latin typeface="Liberation Sans"/>
               </a:rPr>
               <a:t>PROPERTY  •  FACILITY  •  PERFORMANCE</a:t>
             </a:r>
@@ -14032,7 +14034,7 @@
           <a:noFill/>
         </p:spPr>
         <p:txBody>
-          <a:bodyPr wrap="none" lIns="36576" rIns="36576" tIns="36576" bIns="36576" anchor="ctr">
+          <a:bodyPr wrap="square" lIns="36576" rIns="36576" tIns="36576" bIns="36576" anchor="ctr">
             <a:spAutoFit/>
           </a:bodyPr>
           <a:lstStyle/>
@@ -14043,7 +14045,7 @@
                 <a:solidFill>
                   <a:srgbClr val="DE232A"/>
                 </a:solidFill>
-                <a:latin typeface="Aptos"/>
+                <a:latin typeface="Liberation Sans"/>
               </a:rPr>
               <a:t>COMMAND CENTRE</a:t>
             </a:r>
@@ -14067,7 +14069,7 @@
           <a:noFill/>
         </p:spPr>
         <p:txBody>
-          <a:bodyPr wrap="none" lIns="36576" rIns="36576" tIns="36576" bIns="36576" anchor="ctr">
+          <a:bodyPr wrap="square" lIns="36576" rIns="36576" tIns="36576" bIns="36576" anchor="ctr">
             <a:spAutoFit/>
           </a:bodyPr>
           <a:lstStyle/>
@@ -14078,7 +14080,7 @@
                 <a:solidFill>
                   <a:srgbClr val="122034"/>
                 </a:solidFill>
-                <a:latin typeface="Aptos"/>
+                <a:latin typeface="Liberation Sans"/>
               </a:rPr>
               <a:t>Start with today’s operating priorities</a:t>
             </a:r>
@@ -14102,7 +14104,7 @@
           <a:noFill/>
         </p:spPr>
         <p:txBody>
-          <a:bodyPr wrap="none" lIns="36576" rIns="36576" tIns="36576" bIns="36576" anchor="ctr">
+          <a:bodyPr wrap="square" lIns="36576" rIns="36576" tIns="36576" bIns="36576" anchor="ctr">
             <a:spAutoFit/>
           </a:bodyPr>
           <a:lstStyle/>
@@ -14111,9 +14113,9 @@
             <a:r>
               <a:rPr sz="1300" b="0">
                 <a:solidFill>
-                  <a:srgbClr val="556982"/>
-                </a:solidFill>
-                <a:latin typeface="Aptos"/>
+                  <a:srgbClr val="37495E"/>
+                </a:solidFill>
+                <a:latin typeface="Liberation Sans"/>
               </a:rPr>
               <a:t>Companion gives each manager one place to see what needs attention now.</a:t>
             </a:r>
@@ -14137,7 +14139,7 @@
           <a:noFill/>
         </p:spPr>
         <p:txBody>
-          <a:bodyPr wrap="none" lIns="36576" rIns="36576" tIns="36576" bIns="36576" anchor="ctr">
+          <a:bodyPr wrap="square" lIns="36576" rIns="36576" tIns="36576" bIns="36576" anchor="ctr">
             <a:spAutoFit/>
           </a:bodyPr>
           <a:lstStyle/>
@@ -14148,7 +14150,7 @@
                 <a:solidFill>
                   <a:srgbClr val="DE232A"/>
                 </a:solidFill>
-                <a:latin typeface="Aptos"/>
+                <a:latin typeface="Liberation Sans"/>
               </a:rPr>
               <a:t>02</a:t>
             </a:r>
@@ -14262,7 +14264,7 @@
           <a:noFill/>
         </p:spPr>
         <p:txBody>
-          <a:bodyPr wrap="none" lIns="36576" rIns="36576" tIns="36576" bIns="36576" anchor="ctr">
+          <a:bodyPr wrap="square" lIns="36576" rIns="36576" tIns="36576" bIns="36576" anchor="ctr">
             <a:spAutoFit/>
           </a:bodyPr>
           <a:lstStyle/>
@@ -14273,7 +14275,7 @@
                 <a:solidFill>
                   <a:srgbClr val="DE232A"/>
                 </a:solidFill>
-                <a:latin typeface="Aptos"/>
+                <a:latin typeface="Liberation Sans"/>
               </a:rPr>
               <a:t>◷</a:t>
             </a:r>
@@ -14297,7 +14299,7 @@
           <a:noFill/>
         </p:spPr>
         <p:txBody>
-          <a:bodyPr wrap="none" lIns="36576" rIns="36576" tIns="36576" bIns="36576" anchor="ctr">
+          <a:bodyPr wrap="square" lIns="36576" rIns="36576" tIns="36576" bIns="36576" anchor="ctr">
             <a:spAutoFit/>
           </a:bodyPr>
           <a:lstStyle/>
@@ -14308,7 +14310,7 @@
                 <a:solidFill>
                   <a:srgbClr val="122034"/>
                 </a:solidFill>
-                <a:latin typeface="Aptos"/>
+                <a:latin typeface="Liberation Sans"/>
               </a:rPr>
               <a:t>Due today</a:t>
             </a:r>
@@ -14324,26 +14326,26 @@
         <p:spPr>
           <a:xfrm>
             <a:off x="822960" y="2898648"/>
-            <a:ext cx="2194560" cy="722376"/>
-          </a:xfrm>
-          <a:prstGeom prst="rect">
-            <a:avLst/>
-          </a:prstGeom>
-          <a:noFill/>
-        </p:spPr>
-        <p:txBody>
-          <a:bodyPr wrap="none" lIns="36576" rIns="36576" tIns="36576" bIns="36576" anchor="ctr">
-            <a:spAutoFit/>
-          </a:bodyPr>
-          <a:lstStyle/>
-          <a:p>
-            <a:pPr algn="l"/>
-            <a:r>
-              <a:rPr sz="1100" b="0">
-                <a:solidFill>
-                  <a:srgbClr val="556982"/>
-                </a:solidFill>
-                <a:latin typeface="Aptos"/>
+            <a:ext cx="2194560" cy="667512"/>
+          </a:xfrm>
+          <a:prstGeom prst="rect">
+            <a:avLst/>
+          </a:prstGeom>
+          <a:noFill/>
+        </p:spPr>
+        <p:txBody>
+          <a:bodyPr wrap="square" lIns="18288" rIns="18288" tIns="18288" bIns="18288" anchor="t">
+            <a:spAutoFit/>
+          </a:bodyPr>
+          <a:lstStyle/>
+          <a:p>
+            <a:pPr algn="l"/>
+            <a:r>
+              <a:rPr sz="1150" b="0">
+                <a:solidFill>
+                  <a:srgbClr val="37495E"/>
+                </a:solidFill>
+                <a:latin typeface="Liberation Sans"/>
               </a:rPr>
               <a:t>Planned maintenance, inspections, lease events and assigned tasks.</a:t>
             </a:r>
@@ -14457,7 +14459,7 @@
           <a:noFill/>
         </p:spPr>
         <p:txBody>
-          <a:bodyPr wrap="none" lIns="36576" rIns="36576" tIns="36576" bIns="36576" anchor="ctr">
+          <a:bodyPr wrap="square" lIns="36576" rIns="36576" tIns="36576" bIns="36576" anchor="ctr">
             <a:spAutoFit/>
           </a:bodyPr>
           <a:lstStyle/>
@@ -14468,7 +14470,7 @@
                 <a:solidFill>
                   <a:srgbClr val="EA8614"/>
                 </a:solidFill>
-                <a:latin typeface="Aptos"/>
+                <a:latin typeface="Liberation Sans"/>
               </a:rPr>
               <a:t>!</a:t>
             </a:r>
@@ -14492,7 +14494,7 @@
           <a:noFill/>
         </p:spPr>
         <p:txBody>
-          <a:bodyPr wrap="none" lIns="36576" rIns="36576" tIns="36576" bIns="36576" anchor="ctr">
+          <a:bodyPr wrap="square" lIns="36576" rIns="36576" tIns="36576" bIns="36576" anchor="ctr">
             <a:spAutoFit/>
           </a:bodyPr>
           <a:lstStyle/>
@@ -14503,7 +14505,7 @@
                 <a:solidFill>
                   <a:srgbClr val="122034"/>
                 </a:solidFill>
-                <a:latin typeface="Aptos"/>
+                <a:latin typeface="Liberation Sans"/>
               </a:rPr>
               <a:t>Needs attention</a:t>
             </a:r>
@@ -14519,26 +14521,26 @@
         <p:spPr>
           <a:xfrm>
             <a:off x="3657600" y="2898648"/>
-            <a:ext cx="2194560" cy="722376"/>
-          </a:xfrm>
-          <a:prstGeom prst="rect">
-            <a:avLst/>
-          </a:prstGeom>
-          <a:noFill/>
-        </p:spPr>
-        <p:txBody>
-          <a:bodyPr wrap="none" lIns="36576" rIns="36576" tIns="36576" bIns="36576" anchor="ctr">
-            <a:spAutoFit/>
-          </a:bodyPr>
-          <a:lstStyle/>
-          <a:p>
-            <a:pPr algn="l"/>
-            <a:r>
-              <a:rPr sz="1100" b="0">
-                <a:solidFill>
-                  <a:srgbClr val="556982"/>
-                </a:solidFill>
-                <a:latin typeface="Aptos"/>
+            <a:ext cx="2194560" cy="667512"/>
+          </a:xfrm>
+          <a:prstGeom prst="rect">
+            <a:avLst/>
+          </a:prstGeom>
+          <a:noFill/>
+        </p:spPr>
+        <p:txBody>
+          <a:bodyPr wrap="square" lIns="18288" rIns="18288" tIns="18288" bIns="18288" anchor="t">
+            <a:spAutoFit/>
+          </a:bodyPr>
+          <a:lstStyle/>
+          <a:p>
+            <a:pPr algn="l"/>
+            <a:r>
+              <a:rPr sz="1150" b="0">
+                <a:solidFill>
+                  <a:srgbClr val="37495E"/>
+                </a:solidFill>
+                <a:latin typeface="Liberation Sans"/>
               </a:rPr>
               <a:t>Overdue actions, SLA risks, expiring compliance and approvals.</a:t>
             </a:r>
@@ -14652,7 +14654,7 @@
           <a:noFill/>
         </p:spPr>
         <p:txBody>
-          <a:bodyPr wrap="none" lIns="36576" rIns="36576" tIns="36576" bIns="36576" anchor="ctr">
+          <a:bodyPr wrap="square" lIns="36576" rIns="36576" tIns="36576" bIns="36576" anchor="ctr">
             <a:spAutoFit/>
           </a:bodyPr>
           <a:lstStyle/>
@@ -14663,7 +14665,7 @@
                 <a:solidFill>
                   <a:srgbClr val="00918A"/>
                 </a:solidFill>
-                <a:latin typeface="Aptos"/>
+                <a:latin typeface="Liberation Sans"/>
               </a:rPr>
               <a:t>✓</a:t>
             </a:r>
@@ -14687,7 +14689,7 @@
           <a:noFill/>
         </p:spPr>
         <p:txBody>
-          <a:bodyPr wrap="none" lIns="36576" rIns="36576" tIns="36576" bIns="36576" anchor="ctr">
+          <a:bodyPr wrap="square" lIns="36576" rIns="36576" tIns="36576" bIns="36576" anchor="ctr">
             <a:spAutoFit/>
           </a:bodyPr>
           <a:lstStyle/>
@@ -14698,7 +14700,7 @@
                 <a:solidFill>
                   <a:srgbClr val="122034"/>
                 </a:solidFill>
-                <a:latin typeface="Aptos"/>
+                <a:latin typeface="Liberation Sans"/>
               </a:rPr>
               <a:t>Team delivery</a:t>
             </a:r>
@@ -14714,26 +14716,26 @@
         <p:spPr>
           <a:xfrm>
             <a:off x="6492240" y="2898648"/>
-            <a:ext cx="2194560" cy="722376"/>
-          </a:xfrm>
-          <a:prstGeom prst="rect">
-            <a:avLst/>
-          </a:prstGeom>
-          <a:noFill/>
-        </p:spPr>
-        <p:txBody>
-          <a:bodyPr wrap="none" lIns="36576" rIns="36576" tIns="36576" bIns="36576" anchor="ctr">
-            <a:spAutoFit/>
-          </a:bodyPr>
-          <a:lstStyle/>
-          <a:p>
-            <a:pPr algn="l"/>
-            <a:r>
-              <a:rPr sz="1100" b="0">
-                <a:solidFill>
-                  <a:srgbClr val="556982"/>
-                </a:solidFill>
-                <a:latin typeface="Aptos"/>
+            <a:ext cx="2194560" cy="667512"/>
+          </a:xfrm>
+          <a:prstGeom prst="rect">
+            <a:avLst/>
+          </a:prstGeom>
+          <a:noFill/>
+        </p:spPr>
+        <p:txBody>
+          <a:bodyPr wrap="square" lIns="18288" rIns="18288" tIns="18288" bIns="18288" anchor="t">
+            <a:spAutoFit/>
+          </a:bodyPr>
+          <a:lstStyle/>
+          <a:p>
+            <a:pPr algn="l"/>
+            <a:r>
+              <a:rPr sz="1150" b="0">
+                <a:solidFill>
+                  <a:srgbClr val="37495E"/>
+                </a:solidFill>
+                <a:latin typeface="Liberation Sans"/>
               </a:rPr>
               <a:t>Assignments, progress, evidence and staff performance.</a:t>
             </a:r>
@@ -14847,7 +14849,7 @@
           <a:noFill/>
         </p:spPr>
         <p:txBody>
-          <a:bodyPr wrap="none" lIns="36576" rIns="36576" tIns="36576" bIns="36576" anchor="ctr">
+          <a:bodyPr wrap="square" lIns="36576" rIns="36576" tIns="36576" bIns="36576" anchor="ctr">
             <a:spAutoFit/>
           </a:bodyPr>
           <a:lstStyle/>
@@ -14858,7 +14860,7 @@
                 <a:solidFill>
                   <a:srgbClr val="12365B"/>
                 </a:solidFill>
-                <a:latin typeface="Aptos"/>
+                <a:latin typeface="Liberation Sans"/>
               </a:rPr>
               <a:t>✦</a:t>
             </a:r>
@@ -14882,7 +14884,7 @@
           <a:noFill/>
         </p:spPr>
         <p:txBody>
-          <a:bodyPr wrap="none" lIns="36576" rIns="36576" tIns="36576" bIns="36576" anchor="ctr">
+          <a:bodyPr wrap="square" lIns="36576" rIns="36576" tIns="36576" bIns="36576" anchor="ctr">
             <a:spAutoFit/>
           </a:bodyPr>
           <a:lstStyle/>
@@ -14893,7 +14895,7 @@
                 <a:solidFill>
                   <a:srgbClr val="122034"/>
                 </a:solidFill>
-                <a:latin typeface="Aptos"/>
+                <a:latin typeface="Liberation Sans"/>
               </a:rPr>
               <a:t>Quartermaster AI</a:t>
             </a:r>
@@ -14909,26 +14911,26 @@
         <p:spPr>
           <a:xfrm>
             <a:off x="9326880" y="2898648"/>
-            <a:ext cx="2057400" cy="722376"/>
-          </a:xfrm>
-          <a:prstGeom prst="rect">
-            <a:avLst/>
-          </a:prstGeom>
-          <a:noFill/>
-        </p:spPr>
-        <p:txBody>
-          <a:bodyPr wrap="none" lIns="36576" rIns="36576" tIns="36576" bIns="36576" anchor="ctr">
-            <a:spAutoFit/>
-          </a:bodyPr>
-          <a:lstStyle/>
-          <a:p>
-            <a:pPr algn="l"/>
-            <a:r>
-              <a:rPr sz="1100" b="0">
-                <a:solidFill>
-                  <a:srgbClr val="556982"/>
-                </a:solidFill>
-                <a:latin typeface="Aptos"/>
+            <a:ext cx="2057400" cy="667512"/>
+          </a:xfrm>
+          <a:prstGeom prst="rect">
+            <a:avLst/>
+          </a:prstGeom>
+          <a:noFill/>
+        </p:spPr>
+        <p:txBody>
+          <a:bodyPr wrap="square" lIns="18288" rIns="18288" tIns="18288" bIns="18288" anchor="t">
+            <a:spAutoFit/>
+          </a:bodyPr>
+          <a:lstStyle/>
+          <a:p>
+            <a:pPr algn="l"/>
+            <a:r>
+              <a:rPr sz="1150" b="0">
+                <a:solidFill>
+                  <a:srgbClr val="37495E"/>
+                </a:solidFill>
+                <a:latin typeface="Liberation Sans"/>
               </a:rPr>
               <a:t>Contextual assistance, summaries and operational guidance.</a:t>
             </a:r>
@@ -14965,7 +14967,7 @@
                 <a:solidFill>
                   <a:srgbClr val="122034"/>
                 </a:solidFill>
-                <a:latin typeface="Aptos"/>
+                <a:latin typeface="Liberation Sans"/>
               </a:defRPr>
             </a:pPr>
             <a:r>
@@ -14981,7 +14983,7 @@
                 <a:solidFill>
                   <a:srgbClr val="122034"/>
                 </a:solidFill>
-                <a:latin typeface="Aptos"/>
+                <a:latin typeface="Liberation Sans"/>
               </a:defRPr>
             </a:pPr>
             <a:r>
@@ -14997,7 +14999,7 @@
                 <a:solidFill>
                   <a:srgbClr val="122034"/>
                 </a:solidFill>
-                <a:latin typeface="Aptos"/>
+                <a:latin typeface="Liberation Sans"/>
               </a:defRPr>
             </a:pPr>
             <a:r>
@@ -15068,7 +15070,7 @@
           <a:noFill/>
         </p:spPr>
         <p:txBody>
-          <a:bodyPr wrap="none" lIns="36576" rIns="36576" tIns="36576" bIns="36576" anchor="ctr">
+          <a:bodyPr wrap="square" lIns="36576" rIns="36576" tIns="36576" bIns="36576" anchor="ctr">
             <a:spAutoFit/>
           </a:bodyPr>
           <a:lstStyle/>
@@ -15079,7 +15081,7 @@
                 <a:solidFill>
                   <a:srgbClr val="0A213D"/>
                 </a:solidFill>
-                <a:latin typeface="Aptos"/>
+                <a:latin typeface="Liberation Sans"/>
               </a:rPr>
               <a:t>PROOF</a:t>
             </a:r>
@@ -15103,7 +15105,7 @@
           <a:noFill/>
         </p:spPr>
         <p:txBody>
-          <a:bodyPr wrap="none" lIns="36576" rIns="36576" tIns="36576" bIns="36576" anchor="ctr">
+          <a:bodyPr wrap="square" lIns="36576" rIns="36576" tIns="36576" bIns="36576" anchor="ctr">
             <a:spAutoFit/>
           </a:bodyPr>
           <a:lstStyle/>
@@ -15114,7 +15116,7 @@
                 <a:solidFill>
                   <a:srgbClr val="0A213D"/>
                 </a:solidFill>
-                <a:latin typeface="Aptos"/>
+                <a:latin typeface="Liberation Sans"/>
               </a:rPr>
               <a:t>The ERP behaves as an operating command centre, not a passive database.</a:t>
             </a:r>
@@ -15233,7 +15235,7 @@
           <a:noFill/>
         </p:spPr>
         <p:txBody>
-          <a:bodyPr wrap="none" lIns="36576" rIns="36576" tIns="36576" bIns="36576" anchor="ctr">
+          <a:bodyPr wrap="square" lIns="36576" rIns="36576" tIns="36576" bIns="36576" anchor="ctr">
             <a:spAutoFit/>
           </a:bodyPr>
           <a:lstStyle/>
@@ -15244,7 +15246,7 @@
                 <a:solidFill>
                   <a:srgbClr val="0A213D"/>
                 </a:solidFill>
-                <a:latin typeface="Aptos"/>
+                <a:latin typeface="Liberation Sans"/>
               </a:rPr>
               <a:t>CeEst ERP</a:t>
             </a:r>
@@ -15268,7 +15270,7 @@
           <a:noFill/>
         </p:spPr>
         <p:txBody>
-          <a:bodyPr wrap="none" lIns="36576" rIns="36576" tIns="36576" bIns="36576" anchor="ctr">
+          <a:bodyPr wrap="square" lIns="36576" rIns="36576" tIns="36576" bIns="36576" anchor="ctr">
             <a:spAutoFit/>
           </a:bodyPr>
           <a:lstStyle/>
@@ -15277,9 +15279,9 @@
             <a:r>
               <a:rPr sz="800" b="1">
                 <a:solidFill>
-                  <a:srgbClr val="556982"/>
-                </a:solidFill>
-                <a:latin typeface="Aptos"/>
+                  <a:srgbClr val="37495E"/>
+                </a:solidFill>
+                <a:latin typeface="Liberation Sans"/>
               </a:rPr>
               <a:t>PROPERTY  •  FACILITY  •  PERFORMANCE</a:t>
             </a:r>
@@ -15303,7 +15305,7 @@
           <a:noFill/>
         </p:spPr>
         <p:txBody>
-          <a:bodyPr wrap="none" lIns="36576" rIns="36576" tIns="36576" bIns="36576" anchor="ctr">
+          <a:bodyPr wrap="square" lIns="36576" rIns="36576" tIns="36576" bIns="36576" anchor="ctr">
             <a:spAutoFit/>
           </a:bodyPr>
           <a:lstStyle/>
@@ -15314,7 +15316,7 @@
                 <a:solidFill>
                   <a:srgbClr val="DE232A"/>
                 </a:solidFill>
-                <a:latin typeface="Aptos"/>
+                <a:latin typeface="Liberation Sans"/>
               </a:rPr>
               <a:t>PROPERTY FOUNDATION</a:t>
             </a:r>
@@ -15338,7 +15340,7 @@
           <a:noFill/>
         </p:spPr>
         <p:txBody>
-          <a:bodyPr wrap="none" lIns="36576" rIns="36576" tIns="36576" bIns="36576" anchor="ctr">
+          <a:bodyPr wrap="square" lIns="36576" rIns="36576" tIns="36576" bIns="36576" anchor="ctr">
             <a:spAutoFit/>
           </a:bodyPr>
           <a:lstStyle/>
@@ -15349,7 +15351,7 @@
                 <a:solidFill>
                   <a:srgbClr val="122034"/>
                 </a:solidFill>
-                <a:latin typeface="Aptos"/>
+                <a:latin typeface="Liberation Sans"/>
               </a:rPr>
               <a:t>A complete, property-scoped operating record</a:t>
             </a:r>
@@ -15373,7 +15375,7 @@
           <a:noFill/>
         </p:spPr>
         <p:txBody>
-          <a:bodyPr wrap="none" lIns="36576" rIns="36576" tIns="36576" bIns="36576" anchor="ctr">
+          <a:bodyPr wrap="square" lIns="36576" rIns="36576" tIns="36576" bIns="36576" anchor="ctr">
             <a:spAutoFit/>
           </a:bodyPr>
           <a:lstStyle/>
@@ -15382,9 +15384,9 @@
             <a:r>
               <a:rPr sz="1300" b="0">
                 <a:solidFill>
-                  <a:srgbClr val="556982"/>
-                </a:solidFill>
-                <a:latin typeface="Aptos"/>
+                  <a:srgbClr val="37495E"/>
+                </a:solidFill>
+                <a:latin typeface="Liberation Sans"/>
               </a:rPr>
               <a:t>Property → buildings/areas → units → tenants → services → assets.</a:t>
             </a:r>
@@ -15408,7 +15410,7 @@
           <a:noFill/>
         </p:spPr>
         <p:txBody>
-          <a:bodyPr wrap="none" lIns="36576" rIns="36576" tIns="36576" bIns="36576" anchor="ctr">
+          <a:bodyPr wrap="square" lIns="36576" rIns="36576" tIns="36576" bIns="36576" anchor="ctr">
             <a:spAutoFit/>
           </a:bodyPr>
           <a:lstStyle/>
@@ -15419,7 +15421,7 @@
                 <a:solidFill>
                   <a:srgbClr val="DE232A"/>
                 </a:solidFill>
-                <a:latin typeface="Aptos"/>
+                <a:latin typeface="Liberation Sans"/>
               </a:rPr>
               <a:t>03</a:t>
             </a:r>
@@ -15533,7 +15535,7 @@
           <a:noFill/>
         </p:spPr>
         <p:txBody>
-          <a:bodyPr wrap="none" lIns="36576" rIns="36576" tIns="36576" bIns="36576" anchor="ctr">
+          <a:bodyPr wrap="square" lIns="36576" rIns="36576" tIns="36576" bIns="36576" anchor="ctr">
             <a:spAutoFit/>
           </a:bodyPr>
           <a:lstStyle/>
@@ -15544,7 +15546,7 @@
                 <a:solidFill>
                   <a:srgbClr val="12365B"/>
                 </a:solidFill>
-                <a:latin typeface="Aptos"/>
+                <a:latin typeface="Liberation Sans"/>
               </a:rPr>
               <a:t>▦</a:t>
             </a:r>
@@ -15568,7 +15570,7 @@
           <a:noFill/>
         </p:spPr>
         <p:txBody>
-          <a:bodyPr wrap="none" lIns="36576" rIns="36576" tIns="36576" bIns="36576" anchor="ctr">
+          <a:bodyPr wrap="square" lIns="36576" rIns="36576" tIns="36576" bIns="36576" anchor="ctr">
             <a:spAutoFit/>
           </a:bodyPr>
           <a:lstStyle/>
@@ -15579,7 +15581,7 @@
                 <a:solidFill>
                   <a:srgbClr val="122034"/>
                 </a:solidFill>
-                <a:latin typeface="Aptos"/>
+                <a:latin typeface="Liberation Sans"/>
               </a:rPr>
               <a:t>Property &amp; buildings</a:t>
             </a:r>
@@ -15595,26 +15597,26 @@
         <p:spPr>
           <a:xfrm>
             <a:off x="822960" y="2898648"/>
-            <a:ext cx="2971800" cy="1773936"/>
-          </a:xfrm>
-          <a:prstGeom prst="rect">
-            <a:avLst/>
-          </a:prstGeom>
-          <a:noFill/>
-        </p:spPr>
-        <p:txBody>
-          <a:bodyPr wrap="none" lIns="36576" rIns="36576" tIns="36576" bIns="36576" anchor="ctr">
-            <a:spAutoFit/>
-          </a:bodyPr>
-          <a:lstStyle/>
-          <a:p>
-            <a:pPr algn="l"/>
-            <a:r>
-              <a:rPr sz="1100" b="0">
-                <a:solidFill>
-                  <a:srgbClr val="556982"/>
-                </a:solidFill>
-                <a:latin typeface="Aptos"/>
+            <a:ext cx="2971800" cy="1719072"/>
+          </a:xfrm>
+          <a:prstGeom prst="rect">
+            <a:avLst/>
+          </a:prstGeom>
+          <a:noFill/>
+        </p:spPr>
+        <p:txBody>
+          <a:bodyPr wrap="square" lIns="18288" rIns="18288" tIns="18288" bIns="18288" anchor="t">
+            <a:spAutoFit/>
+          </a:bodyPr>
+          <a:lstStyle/>
+          <a:p>
+            <a:pPr algn="l"/>
+            <a:r>
+              <a:rPr sz="1150" b="0">
+                <a:solidFill>
+                  <a:srgbClr val="37495E"/>
+                </a:solidFill>
+                <a:latin typeface="Liberation Sans"/>
               </a:rPr>
               <a:t>Identity, address, ownership, building hierarchy, lettable area, utilities, documents and contacts.</a:t>
             </a:r>
@@ -15728,7 +15730,7 @@
           <a:noFill/>
         </p:spPr>
         <p:txBody>
-          <a:bodyPr wrap="none" lIns="36576" rIns="36576" tIns="36576" bIns="36576" anchor="ctr">
+          <a:bodyPr wrap="square" lIns="36576" rIns="36576" tIns="36576" bIns="36576" anchor="ctr">
             <a:spAutoFit/>
           </a:bodyPr>
           <a:lstStyle/>
@@ -15739,7 +15741,7 @@
                 <a:solidFill>
                   <a:srgbClr val="DE232A"/>
                 </a:solidFill>
-                <a:latin typeface="Aptos"/>
+                <a:latin typeface="Liberation Sans"/>
               </a:rPr>
               <a:t>⌂</a:t>
             </a:r>
@@ -15763,7 +15765,7 @@
           <a:noFill/>
         </p:spPr>
         <p:txBody>
-          <a:bodyPr wrap="none" lIns="36576" rIns="36576" tIns="36576" bIns="36576" anchor="ctr">
+          <a:bodyPr wrap="square" lIns="36576" rIns="36576" tIns="36576" bIns="36576" anchor="ctr">
             <a:spAutoFit/>
           </a:bodyPr>
           <a:lstStyle/>
@@ -15774,7 +15776,7 @@
                 <a:solidFill>
                   <a:srgbClr val="122034"/>
                 </a:solidFill>
-                <a:latin typeface="Aptos"/>
+                <a:latin typeface="Liberation Sans"/>
               </a:rPr>
               <a:t>Units &amp; billing schedule</a:t>
             </a:r>
@@ -15790,26 +15792,26 @@
         <p:spPr>
           <a:xfrm>
             <a:off x="4416552" y="2898648"/>
-            <a:ext cx="2971800" cy="1773936"/>
-          </a:xfrm>
-          <a:prstGeom prst="rect">
-            <a:avLst/>
-          </a:prstGeom>
-          <a:noFill/>
-        </p:spPr>
-        <p:txBody>
-          <a:bodyPr wrap="none" lIns="36576" rIns="36576" tIns="36576" bIns="36576" anchor="ctr">
-            <a:spAutoFit/>
-          </a:bodyPr>
-          <a:lstStyle/>
-          <a:p>
-            <a:pPr algn="l"/>
-            <a:r>
-              <a:rPr sz="1100" b="0">
-                <a:solidFill>
-                  <a:srgbClr val="556982"/>
-                </a:solidFill>
-                <a:latin typeface="Aptos"/>
+            <a:ext cx="2971800" cy="1719072"/>
+          </a:xfrm>
+          <a:prstGeom prst="rect">
+            <a:avLst/>
+          </a:prstGeom>
+          <a:noFill/>
+        </p:spPr>
+        <p:txBody>
+          <a:bodyPr wrap="square" lIns="18288" rIns="18288" tIns="18288" bIns="18288" anchor="t">
+            <a:spAutoFit/>
+          </a:bodyPr>
+          <a:lstStyle/>
+          <a:p>
+            <a:pPr algn="l"/>
+            <a:r>
+              <a:rPr sz="1150" b="0">
+                <a:solidFill>
+                  <a:srgbClr val="37495E"/>
+                </a:solidFill>
+                <a:latin typeface="Liberation Sans"/>
               </a:rPr>
               <a:t>Unit use, floor, area, parking, recurring charges, deposits and utility applicability.</a:t>
             </a:r>
@@ -15923,7 +15925,7 @@
           <a:noFill/>
         </p:spPr>
         <p:txBody>
-          <a:bodyPr wrap="none" lIns="36576" rIns="36576" tIns="36576" bIns="36576" anchor="ctr">
+          <a:bodyPr wrap="square" lIns="36576" rIns="36576" tIns="36576" bIns="36576" anchor="ctr">
             <a:spAutoFit/>
           </a:bodyPr>
           <a:lstStyle/>
@@ -15934,7 +15936,7 @@
                 <a:solidFill>
                   <a:srgbClr val="00918A"/>
                 </a:solidFill>
-                <a:latin typeface="Aptos"/>
+                <a:latin typeface="Liberation Sans"/>
               </a:rPr>
               <a:t>◎</a:t>
             </a:r>
@@ -15958,7 +15960,7 @@
           <a:noFill/>
         </p:spPr>
         <p:txBody>
-          <a:bodyPr wrap="none" lIns="36576" rIns="36576" tIns="36576" bIns="36576" anchor="ctr">
+          <a:bodyPr wrap="square" lIns="36576" rIns="36576" tIns="36576" bIns="36576" anchor="ctr">
             <a:spAutoFit/>
           </a:bodyPr>
           <a:lstStyle/>
@@ -15969,7 +15971,7 @@
                 <a:solidFill>
                   <a:srgbClr val="122034"/>
                 </a:solidFill>
-                <a:latin typeface="Aptos"/>
+                <a:latin typeface="Liberation Sans"/>
               </a:rPr>
               <a:t>Tenant &amp; lease</a:t>
             </a:r>
@@ -15985,26 +15987,26 @@
         <p:spPr>
           <a:xfrm>
             <a:off x="8010144" y="2898648"/>
-            <a:ext cx="2971800" cy="1773936"/>
-          </a:xfrm>
-          <a:prstGeom prst="rect">
-            <a:avLst/>
-          </a:prstGeom>
-          <a:noFill/>
-        </p:spPr>
-        <p:txBody>
-          <a:bodyPr wrap="none" lIns="36576" rIns="36576" tIns="36576" bIns="36576" anchor="ctr">
-            <a:spAutoFit/>
-          </a:bodyPr>
-          <a:lstStyle/>
-          <a:p>
-            <a:pPr algn="l"/>
-            <a:r>
-              <a:rPr sz="1100" b="0">
-                <a:solidFill>
-                  <a:srgbClr val="556982"/>
-                </a:solidFill>
-                <a:latin typeface="Aptos"/>
+            <a:ext cx="2971800" cy="1719072"/>
+          </a:xfrm>
+          <a:prstGeom prst="rect">
+            <a:avLst/>
+          </a:prstGeom>
+          <a:noFill/>
+        </p:spPr>
+        <p:txBody>
+          <a:bodyPr wrap="square" lIns="18288" rIns="18288" tIns="18288" bIns="18288" anchor="t">
+            <a:spAutoFit/>
+          </a:bodyPr>
+          <a:lstStyle/>
+          <a:p>
+            <a:pPr algn="l"/>
+            <a:r>
+              <a:rPr sz="1150" b="0">
+                <a:solidFill>
+                  <a:srgbClr val="37495E"/>
+                </a:solidFill>
+                <a:latin typeface="Liberation Sans"/>
               </a:rPr>
               <a:t>Application, contacts, assigned unit, commencement, expiry, escalation and approvals.</a:t>
             </a:r>
@@ -16028,7 +16030,7 @@
           <a:noFill/>
         </p:spPr>
         <p:txBody>
-          <a:bodyPr wrap="none" lIns="36576" rIns="36576" tIns="36576" bIns="36576" anchor="ctr">
+          <a:bodyPr wrap="square" lIns="36576" rIns="36576" tIns="36576" bIns="36576" anchor="ctr">
             <a:spAutoFit/>
           </a:bodyPr>
           <a:lstStyle/>
@@ -16039,7 +16041,7 @@
                 <a:solidFill>
                   <a:srgbClr val="0A213D"/>
                 </a:solidFill>
-                <a:latin typeface="Aptos"/>
+                <a:latin typeface="Liberation Sans"/>
               </a:rPr>
               <a:t>All module tabs inherit the selected property—no portfolio totals inside a property workspace.</a:t>
             </a:r>
@@ -16108,7 +16110,7 @@
           <a:noFill/>
         </p:spPr>
         <p:txBody>
-          <a:bodyPr wrap="none" lIns="36576" rIns="36576" tIns="36576" bIns="36576" anchor="ctr">
+          <a:bodyPr wrap="square" lIns="36576" rIns="36576" tIns="36576" bIns="36576" anchor="ctr">
             <a:spAutoFit/>
           </a:bodyPr>
           <a:lstStyle/>
@@ -16119,7 +16121,7 @@
                 <a:solidFill>
                   <a:srgbClr val="0A213D"/>
                 </a:solidFill>
-                <a:latin typeface="Aptos"/>
+                <a:latin typeface="Liberation Sans"/>
               </a:rPr>
               <a:t>PROOF</a:t>
             </a:r>
@@ -16143,7 +16145,7 @@
           <a:noFill/>
         </p:spPr>
         <p:txBody>
-          <a:bodyPr wrap="none" lIns="36576" rIns="36576" tIns="36576" bIns="36576" anchor="ctr">
+          <a:bodyPr wrap="square" lIns="36576" rIns="36576" tIns="36576" bIns="36576" anchor="ctr">
             <a:spAutoFit/>
           </a:bodyPr>
           <a:lstStyle/>
@@ -16154,7 +16156,7 @@
                 <a:solidFill>
                   <a:srgbClr val="0A213D"/>
                 </a:solidFill>
-                <a:latin typeface="Aptos"/>
+                <a:latin typeface="Liberation Sans"/>
               </a:rPr>
               <a:t>One trusted structure eliminates duplicate setup and enables automatic downstream billing and reporting.</a:t>
             </a:r>
@@ -16273,7 +16275,7 @@
           <a:noFill/>
         </p:spPr>
         <p:txBody>
-          <a:bodyPr wrap="none" lIns="36576" rIns="36576" tIns="36576" bIns="36576" anchor="ctr">
+          <a:bodyPr wrap="square" lIns="36576" rIns="36576" tIns="36576" bIns="36576" anchor="ctr">
             <a:spAutoFit/>
           </a:bodyPr>
           <a:lstStyle/>
@@ -16284,7 +16286,7 @@
                 <a:solidFill>
                   <a:srgbClr val="0A213D"/>
                 </a:solidFill>
-                <a:latin typeface="Aptos"/>
+                <a:latin typeface="Liberation Sans"/>
               </a:rPr>
               <a:t>CeEst ERP</a:t>
             </a:r>
@@ -16308,7 +16310,7 @@
           <a:noFill/>
         </p:spPr>
         <p:txBody>
-          <a:bodyPr wrap="none" lIns="36576" rIns="36576" tIns="36576" bIns="36576" anchor="ctr">
+          <a:bodyPr wrap="square" lIns="36576" rIns="36576" tIns="36576" bIns="36576" anchor="ctr">
             <a:spAutoFit/>
           </a:bodyPr>
           <a:lstStyle/>
@@ -16317,9 +16319,9 @@
             <a:r>
               <a:rPr sz="800" b="1">
                 <a:solidFill>
-                  <a:srgbClr val="556982"/>
-                </a:solidFill>
-                <a:latin typeface="Aptos"/>
+                  <a:srgbClr val="37495E"/>
+                </a:solidFill>
+                <a:latin typeface="Liberation Sans"/>
               </a:rPr>
               <a:t>PROPERTY  •  FACILITY  •  PERFORMANCE</a:t>
             </a:r>
@@ -16343,7 +16345,7 @@
           <a:noFill/>
         </p:spPr>
         <p:txBody>
-          <a:bodyPr wrap="none" lIns="36576" rIns="36576" tIns="36576" bIns="36576" anchor="ctr">
+          <a:bodyPr wrap="square" lIns="36576" rIns="36576" tIns="36576" bIns="36576" anchor="ctr">
             <a:spAutoFit/>
           </a:bodyPr>
           <a:lstStyle/>
@@ -16354,7 +16356,7 @@
                 <a:solidFill>
                   <a:srgbClr val="DE232A"/>
                 </a:solidFill>
-                <a:latin typeface="Aptos"/>
+                <a:latin typeface="Liberation Sans"/>
               </a:rPr>
               <a:t>PROPERTY MANAGEMENT</a:t>
             </a:r>
@@ -16378,7 +16380,7 @@
           <a:noFill/>
         </p:spPr>
         <p:txBody>
-          <a:bodyPr wrap="none" lIns="36576" rIns="36576" tIns="36576" bIns="36576" anchor="ctr">
+          <a:bodyPr wrap="square" lIns="36576" rIns="36576" tIns="36576" bIns="36576" anchor="ctr">
             <a:spAutoFit/>
           </a:bodyPr>
           <a:lstStyle/>
@@ -16389,7 +16391,7 @@
                 <a:solidFill>
                   <a:srgbClr val="122034"/>
                 </a:solidFill>
-                <a:latin typeface="Aptos"/>
+                <a:latin typeface="Liberation Sans"/>
               </a:rPr>
               <a:t>Tenancy and billing are configured once</a:t>
             </a:r>
@@ -16413,7 +16415,7 @@
           <a:noFill/>
         </p:spPr>
         <p:txBody>
-          <a:bodyPr wrap="none" lIns="36576" rIns="36576" tIns="36576" bIns="36576" anchor="ctr">
+          <a:bodyPr wrap="square" lIns="36576" rIns="36576" tIns="36576" bIns="36576" anchor="ctr">
             <a:spAutoFit/>
           </a:bodyPr>
           <a:lstStyle/>
@@ -16422,9 +16424,9 @@
             <a:r>
               <a:rPr sz="1300" b="0">
                 <a:solidFill>
-                  <a:srgbClr val="556982"/>
-                </a:solidFill>
-                <a:latin typeface="Aptos"/>
+                  <a:srgbClr val="37495E"/>
+                </a:solidFill>
+                <a:latin typeface="Liberation Sans"/>
               </a:rPr>
               <a:t>The unit defines what can be billed; the lease defines when rent becomes due.</a:t>
             </a:r>
@@ -16448,7 +16450,7 @@
           <a:noFill/>
         </p:spPr>
         <p:txBody>
-          <a:bodyPr wrap="none" lIns="36576" rIns="36576" tIns="36576" bIns="36576" anchor="ctr">
+          <a:bodyPr wrap="square" lIns="36576" rIns="36576" tIns="36576" bIns="36576" anchor="ctr">
             <a:spAutoFit/>
           </a:bodyPr>
           <a:lstStyle/>
@@ -16459,7 +16461,7 @@
                 <a:solidFill>
                   <a:srgbClr val="DE232A"/>
                 </a:solidFill>
-                <a:latin typeface="Aptos"/>
+                <a:latin typeface="Liberation Sans"/>
               </a:rPr>
               <a:t>04</a:t>
             </a:r>
@@ -16573,7 +16575,7 @@
           <a:noFill/>
         </p:spPr>
         <p:txBody>
-          <a:bodyPr wrap="none" lIns="36576" rIns="36576" tIns="36576" bIns="36576" anchor="ctr">
+          <a:bodyPr wrap="square" lIns="36576" rIns="36576" tIns="36576" bIns="36576" anchor="ctr">
             <a:spAutoFit/>
           </a:bodyPr>
           <a:lstStyle/>
@@ -16584,7 +16586,7 @@
                 <a:solidFill>
                   <a:srgbClr val="122034"/>
                 </a:solidFill>
-                <a:latin typeface="Aptos"/>
+                <a:latin typeface="Liberation Sans"/>
               </a:rPr>
               <a:t>1  Configure the unit</a:t>
             </a:r>
@@ -16600,26 +16602,26 @@
         <p:spPr>
           <a:xfrm>
             <a:off x="822960" y="2871216"/>
-            <a:ext cx="3017520" cy="1865376"/>
-          </a:xfrm>
-          <a:prstGeom prst="rect">
-            <a:avLst/>
-          </a:prstGeom>
-          <a:noFill/>
-        </p:spPr>
-        <p:txBody>
-          <a:bodyPr wrap="none" lIns="36576" rIns="36576" tIns="36576" bIns="36576" anchor="ctr">
-            <a:spAutoFit/>
-          </a:bodyPr>
-          <a:lstStyle/>
-          <a:p>
-            <a:pPr algn="l"/>
-            <a:r>
-              <a:rPr sz="1100" b="0">
-                <a:solidFill>
-                  <a:srgbClr val="556982"/>
-                </a:solidFill>
-                <a:latin typeface="Aptos"/>
+            <a:ext cx="3017520" cy="1810512"/>
+          </a:xfrm>
+          <a:prstGeom prst="rect">
+            <a:avLst/>
+          </a:prstGeom>
+          <a:noFill/>
+        </p:spPr>
+        <p:txBody>
+          <a:bodyPr wrap="square" lIns="18288" rIns="18288" tIns="18288" bIns="18288" anchor="t">
+            <a:spAutoFit/>
+          </a:bodyPr>
+          <a:lstStyle/>
+          <a:p>
+            <a:pPr algn="l"/>
+            <a:r>
+              <a:rPr sz="1150" b="0">
+                <a:solidFill>
+                  <a:srgbClr val="37495E"/>
+                </a:solidFill>
+                <a:latin typeface="Liberation Sans"/>
               </a:rPr>
               <a:t>Rent basis, service charge, utilities, parking and deposits belong to the unit billing schedule.</a:t>
             </a:r>
@@ -16733,7 +16735,7 @@
           <a:noFill/>
         </p:spPr>
         <p:txBody>
-          <a:bodyPr wrap="none" lIns="36576" rIns="36576" tIns="36576" bIns="36576" anchor="ctr">
+          <a:bodyPr wrap="square" lIns="36576" rIns="36576" tIns="36576" bIns="36576" anchor="ctr">
             <a:spAutoFit/>
           </a:bodyPr>
           <a:lstStyle/>
@@ -16744,7 +16746,7 @@
                 <a:solidFill>
                   <a:srgbClr val="122034"/>
                 </a:solidFill>
-                <a:latin typeface="Aptos"/>
+                <a:latin typeface="Liberation Sans"/>
               </a:rPr>
               <a:t>2  Create the tenancy</a:t>
             </a:r>
@@ -16760,26 +16762,26 @@
         <p:spPr>
           <a:xfrm>
             <a:off x="4590288" y="2871216"/>
-            <a:ext cx="3017520" cy="1865376"/>
-          </a:xfrm>
-          <a:prstGeom prst="rect">
-            <a:avLst/>
-          </a:prstGeom>
-          <a:noFill/>
-        </p:spPr>
-        <p:txBody>
-          <a:bodyPr wrap="none" lIns="36576" rIns="36576" tIns="36576" bIns="36576" anchor="ctr">
-            <a:spAutoFit/>
-          </a:bodyPr>
-          <a:lstStyle/>
-          <a:p>
-            <a:pPr algn="l"/>
-            <a:r>
-              <a:rPr sz="1100" b="0">
-                <a:solidFill>
-                  <a:srgbClr val="556982"/>
-                </a:solidFill>
-                <a:latin typeface="Aptos"/>
+            <a:ext cx="3017520" cy="1810512"/>
+          </a:xfrm>
+          <a:prstGeom prst="rect">
+            <a:avLst/>
+          </a:prstGeom>
+          <a:noFill/>
+        </p:spPr>
+        <p:txBody>
+          <a:bodyPr wrap="square" lIns="18288" rIns="18288" tIns="18288" bIns="18288" anchor="t">
+            <a:spAutoFit/>
+          </a:bodyPr>
+          <a:lstStyle/>
+          <a:p>
+            <a:pPr algn="l"/>
+            <a:r>
+              <a:rPr sz="1150" b="0">
+                <a:solidFill>
+                  <a:srgbClr val="37495E"/>
+                </a:solidFill>
+                <a:latin typeface="Liberation Sans"/>
               </a:rPr>
               <a:t>Select the unit, capture lease dates and escalation, then inherit applicable charges automatically.</a:t>
             </a:r>
@@ -16893,7 +16895,7 @@
           <a:noFill/>
         </p:spPr>
         <p:txBody>
-          <a:bodyPr wrap="none" lIns="36576" rIns="36576" tIns="36576" bIns="36576" anchor="ctr">
+          <a:bodyPr wrap="square" lIns="36576" rIns="36576" tIns="36576" bIns="36576" anchor="ctr">
             <a:spAutoFit/>
           </a:bodyPr>
           <a:lstStyle/>
@@ -16904,7 +16906,7 @@
                 <a:solidFill>
                   <a:srgbClr val="122034"/>
                 </a:solidFill>
-                <a:latin typeface="Aptos"/>
+                <a:latin typeface="Liberation Sans"/>
               </a:rPr>
               <a:t>3  Generate invoices</a:t>
             </a:r>
@@ -16920,26 +16922,26 @@
         <p:spPr>
           <a:xfrm>
             <a:off x="8357616" y="2871216"/>
-            <a:ext cx="3017520" cy="1865376"/>
-          </a:xfrm>
-          <a:prstGeom prst="rect">
-            <a:avLst/>
-          </a:prstGeom>
-          <a:noFill/>
-        </p:spPr>
-        <p:txBody>
-          <a:bodyPr wrap="none" lIns="36576" rIns="36576" tIns="36576" bIns="36576" anchor="ctr">
-            <a:spAutoFit/>
-          </a:bodyPr>
-          <a:lstStyle/>
-          <a:p>
-            <a:pPr algn="l"/>
-            <a:r>
-              <a:rPr sz="1100" b="0">
-                <a:solidFill>
-                  <a:srgbClr val="556982"/>
-                </a:solidFill>
-                <a:latin typeface="Aptos"/>
+            <a:ext cx="3017520" cy="1810512"/>
+          </a:xfrm>
+          <a:prstGeom prst="rect">
+            <a:avLst/>
+          </a:prstGeom>
+          <a:noFill/>
+        </p:spPr>
+        <p:txBody>
+          <a:bodyPr wrap="square" lIns="18288" rIns="18288" tIns="18288" bIns="18288" anchor="t">
+            <a:spAutoFit/>
+          </a:bodyPr>
+          <a:lstStyle/>
+          <a:p>
+            <a:pPr algn="l"/>
+            <a:r>
+              <a:rPr sz="1150" b="0">
+                <a:solidFill>
+                  <a:srgbClr val="37495E"/>
+                </a:solidFill>
+                <a:latin typeface="Liberation Sans"/>
               </a:rPr>
               <a:t>The engine checks readiness and produces separate rent and utility invoices—payable together.</a:t>
             </a:r>
@@ -16963,7 +16965,7 @@
           <a:noFill/>
         </p:spPr>
         <p:txBody>
-          <a:bodyPr wrap="none" lIns="36576" rIns="36576" tIns="36576" bIns="36576" anchor="ctr">
+          <a:bodyPr wrap="square" lIns="36576" rIns="36576" tIns="36576" bIns="36576" anchor="ctr">
             <a:spAutoFit/>
           </a:bodyPr>
           <a:lstStyle/>
@@ -16974,7 +16976,7 @@
                 <a:solidFill>
                   <a:srgbClr val="122034"/>
                 </a:solidFill>
-                <a:latin typeface="Aptos"/>
+                <a:latin typeface="Liberation Sans"/>
               </a:rPr>
               <a:t>Demo action: open one active tenant and explain the source of each charge before opening invoicing.</a:t>
             </a:r>
@@ -17043,7 +17045,7 @@
           <a:noFill/>
         </p:spPr>
         <p:txBody>
-          <a:bodyPr wrap="none" lIns="36576" rIns="36576" tIns="36576" bIns="36576" anchor="ctr">
+          <a:bodyPr wrap="square" lIns="36576" rIns="36576" tIns="36576" bIns="36576" anchor="ctr">
             <a:spAutoFit/>
           </a:bodyPr>
           <a:lstStyle/>
@@ -17054,7 +17056,7 @@
                 <a:solidFill>
                   <a:srgbClr val="0A213D"/>
                 </a:solidFill>
-                <a:latin typeface="Aptos"/>
+                <a:latin typeface="Liberation Sans"/>
               </a:rPr>
               <a:t>PROOF</a:t>
             </a:r>
@@ -17078,7 +17080,7 @@
           <a:noFill/>
         </p:spPr>
         <p:txBody>
-          <a:bodyPr wrap="none" lIns="36576" rIns="36576" tIns="36576" bIns="36576" anchor="ctr">
+          <a:bodyPr wrap="square" lIns="36576" rIns="36576" tIns="36576" bIns="36576" anchor="ctr">
             <a:spAutoFit/>
           </a:bodyPr>
           <a:lstStyle/>
@@ -17089,7 +17091,7 @@
                 <a:solidFill>
                   <a:srgbClr val="0A213D"/>
                 </a:solidFill>
-                <a:latin typeface="Aptos"/>
+                <a:latin typeface="Liberation Sans"/>
               </a:rPr>
               <a:t>Billing is driven by tenancy and unit data—not rebuilt manually at month-end.</a:t>
             </a:r>
@@ -17208,7 +17210,7 @@
           <a:noFill/>
         </p:spPr>
         <p:txBody>
-          <a:bodyPr wrap="none" lIns="36576" rIns="36576" tIns="36576" bIns="36576" anchor="ctr">
+          <a:bodyPr wrap="square" lIns="36576" rIns="36576" tIns="36576" bIns="36576" anchor="ctr">
             <a:spAutoFit/>
           </a:bodyPr>
           <a:lstStyle/>
@@ -17219,7 +17221,7 @@
                 <a:solidFill>
                   <a:srgbClr val="0A213D"/>
                 </a:solidFill>
-                <a:latin typeface="Aptos"/>
+                <a:latin typeface="Liberation Sans"/>
               </a:rPr>
               <a:t>CeEst ERP</a:t>
             </a:r>
@@ -17243,7 +17245,7 @@
           <a:noFill/>
         </p:spPr>
         <p:txBody>
-          <a:bodyPr wrap="none" lIns="36576" rIns="36576" tIns="36576" bIns="36576" anchor="ctr">
+          <a:bodyPr wrap="square" lIns="36576" rIns="36576" tIns="36576" bIns="36576" anchor="ctr">
             <a:spAutoFit/>
           </a:bodyPr>
           <a:lstStyle/>
@@ -17252,9 +17254,9 @@
             <a:r>
               <a:rPr sz="800" b="1">
                 <a:solidFill>
-                  <a:srgbClr val="556982"/>
-                </a:solidFill>
-                <a:latin typeface="Aptos"/>
+                  <a:srgbClr val="37495E"/>
+                </a:solidFill>
+                <a:latin typeface="Liberation Sans"/>
               </a:rPr>
               <a:t>PROPERTY  •  FACILITY  •  PERFORMANCE</a:t>
             </a:r>
@@ -17278,7 +17280,7 @@
           <a:noFill/>
         </p:spPr>
         <p:txBody>
-          <a:bodyPr wrap="none" lIns="36576" rIns="36576" tIns="36576" bIns="36576" anchor="ctr">
+          <a:bodyPr wrap="square" lIns="36576" rIns="36576" tIns="36576" bIns="36576" anchor="ctr">
             <a:spAutoFit/>
           </a:bodyPr>
           <a:lstStyle/>
@@ -17289,7 +17291,7 @@
                 <a:solidFill>
                   <a:srgbClr val="DE232A"/>
                 </a:solidFill>
-                <a:latin typeface="Aptos"/>
+                <a:latin typeface="Liberation Sans"/>
               </a:rPr>
               <a:t>COLLECTIONS</a:t>
             </a:r>
@@ -17313,7 +17315,7 @@
           <a:noFill/>
         </p:spPr>
         <p:txBody>
-          <a:bodyPr wrap="none" lIns="36576" rIns="36576" tIns="36576" bIns="36576" anchor="ctr">
+          <a:bodyPr wrap="square" lIns="36576" rIns="36576" tIns="36576" bIns="36576" anchor="ctr">
             <a:spAutoFit/>
           </a:bodyPr>
           <a:lstStyle/>
@@ -17324,7 +17326,7 @@
                 <a:solidFill>
                   <a:srgbClr val="122034"/>
                 </a:solidFill>
-                <a:latin typeface="Aptos"/>
+                <a:latin typeface="Liberation Sans"/>
               </a:rPr>
               <a:t>From invoice to receipt, allocation and arrears</a:t>
             </a:r>
@@ -17348,7 +17350,7 @@
           <a:noFill/>
         </p:spPr>
         <p:txBody>
-          <a:bodyPr wrap="none" lIns="36576" rIns="36576" tIns="36576" bIns="36576" anchor="ctr">
+          <a:bodyPr wrap="square" lIns="36576" rIns="36576" tIns="36576" bIns="36576" anchor="ctr">
             <a:spAutoFit/>
           </a:bodyPr>
           <a:lstStyle/>
@@ -17357,9 +17359,9 @@
             <a:r>
               <a:rPr sz="1300" b="0">
                 <a:solidFill>
-                  <a:srgbClr val="556982"/>
-                </a:solidFill>
-                <a:latin typeface="Aptos"/>
+                  <a:srgbClr val="37495E"/>
+                </a:solidFill>
+                <a:latin typeface="Liberation Sans"/>
               </a:rPr>
               <a:t>A clear financial trail for manager, landlord and tenant.</a:t>
             </a:r>
@@ -17383,7 +17385,7 @@
           <a:noFill/>
         </p:spPr>
         <p:txBody>
-          <a:bodyPr wrap="none" lIns="36576" rIns="36576" tIns="36576" bIns="36576" anchor="ctr">
+          <a:bodyPr wrap="square" lIns="36576" rIns="36576" tIns="36576" bIns="36576" anchor="ctr">
             <a:spAutoFit/>
           </a:bodyPr>
           <a:lstStyle/>
@@ -17394,7 +17396,7 @@
                 <a:solidFill>
                   <a:srgbClr val="DE232A"/>
                 </a:solidFill>
-                <a:latin typeface="Aptos"/>
+                <a:latin typeface="Liberation Sans"/>
               </a:rPr>
               <a:t>05</a:t>
             </a:r>
@@ -17463,7 +17465,7 @@
           <a:noFill/>
         </p:spPr>
         <p:txBody>
-          <a:bodyPr wrap="none" lIns="36576" rIns="36576" tIns="36576" bIns="36576" anchor="ctr">
+          <a:bodyPr wrap="square" lIns="36576" rIns="36576" tIns="36576" bIns="36576" anchor="ctr">
             <a:spAutoFit/>
           </a:bodyPr>
           <a:lstStyle/>
@@ -17474,7 +17476,7 @@
                 <a:solidFill>
                   <a:srgbClr val="FFFFFF"/>
                 </a:solidFill>
-                <a:latin typeface="Aptos"/>
+                <a:latin typeface="Liberation Sans"/>
               </a:rPr>
               <a:t>INVOICE</a:t>
             </a:r>
@@ -17498,7 +17500,7 @@
           <a:noFill/>
         </p:spPr>
         <p:txBody>
-          <a:bodyPr wrap="none" lIns="36576" rIns="36576" tIns="36576" bIns="36576" anchor="ctr">
+          <a:bodyPr wrap="square" lIns="36576" rIns="36576" tIns="36576" bIns="36576" anchor="ctr">
             <a:spAutoFit/>
           </a:bodyPr>
           <a:lstStyle/>
@@ -17507,9 +17509,9 @@
             <a:r>
               <a:rPr sz="1800" b="1">
                 <a:solidFill>
-                  <a:srgbClr val="556982"/>
-                </a:solidFill>
-                <a:latin typeface="Aptos"/>
+                  <a:srgbClr val="37495E"/>
+                </a:solidFill>
+                <a:latin typeface="Liberation Sans"/>
               </a:rPr>
               <a:t>→</a:t>
             </a:r>
@@ -17578,7 +17580,7 @@
           <a:noFill/>
         </p:spPr>
         <p:txBody>
-          <a:bodyPr wrap="none" lIns="36576" rIns="36576" tIns="36576" bIns="36576" anchor="ctr">
+          <a:bodyPr wrap="square" lIns="36576" rIns="36576" tIns="36576" bIns="36576" anchor="ctr">
             <a:spAutoFit/>
           </a:bodyPr>
           <a:lstStyle/>
@@ -17589,7 +17591,7 @@
                 <a:solidFill>
                   <a:srgbClr val="FFFFFF"/>
                 </a:solidFill>
-                <a:latin typeface="Aptos"/>
+                <a:latin typeface="Liberation Sans"/>
               </a:rPr>
               <a:t>PAYMENT</a:t>
             </a:r>
@@ -17613,7 +17615,7 @@
           <a:noFill/>
         </p:spPr>
         <p:txBody>
-          <a:bodyPr wrap="none" lIns="36576" rIns="36576" tIns="36576" bIns="36576" anchor="ctr">
+          <a:bodyPr wrap="square" lIns="36576" rIns="36576" tIns="36576" bIns="36576" anchor="ctr">
             <a:spAutoFit/>
           </a:bodyPr>
           <a:lstStyle/>
@@ -17622,9 +17624,9 @@
             <a:r>
               <a:rPr sz="1800" b="1">
                 <a:solidFill>
-                  <a:srgbClr val="556982"/>
-                </a:solidFill>
-                <a:latin typeface="Aptos"/>
+                  <a:srgbClr val="37495E"/>
+                </a:solidFill>
+                <a:latin typeface="Liberation Sans"/>
               </a:rPr>
               <a:t>→</a:t>
             </a:r>
@@ -17693,7 +17695,7 @@
           <a:noFill/>
         </p:spPr>
         <p:txBody>
-          <a:bodyPr wrap="none" lIns="36576" rIns="36576" tIns="36576" bIns="36576" anchor="ctr">
+          <a:bodyPr wrap="square" lIns="36576" rIns="36576" tIns="36576" bIns="36576" anchor="ctr">
             <a:spAutoFit/>
           </a:bodyPr>
           <a:lstStyle/>
@@ -17704,7 +17706,7 @@
                 <a:solidFill>
                   <a:srgbClr val="FFFFFF"/>
                 </a:solidFill>
-                <a:latin typeface="Aptos"/>
+                <a:latin typeface="Liberation Sans"/>
               </a:rPr>
               <a:t>RECEIPT</a:t>
             </a:r>
@@ -17728,7 +17730,7 @@
           <a:noFill/>
         </p:spPr>
         <p:txBody>
-          <a:bodyPr wrap="none" lIns="36576" rIns="36576" tIns="36576" bIns="36576" anchor="ctr">
+          <a:bodyPr wrap="square" lIns="36576" rIns="36576" tIns="36576" bIns="36576" anchor="ctr">
             <a:spAutoFit/>
           </a:bodyPr>
           <a:lstStyle/>
@@ -17737,9 +17739,9 @@
             <a:r>
               <a:rPr sz="1800" b="1">
                 <a:solidFill>
-                  <a:srgbClr val="556982"/>
-                </a:solidFill>
-                <a:latin typeface="Aptos"/>
+                  <a:srgbClr val="37495E"/>
+                </a:solidFill>
+                <a:latin typeface="Liberation Sans"/>
               </a:rPr>
               <a:t>→</a:t>
             </a:r>
@@ -17808,7 +17810,7 @@
           <a:noFill/>
         </p:spPr>
         <p:txBody>
-          <a:bodyPr wrap="none" lIns="36576" rIns="36576" tIns="36576" bIns="36576" anchor="ctr">
+          <a:bodyPr wrap="square" lIns="36576" rIns="36576" tIns="36576" bIns="36576" anchor="ctr">
             <a:spAutoFit/>
           </a:bodyPr>
           <a:lstStyle/>
@@ -17819,7 +17821,7 @@
                 <a:solidFill>
                   <a:srgbClr val="FFFFFF"/>
                 </a:solidFill>
-                <a:latin typeface="Aptos"/>
+                <a:latin typeface="Liberation Sans"/>
               </a:rPr>
               <a:t>ALLOCATION</a:t>
             </a:r>
@@ -17843,7 +17845,7 @@
           <a:noFill/>
         </p:spPr>
         <p:txBody>
-          <a:bodyPr wrap="none" lIns="36576" rIns="36576" tIns="36576" bIns="36576" anchor="ctr">
+          <a:bodyPr wrap="square" lIns="36576" rIns="36576" tIns="36576" bIns="36576" anchor="ctr">
             <a:spAutoFit/>
           </a:bodyPr>
           <a:lstStyle/>
@@ -17852,9 +17854,9 @@
             <a:r>
               <a:rPr sz="1800" b="1">
                 <a:solidFill>
-                  <a:srgbClr val="556982"/>
-                </a:solidFill>
-                <a:latin typeface="Aptos"/>
+                  <a:srgbClr val="37495E"/>
+                </a:solidFill>
+                <a:latin typeface="Liberation Sans"/>
               </a:rPr>
               <a:t>→</a:t>
             </a:r>
@@ -17923,7 +17925,7 @@
           <a:noFill/>
         </p:spPr>
         <p:txBody>
-          <a:bodyPr wrap="none" lIns="36576" rIns="36576" tIns="36576" bIns="36576" anchor="ctr">
+          <a:bodyPr wrap="square" lIns="36576" rIns="36576" tIns="36576" bIns="36576" anchor="ctr">
             <a:spAutoFit/>
           </a:bodyPr>
           <a:lstStyle/>
@@ -17934,7 +17936,7 @@
                 <a:solidFill>
                   <a:srgbClr val="FFFFFF"/>
                 </a:solidFill>
-                <a:latin typeface="Aptos"/>
+                <a:latin typeface="Liberation Sans"/>
               </a:rPr>
               <a:t>ARREARS</a:t>
             </a:r>
@@ -17958,7 +17960,7 @@
           <a:noFill/>
         </p:spPr>
         <p:txBody>
-          <a:bodyPr wrap="none" lIns="36576" rIns="36576" tIns="36576" bIns="36576" anchor="ctr">
+          <a:bodyPr wrap="square" lIns="36576" rIns="36576" tIns="36576" bIns="36576" anchor="ctr">
             <a:spAutoFit/>
           </a:bodyPr>
           <a:lstStyle/>
@@ -17967,9 +17969,9 @@
             <a:r>
               <a:rPr sz="1800" b="1">
                 <a:solidFill>
-                  <a:srgbClr val="556982"/>
-                </a:solidFill>
-                <a:latin typeface="Aptos"/>
+                  <a:srgbClr val="37495E"/>
+                </a:solidFill>
+                <a:latin typeface="Liberation Sans"/>
               </a:rPr>
               <a:t>→</a:t>
             </a:r>
@@ -18038,7 +18040,7 @@
           <a:noFill/>
         </p:spPr>
         <p:txBody>
-          <a:bodyPr wrap="none" lIns="36576" rIns="36576" tIns="36576" bIns="36576" anchor="ctr">
+          <a:bodyPr wrap="square" lIns="36576" rIns="36576" tIns="36576" bIns="36576" anchor="ctr">
             <a:spAutoFit/>
           </a:bodyPr>
           <a:lstStyle/>
@@ -18049,7 +18051,7 @@
                 <a:solidFill>
                   <a:srgbClr val="FFFFFF"/>
                 </a:solidFill>
-                <a:latin typeface="Aptos"/>
+                <a:latin typeface="Liberation Sans"/>
               </a:rPr>
               <a:t>REPORT</a:t>
             </a:r>
@@ -18086,7 +18088,7 @@
                 <a:solidFill>
                   <a:srgbClr val="122034"/>
                 </a:solidFill>
-                <a:latin typeface="Aptos"/>
+                <a:latin typeface="Liberation Sans"/>
               </a:defRPr>
             </a:pPr>
             <a:r>
@@ -18102,7 +18104,7 @@
                 <a:solidFill>
                   <a:srgbClr val="122034"/>
                 </a:solidFill>
-                <a:latin typeface="Aptos"/>
+                <a:latin typeface="Liberation Sans"/>
               </a:defRPr>
             </a:pPr>
             <a:r>
@@ -18118,7 +18120,7 @@
                 <a:solidFill>
                   <a:srgbClr val="122034"/>
                 </a:solidFill>
-                <a:latin typeface="Aptos"/>
+                <a:latin typeface="Liberation Sans"/>
               </a:defRPr>
             </a:pPr>
             <a:r>
@@ -18189,7 +18191,7 @@
           <a:noFill/>
         </p:spPr>
         <p:txBody>
-          <a:bodyPr wrap="none" lIns="36576" rIns="36576" tIns="36576" bIns="36576" anchor="ctr">
+          <a:bodyPr wrap="square" lIns="36576" rIns="36576" tIns="36576" bIns="36576" anchor="ctr">
             <a:spAutoFit/>
           </a:bodyPr>
           <a:lstStyle/>
@@ -18200,7 +18202,7 @@
                 <a:solidFill>
                   <a:srgbClr val="0A213D"/>
                 </a:solidFill>
-                <a:latin typeface="Aptos"/>
+                <a:latin typeface="Liberation Sans"/>
               </a:rPr>
               <a:t>PROOF</a:t>
             </a:r>
@@ -18224,7 +18226,7 @@
           <a:noFill/>
         </p:spPr>
         <p:txBody>
-          <a:bodyPr wrap="none" lIns="36576" rIns="36576" tIns="36576" bIns="36576" anchor="ctr">
+          <a:bodyPr wrap="square" lIns="36576" rIns="36576" tIns="36576" bIns="36576" anchor="ctr">
             <a:spAutoFit/>
           </a:bodyPr>
           <a:lstStyle/>
@@ -18235,7 +18237,7 @@
                 <a:solidFill>
                   <a:srgbClr val="0A213D"/>
                 </a:solidFill>
-                <a:latin typeface="Aptos"/>
+                <a:latin typeface="Liberation Sans"/>
               </a:rPr>
               <a:t>The manager can explain every balance and the tenant can access the same supporting documents.</a:t>
             </a:r>
@@ -18354,7 +18356,7 @@
           <a:noFill/>
         </p:spPr>
         <p:txBody>
-          <a:bodyPr wrap="none" lIns="36576" rIns="36576" tIns="36576" bIns="36576" anchor="ctr">
+          <a:bodyPr wrap="square" lIns="36576" rIns="36576" tIns="36576" bIns="36576" anchor="ctr">
             <a:spAutoFit/>
           </a:bodyPr>
           <a:lstStyle/>
@@ -18365,7 +18367,7 @@
                 <a:solidFill>
                   <a:srgbClr val="0A213D"/>
                 </a:solidFill>
-                <a:latin typeface="Aptos"/>
+                <a:latin typeface="Liberation Sans"/>
               </a:rPr>
               <a:t>CeEst ERP</a:t>
             </a:r>
@@ -18389,7 +18391,7 @@
           <a:noFill/>
         </p:spPr>
         <p:txBody>
-          <a:bodyPr wrap="none" lIns="36576" rIns="36576" tIns="36576" bIns="36576" anchor="ctr">
+          <a:bodyPr wrap="square" lIns="36576" rIns="36576" tIns="36576" bIns="36576" anchor="ctr">
             <a:spAutoFit/>
           </a:bodyPr>
           <a:lstStyle/>
@@ -18398,9 +18400,9 @@
             <a:r>
               <a:rPr sz="800" b="1">
                 <a:solidFill>
-                  <a:srgbClr val="556982"/>
-                </a:solidFill>
-                <a:latin typeface="Aptos"/>
+                  <a:srgbClr val="37495E"/>
+                </a:solidFill>
+                <a:latin typeface="Liberation Sans"/>
               </a:rPr>
               <a:t>PROPERTY  •  FACILITY  •  PERFORMANCE</a:t>
             </a:r>
@@ -18424,7 +18426,7 @@
           <a:noFill/>
         </p:spPr>
         <p:txBody>
-          <a:bodyPr wrap="none" lIns="36576" rIns="36576" tIns="36576" bIns="36576" anchor="ctr">
+          <a:bodyPr wrap="square" lIns="36576" rIns="36576" tIns="36576" bIns="36576" anchor="ctr">
             <a:spAutoFit/>
           </a:bodyPr>
           <a:lstStyle/>
@@ -18435,7 +18437,7 @@
                 <a:solidFill>
                   <a:srgbClr val="DE232A"/>
                 </a:solidFill>
-                <a:latin typeface="Aptos"/>
+                <a:latin typeface="Liberation Sans"/>
               </a:rPr>
               <a:t>SERVICE CHARGE</a:t>
             </a:r>
@@ -18459,7 +18461,7 @@
           <a:noFill/>
         </p:spPr>
         <p:txBody>
-          <a:bodyPr wrap="none" lIns="36576" rIns="36576" tIns="36576" bIns="36576" anchor="ctr">
+          <a:bodyPr wrap="square" lIns="36576" rIns="36576" tIns="36576" bIns="36576" anchor="ctr">
             <a:spAutoFit/>
           </a:bodyPr>
           <a:lstStyle/>
@@ -18470,7 +18472,7 @@
                 <a:solidFill>
                   <a:srgbClr val="122034"/>
                 </a:solidFill>
-                <a:latin typeface="Aptos"/>
+                <a:latin typeface="Liberation Sans"/>
               </a:rPr>
               <a:t>Plan, allocate, reconcile and explain</a:t>
             </a:r>
@@ -18494,7 +18496,7 @@
           <a:noFill/>
         </p:spPr>
         <p:txBody>
-          <a:bodyPr wrap="none" lIns="36576" rIns="36576" tIns="36576" bIns="36576" anchor="ctr">
+          <a:bodyPr wrap="square" lIns="36576" rIns="36576" tIns="36576" bIns="36576" anchor="ctr">
             <a:spAutoFit/>
           </a:bodyPr>
           <a:lstStyle/>
@@ -18503,9 +18505,9 @@
             <a:r>
               <a:rPr sz="1300" b="0">
                 <a:solidFill>
-                  <a:srgbClr val="556982"/>
-                </a:solidFill>
-                <a:latin typeface="Aptos"/>
+                  <a:srgbClr val="37495E"/>
+                </a:solidFill>
+                <a:latin typeface="Liberation Sans"/>
               </a:rPr>
               <a:t>Connect operational requirements to the annual service charge budget.</a:t>
             </a:r>
@@ -18529,7 +18531,7 @@
           <a:noFill/>
         </p:spPr>
         <p:txBody>
-          <a:bodyPr wrap="none" lIns="36576" rIns="36576" tIns="36576" bIns="36576" anchor="ctr">
+          <a:bodyPr wrap="square" lIns="36576" rIns="36576" tIns="36576" bIns="36576" anchor="ctr">
             <a:spAutoFit/>
           </a:bodyPr>
           <a:lstStyle/>
@@ -18540,7 +18542,7 @@
                 <a:solidFill>
                   <a:srgbClr val="DE232A"/>
                 </a:solidFill>
-                <a:latin typeface="Aptos"/>
+                <a:latin typeface="Liberation Sans"/>
               </a:rPr>
               <a:t>06</a:t>
             </a:r>
@@ -18654,7 +18656,7 @@
           <a:noFill/>
         </p:spPr>
         <p:txBody>
-          <a:bodyPr wrap="none" lIns="36576" rIns="36576" tIns="36576" bIns="36576" anchor="ctr">
+          <a:bodyPr wrap="square" lIns="36576" rIns="36576" tIns="36576" bIns="36576" anchor="ctr">
             <a:spAutoFit/>
           </a:bodyPr>
           <a:lstStyle/>
@@ -18665,7 +18667,7 @@
                 <a:solidFill>
                   <a:srgbClr val="12365B"/>
                 </a:solidFill>
-                <a:latin typeface="Aptos"/>
+                <a:latin typeface="Liberation Sans"/>
               </a:rPr>
               <a:t>1</a:t>
             </a:r>
@@ -18689,7 +18691,7 @@
           <a:noFill/>
         </p:spPr>
         <p:txBody>
-          <a:bodyPr wrap="none" lIns="36576" rIns="36576" tIns="36576" bIns="36576" anchor="ctr">
+          <a:bodyPr wrap="square" lIns="36576" rIns="36576" tIns="36576" bIns="36576" anchor="ctr">
             <a:spAutoFit/>
           </a:bodyPr>
           <a:lstStyle/>
@@ -18700,7 +18702,7 @@
                 <a:solidFill>
                   <a:srgbClr val="122034"/>
                 </a:solidFill>
-                <a:latin typeface="Aptos"/>
+                <a:latin typeface="Liberation Sans"/>
               </a:rPr>
               <a:t>Schemes</a:t>
             </a:r>
@@ -18716,26 +18718,26 @@
         <p:spPr>
           <a:xfrm>
             <a:off x="868680" y="2898648"/>
-            <a:ext cx="2148840" cy="1545336"/>
-          </a:xfrm>
-          <a:prstGeom prst="rect">
-            <a:avLst/>
-          </a:prstGeom>
-          <a:noFill/>
-        </p:spPr>
-        <p:txBody>
-          <a:bodyPr wrap="none" lIns="36576" rIns="36576" tIns="36576" bIns="36576" anchor="ctr">
-            <a:spAutoFit/>
-          </a:bodyPr>
-          <a:lstStyle/>
-          <a:p>
-            <a:pPr algn="l"/>
-            <a:r>
-              <a:rPr sz="1100" b="0">
-                <a:solidFill>
-                  <a:srgbClr val="556982"/>
-                </a:solidFill>
-                <a:latin typeface="Aptos"/>
+            <a:ext cx="2148840" cy="1490472"/>
+          </a:xfrm>
+          <a:prstGeom prst="rect">
+            <a:avLst/>
+          </a:prstGeom>
+          <a:noFill/>
+        </p:spPr>
+        <p:txBody>
+          <a:bodyPr wrap="square" lIns="18288" rIns="18288" tIns="18288" bIns="18288" anchor="t">
+            <a:spAutoFit/>
+          </a:bodyPr>
+          <a:lstStyle/>
+          <a:p>
+            <a:pPr algn="l"/>
+            <a:r>
+              <a:rPr sz="1150" b="0">
+                <a:solidFill>
+                  <a:srgbClr val="37495E"/>
+                </a:solidFill>
+                <a:latin typeface="Liberation Sans"/>
               </a:rPr>
               <a:t>Define period, allocation basis and applicable units.</a:t>
             </a:r>
@@ -18849,7 +18851,7 @@
           <a:noFill/>
         </p:spPr>
         <p:txBody>
-          <a:bodyPr wrap="none" lIns="36576" rIns="36576" tIns="36576" bIns="36576" anchor="ctr">
+          <a:bodyPr wrap="square" lIns="36576" rIns="36576" tIns="36576" bIns="36576" anchor="ctr">
             <a:spAutoFit/>
           </a:bodyPr>
           <a:lstStyle/>
@@ -18860,7 +18862,7 @@
                 <a:solidFill>
                   <a:srgbClr val="DE232A"/>
                 </a:solidFill>
-                <a:latin typeface="Aptos"/>
+                <a:latin typeface="Liberation Sans"/>
               </a:rPr>
               <a:t>2</a:t>
             </a:r>
@@ -18884,7 +18886,7 @@
           <a:noFill/>
         </p:spPr>
         <p:txBody>
-          <a:bodyPr wrap="none" lIns="36576" rIns="36576" tIns="36576" bIns="36576" anchor="ctr">
+          <a:bodyPr wrap="square" lIns="36576" rIns="36576" tIns="36576" bIns="36576" anchor="ctr">
             <a:spAutoFit/>
           </a:bodyPr>
           <a:lstStyle/>
@@ -18895,7 +18897,7 @@
                 <a:solidFill>
                   <a:srgbClr val="122034"/>
                 </a:solidFill>
-                <a:latin typeface="Aptos"/>
+                <a:latin typeface="Liberation Sans"/>
               </a:rPr>
               <a:t>Budget lines</a:t>
             </a:r>
@@ -18911,26 +18913,26 @@
         <p:spPr>
           <a:xfrm>
             <a:off x="3630168" y="2898648"/>
-            <a:ext cx="2148840" cy="1545336"/>
-          </a:xfrm>
-          <a:prstGeom prst="rect">
-            <a:avLst/>
-          </a:prstGeom>
-          <a:noFill/>
-        </p:spPr>
-        <p:txBody>
-          <a:bodyPr wrap="none" lIns="36576" rIns="36576" tIns="36576" bIns="36576" anchor="ctr">
-            <a:spAutoFit/>
-          </a:bodyPr>
-          <a:lstStyle/>
-          <a:p>
-            <a:pPr algn="l"/>
-            <a:r>
-              <a:rPr sz="1100" b="0">
-                <a:solidFill>
-                  <a:srgbClr val="556982"/>
-                </a:solidFill>
-                <a:latin typeface="Aptos"/>
+            <a:ext cx="2148840" cy="1490472"/>
+          </a:xfrm>
+          <a:prstGeom prst="rect">
+            <a:avLst/>
+          </a:prstGeom>
+          <a:noFill/>
+        </p:spPr>
+        <p:txBody>
+          <a:bodyPr wrap="square" lIns="18288" rIns="18288" tIns="18288" bIns="18288" anchor="t">
+            <a:spAutoFit/>
+          </a:bodyPr>
+          <a:lstStyle/>
+          <a:p>
+            <a:pPr algn="l"/>
+            <a:r>
+              <a:rPr sz="1150" b="0">
+                <a:solidFill>
+                  <a:srgbClr val="37495E"/>
+                </a:solidFill>
+                <a:latin typeface="Liberation Sans"/>
               </a:rPr>
               <a:t>Security, cleaning, utilities, repairs and management costs.</a:t>
             </a:r>
@@ -19044,7 +19046,7 @@
           <a:noFill/>
         </p:spPr>
         <p:txBody>
-          <a:bodyPr wrap="none" lIns="36576" rIns="36576" tIns="36576" bIns="36576" anchor="ctr">
+          <a:bodyPr wrap="square" lIns="36576" rIns="36576" tIns="36576" bIns="36576" anchor="ctr">
             <a:spAutoFit/>
           </a:bodyPr>
           <a:lstStyle/>
@@ -19055,7 +19057,7 @@
                 <a:solidFill>
                   <a:srgbClr val="00918A"/>
                 </a:solidFill>
-                <a:latin typeface="Aptos"/>
+                <a:latin typeface="Liberation Sans"/>
               </a:rPr>
               <a:t>3</a:t>
             </a:r>
@@ -19079,7 +19081,7 @@
           <a:noFill/>
         </p:spPr>
         <p:txBody>
-          <a:bodyPr wrap="none" lIns="36576" rIns="36576" tIns="36576" bIns="36576" anchor="ctr">
+          <a:bodyPr wrap="square" lIns="36576" rIns="36576" tIns="36576" bIns="36576" anchor="ctr">
             <a:spAutoFit/>
           </a:bodyPr>
           <a:lstStyle/>
@@ -19090,7 +19092,7 @@
                 <a:solidFill>
                   <a:srgbClr val="122034"/>
                 </a:solidFill>
-                <a:latin typeface="Aptos"/>
+                <a:latin typeface="Liberation Sans"/>
               </a:rPr>
               <a:t>Allocation</a:t>
             </a:r>
@@ -19106,26 +19108,26 @@
         <p:spPr>
           <a:xfrm>
             <a:off x="6391656" y="2898648"/>
-            <a:ext cx="2148840" cy="1545336"/>
-          </a:xfrm>
-          <a:prstGeom prst="rect">
-            <a:avLst/>
-          </a:prstGeom>
-          <a:noFill/>
-        </p:spPr>
-        <p:txBody>
-          <a:bodyPr wrap="none" lIns="36576" rIns="36576" tIns="36576" bIns="36576" anchor="ctr">
-            <a:spAutoFit/>
-          </a:bodyPr>
-          <a:lstStyle/>
-          <a:p>
-            <a:pPr algn="l"/>
-            <a:r>
-              <a:rPr sz="1100" b="0">
-                <a:solidFill>
-                  <a:srgbClr val="556982"/>
-                </a:solidFill>
-                <a:latin typeface="Aptos"/>
+            <a:ext cx="2148840" cy="1490472"/>
+          </a:xfrm>
+          <a:prstGeom prst="rect">
+            <a:avLst/>
+          </a:prstGeom>
+          <a:noFill/>
+        </p:spPr>
+        <p:txBody>
+          <a:bodyPr wrap="square" lIns="18288" rIns="18288" tIns="18288" bIns="18288" anchor="t">
+            <a:spAutoFit/>
+          </a:bodyPr>
+          <a:lstStyle/>
+          <a:p>
+            <a:pPr algn="l"/>
+            <a:r>
+              <a:rPr sz="1150" b="0">
+                <a:solidFill>
+                  <a:srgbClr val="37495E"/>
+                </a:solidFill>
+                <a:latin typeface="Liberation Sans"/>
               </a:rPr>
               <a:t>Apportion by area, equal share or configured driver.</a:t>
             </a:r>
@@ -19239,7 +19241,7 @@
           <a:noFill/>
         </p:spPr>
         <p:txBody>
-          <a:bodyPr wrap="none" lIns="36576" rIns="36576" tIns="36576" bIns="36576" anchor="ctr">
+          <a:bodyPr wrap="square" lIns="36576" rIns="36576" tIns="36576" bIns="36576" anchor="ctr">
             <a:spAutoFit/>
           </a:bodyPr>
           <a:lstStyle/>
@@ -19250,7 +19252,7 @@
                 <a:solidFill>
                   <a:srgbClr val="EA8614"/>
                 </a:solidFill>
-                <a:latin typeface="Aptos"/>
+                <a:latin typeface="Liberation Sans"/>
               </a:rPr>
               <a:t>4</a:t>
             </a:r>
@@ -19274,7 +19276,7 @@
           <a:noFill/>
         </p:spPr>
         <p:txBody>
-          <a:bodyPr wrap="none" lIns="36576" rIns="36576" tIns="36576" bIns="36576" anchor="ctr">
+          <a:bodyPr wrap="square" lIns="36576" rIns="36576" tIns="36576" bIns="36576" anchor="ctr">
             <a:spAutoFit/>
           </a:bodyPr>
           <a:lstStyle/>
@@ -19285,7 +19287,7 @@
                 <a:solidFill>
                   <a:srgbClr val="122034"/>
                 </a:solidFill>
-                <a:latin typeface="Aptos"/>
+                <a:latin typeface="Liberation Sans"/>
               </a:rPr>
               <a:t>Reconciliation</a:t>
             </a:r>
@@ -19301,26 +19303,26 @@
         <p:spPr>
           <a:xfrm>
             <a:off x="9153144" y="2898648"/>
-            <a:ext cx="2148840" cy="1545336"/>
-          </a:xfrm>
-          <a:prstGeom prst="rect">
-            <a:avLst/>
-          </a:prstGeom>
-          <a:noFill/>
-        </p:spPr>
-        <p:txBody>
-          <a:bodyPr wrap="none" lIns="36576" rIns="36576" tIns="36576" bIns="36576" anchor="ctr">
-            <a:spAutoFit/>
-          </a:bodyPr>
-          <a:lstStyle/>
-          <a:p>
-            <a:pPr algn="l"/>
-            <a:r>
-              <a:rPr sz="1100" b="0">
-                <a:solidFill>
-                  <a:srgbClr val="556982"/>
-                </a:solidFill>
-                <a:latin typeface="Aptos"/>
+            <a:ext cx="2148840" cy="1490472"/>
+          </a:xfrm>
+          <a:prstGeom prst="rect">
+            <a:avLst/>
+          </a:prstGeom>
+          <a:noFill/>
+        </p:spPr>
+        <p:txBody>
+          <a:bodyPr wrap="square" lIns="18288" rIns="18288" tIns="18288" bIns="18288" anchor="t">
+            <a:spAutoFit/>
+          </a:bodyPr>
+          <a:lstStyle/>
+          <a:p>
+            <a:pPr algn="l"/>
+            <a:r>
+              <a:rPr sz="1150" b="0">
+                <a:solidFill>
+                  <a:srgbClr val="37495E"/>
+                </a:solidFill>
+                <a:latin typeface="Liberation Sans"/>
               </a:rPr>
               <a:t>Compare budget with actual expenditure and explain variance.</a:t>
             </a:r>
@@ -19344,7 +19346,7 @@
           <a:noFill/>
         </p:spPr>
         <p:txBody>
-          <a:bodyPr wrap="none" lIns="36576" rIns="36576" tIns="36576" bIns="36576" anchor="ctr">
+          <a:bodyPr wrap="square" lIns="36576" rIns="36576" tIns="36576" bIns="36576" anchor="ctr">
             <a:spAutoFit/>
           </a:bodyPr>
           <a:lstStyle/>
@@ -19355,7 +19357,7 @@
                 <a:solidFill>
                   <a:srgbClr val="122034"/>
                 </a:solidFill>
-                <a:latin typeface="Aptos"/>
+                <a:latin typeface="Liberation Sans"/>
               </a:rPr>
               <a:t>Use historical averages or projected quantities and rates—then preserve the approval and audit trail.</a:t>
             </a:r>
@@ -19424,7 +19426,7 @@
           <a:noFill/>
         </p:spPr>
         <p:txBody>
-          <a:bodyPr wrap="none" lIns="36576" rIns="36576" tIns="36576" bIns="36576" anchor="ctr">
+          <a:bodyPr wrap="square" lIns="36576" rIns="36576" tIns="36576" bIns="36576" anchor="ctr">
             <a:spAutoFit/>
           </a:bodyPr>
           <a:lstStyle/>
@@ -19435,7 +19437,7 @@
                 <a:solidFill>
                   <a:srgbClr val="0A213D"/>
                 </a:solidFill>
-                <a:latin typeface="Aptos"/>
+                <a:latin typeface="Liberation Sans"/>
               </a:rPr>
               <a:t>PROOF</a:t>
             </a:r>
@@ -19459,7 +19461,7 @@
           <a:noFill/>
         </p:spPr>
         <p:txBody>
-          <a:bodyPr wrap="none" lIns="36576" rIns="36576" tIns="36576" bIns="36576" anchor="ctr">
+          <a:bodyPr wrap="square" lIns="36576" rIns="36576" tIns="36576" bIns="36576" anchor="ctr">
             <a:spAutoFit/>
           </a:bodyPr>
           <a:lstStyle/>
@@ -19470,7 +19472,7 @@
                 <a:solidFill>
                   <a:srgbClr val="0A213D"/>
                 </a:solidFill>
-                <a:latin typeface="Aptos"/>
+                <a:latin typeface="Liberation Sans"/>
               </a:rPr>
               <a:t>Service charge planning is linked to real operational requirements and actual expenditure.</a:t>
             </a:r>
@@ -19589,7 +19591,7 @@
           <a:noFill/>
         </p:spPr>
         <p:txBody>
-          <a:bodyPr wrap="none" lIns="36576" rIns="36576" tIns="36576" bIns="36576" anchor="ctr">
+          <a:bodyPr wrap="square" lIns="36576" rIns="36576" tIns="36576" bIns="36576" anchor="ctr">
             <a:spAutoFit/>
           </a:bodyPr>
           <a:lstStyle/>
@@ -19600,7 +19602,7 @@
                 <a:solidFill>
                   <a:srgbClr val="0A213D"/>
                 </a:solidFill>
-                <a:latin typeface="Aptos"/>
+                <a:latin typeface="Liberation Sans"/>
               </a:rPr>
               <a:t>CeEst ERP</a:t>
             </a:r>
@@ -19624,7 +19626,7 @@
           <a:noFill/>
         </p:spPr>
         <p:txBody>
-          <a:bodyPr wrap="none" lIns="36576" rIns="36576" tIns="36576" bIns="36576" anchor="ctr">
+          <a:bodyPr wrap="square" lIns="36576" rIns="36576" tIns="36576" bIns="36576" anchor="ctr">
             <a:spAutoFit/>
           </a:bodyPr>
           <a:lstStyle/>
@@ -19633,9 +19635,9 @@
             <a:r>
               <a:rPr sz="800" b="1">
                 <a:solidFill>
-                  <a:srgbClr val="556982"/>
-                </a:solidFill>
-                <a:latin typeface="Aptos"/>
+                  <a:srgbClr val="37495E"/>
+                </a:solidFill>
+                <a:latin typeface="Liberation Sans"/>
               </a:rPr>
               <a:t>PROPERTY  •  FACILITY  •  PERFORMANCE</a:t>
             </a:r>
@@ -19659,7 +19661,7 @@
           <a:noFill/>
         </p:spPr>
         <p:txBody>
-          <a:bodyPr wrap="none" lIns="36576" rIns="36576" tIns="36576" bIns="36576" anchor="ctr">
+          <a:bodyPr wrap="square" lIns="36576" rIns="36576" tIns="36576" bIns="36576" anchor="ctr">
             <a:spAutoFit/>
           </a:bodyPr>
           <a:lstStyle/>
@@ -19670,7 +19672,7 @@
                 <a:solidFill>
                   <a:srgbClr val="DE232A"/>
                 </a:solidFill>
-                <a:latin typeface="Aptos"/>
+                <a:latin typeface="Liberation Sans"/>
               </a:rPr>
               <a:t>TENANT SELF-SERVICE</a:t>
             </a:r>
@@ -19694,7 +19696,7 @@
           <a:noFill/>
         </p:spPr>
         <p:txBody>
-          <a:bodyPr wrap="none" lIns="36576" rIns="36576" tIns="36576" bIns="36576" anchor="ctr">
+          <a:bodyPr wrap="square" lIns="36576" rIns="36576" tIns="36576" bIns="36576" anchor="ctr">
             <a:spAutoFit/>
           </a:bodyPr>
           <a:lstStyle/>
@@ -19705,7 +19707,7 @@
                 <a:solidFill>
                   <a:srgbClr val="122034"/>
                 </a:solidFill>
-                <a:latin typeface="Aptos"/>
+                <a:latin typeface="Liberation Sans"/>
               </a:rPr>
               <a:t>A tenant can act—not only view</a:t>
             </a:r>
@@ -19729,7 +19731,7 @@
           <a:noFill/>
         </p:spPr>
         <p:txBody>
-          <a:bodyPr wrap="none" lIns="36576" rIns="36576" tIns="36576" bIns="36576" anchor="ctr">
+          <a:bodyPr wrap="square" lIns="36576" rIns="36576" tIns="36576" bIns="36576" anchor="ctr">
             <a:spAutoFit/>
           </a:bodyPr>
           <a:lstStyle/>
@@ -19738,9 +19740,9 @@
             <a:r>
               <a:rPr sz="1300" b="0">
                 <a:solidFill>
-                  <a:srgbClr val="556982"/>
-                </a:solidFill>
-                <a:latin typeface="Aptos"/>
+                  <a:srgbClr val="37495E"/>
+                </a:solidFill>
+                <a:latin typeface="Liberation Sans"/>
               </a:rPr>
               <a:t>Invoices, receipts, lease information, notices and maintenance requests in one secure portal.</a:t>
             </a:r>
@@ -19764,7 +19766,7 @@
           <a:noFill/>
         </p:spPr>
         <p:txBody>
-          <a:bodyPr wrap="none" lIns="36576" rIns="36576" tIns="36576" bIns="36576" anchor="ctr">
+          <a:bodyPr wrap="square" lIns="36576" rIns="36576" tIns="36576" bIns="36576" anchor="ctr">
             <a:spAutoFit/>
           </a:bodyPr>
           <a:lstStyle/>
@@ -19775,7 +19777,7 @@
                 <a:solidFill>
                   <a:srgbClr val="DE232A"/>
                 </a:solidFill>
-                <a:latin typeface="Aptos"/>
+                <a:latin typeface="Liberation Sans"/>
               </a:rPr>
               <a:t>07</a:t>
             </a:r>
@@ -19889,7 +19891,7 @@
           <a:noFill/>
         </p:spPr>
         <p:txBody>
-          <a:bodyPr wrap="none" lIns="36576" rIns="36576" tIns="36576" bIns="36576" anchor="ctr">
+          <a:bodyPr wrap="square" lIns="36576" rIns="36576" tIns="36576" bIns="36576" anchor="ctr">
             <a:spAutoFit/>
           </a:bodyPr>
           <a:lstStyle/>
@@ -19900,9 +19902,9 @@
                 <a:solidFill>
                   <a:srgbClr val="12365B"/>
                 </a:solidFill>
-                <a:latin typeface="Aptos"/>
-              </a:rPr>
-              <a:t>KES</a:t>
+                <a:latin typeface="Liberation Sans"/>
+              </a:rPr>
+              <a:t>₭</a:t>
             </a:r>
           </a:p>
         </p:txBody>
@@ -19924,7 +19926,7 @@
           <a:noFill/>
         </p:spPr>
         <p:txBody>
-          <a:bodyPr wrap="none" lIns="36576" rIns="36576" tIns="36576" bIns="36576" anchor="ctr">
+          <a:bodyPr wrap="square" lIns="36576" rIns="36576" tIns="36576" bIns="36576" anchor="ctr">
             <a:spAutoFit/>
           </a:bodyPr>
           <a:lstStyle/>
@@ -19935,7 +19937,7 @@
                 <a:solidFill>
                   <a:srgbClr val="122034"/>
                 </a:solidFill>
-                <a:latin typeface="Aptos"/>
+                <a:latin typeface="Liberation Sans"/>
               </a:rPr>
               <a:t>Financial self-service</a:t>
             </a:r>
@@ -19951,26 +19953,26 @@
         <p:spPr>
           <a:xfrm>
             <a:off x="822960" y="2852928"/>
-            <a:ext cx="3017520" cy="1819656"/>
-          </a:xfrm>
-          <a:prstGeom prst="rect">
-            <a:avLst/>
-          </a:prstGeom>
-          <a:noFill/>
-        </p:spPr>
-        <p:txBody>
-          <a:bodyPr wrap="none" lIns="36576" rIns="36576" tIns="36576" bIns="36576" anchor="ctr">
-            <a:spAutoFit/>
-          </a:bodyPr>
-          <a:lstStyle/>
-          <a:p>
-            <a:pPr algn="l"/>
-            <a:r>
-              <a:rPr sz="1100" b="0">
-                <a:solidFill>
-                  <a:srgbClr val="556982"/>
-                </a:solidFill>
-                <a:latin typeface="Aptos"/>
+            <a:ext cx="3017520" cy="1764792"/>
+          </a:xfrm>
+          <a:prstGeom prst="rect">
+            <a:avLst/>
+          </a:prstGeom>
+          <a:noFill/>
+        </p:spPr>
+        <p:txBody>
+          <a:bodyPr wrap="square" lIns="18288" rIns="18288" tIns="18288" bIns="18288" anchor="t">
+            <a:spAutoFit/>
+          </a:bodyPr>
+          <a:lstStyle/>
+          <a:p>
+            <a:pPr algn="l"/>
+            <a:r>
+              <a:rPr sz="1150" b="0">
+                <a:solidFill>
+                  <a:srgbClr val="37495E"/>
+                </a:solidFill>
+                <a:latin typeface="Liberation Sans"/>
               </a:rPr>
               <a:t>View invoices, balances, receipts and payment history.</a:t>
             </a:r>
@@ -20084,7 +20086,7 @@
           <a:noFill/>
         </p:spPr>
         <p:txBody>
-          <a:bodyPr wrap="none" lIns="36576" rIns="36576" tIns="36576" bIns="36576" anchor="ctr">
+          <a:bodyPr wrap="square" lIns="36576" rIns="36576" tIns="36576" bIns="36576" anchor="ctr">
             <a:spAutoFit/>
           </a:bodyPr>
           <a:lstStyle/>
@@ -20095,7 +20097,7 @@
                 <a:solidFill>
                   <a:srgbClr val="DE232A"/>
                 </a:solidFill>
-                <a:latin typeface="Aptos"/>
+                <a:latin typeface="Liberation Sans"/>
               </a:rPr>
               <a:t>!</a:t>
             </a:r>
@@ -20119,7 +20121,7 @@
           <a:noFill/>
         </p:spPr>
         <p:txBody>
-          <a:bodyPr wrap="none" lIns="36576" rIns="36576" tIns="36576" bIns="36576" anchor="ctr">
+          <a:bodyPr wrap="square" lIns="36576" rIns="36576" tIns="36576" bIns="36576" anchor="ctr">
             <a:spAutoFit/>
           </a:bodyPr>
           <a:lstStyle/>
@@ -20130,7 +20132,7 @@
                 <a:solidFill>
                   <a:srgbClr val="122034"/>
                 </a:solidFill>
-                <a:latin typeface="Aptos"/>
+                <a:latin typeface="Liberation Sans"/>
               </a:rPr>
               <a:t>Report an issue</a:t>
             </a:r>
@@ -20146,26 +20148,26 @@
         <p:spPr>
           <a:xfrm>
             <a:off x="4590288" y="2852928"/>
-            <a:ext cx="3017520" cy="1819656"/>
-          </a:xfrm>
-          <a:prstGeom prst="rect">
-            <a:avLst/>
-          </a:prstGeom>
-          <a:noFill/>
-        </p:spPr>
-        <p:txBody>
-          <a:bodyPr wrap="none" lIns="36576" rIns="36576" tIns="36576" bIns="36576" anchor="ctr">
-            <a:spAutoFit/>
-          </a:bodyPr>
-          <a:lstStyle/>
-          <a:p>
-            <a:pPr algn="l"/>
-            <a:r>
-              <a:rPr sz="1100" b="0">
-                <a:solidFill>
-                  <a:srgbClr val="556982"/>
-                </a:solidFill>
-                <a:latin typeface="Aptos"/>
+            <a:ext cx="3017520" cy="1764792"/>
+          </a:xfrm>
+          <a:prstGeom prst="rect">
+            <a:avLst/>
+          </a:prstGeom>
+          <a:noFill/>
+        </p:spPr>
+        <p:txBody>
+          <a:bodyPr wrap="square" lIns="18288" rIns="18288" tIns="18288" bIns="18288" anchor="t">
+            <a:spAutoFit/>
+          </a:bodyPr>
+          <a:lstStyle/>
+          <a:p>
+            <a:pPr algn="l"/>
+            <a:r>
+              <a:rPr sz="1150" b="0">
+                <a:solidFill>
+                  <a:srgbClr val="37495E"/>
+                </a:solidFill>
+                <a:latin typeface="Liberation Sans"/>
               </a:rPr>
               <a:t>Capture category, priority, description and unit context; receive a traceable reference.</a:t>
             </a:r>
@@ -20279,7 +20281,7 @@
           <a:noFill/>
         </p:spPr>
         <p:txBody>
-          <a:bodyPr wrap="none" lIns="36576" rIns="36576" tIns="36576" bIns="36576" anchor="ctr">
+          <a:bodyPr wrap="square" lIns="36576" rIns="36576" tIns="36576" bIns="36576" anchor="ctr">
             <a:spAutoFit/>
           </a:bodyPr>
           <a:lstStyle/>
@@ -20290,7 +20292,7 @@
                 <a:solidFill>
                   <a:srgbClr val="00918A"/>
                 </a:solidFill>
-                <a:latin typeface="Aptos"/>
+                <a:latin typeface="Liberation Sans"/>
               </a:rPr>
               <a:t>✓</a:t>
             </a:r>
@@ -20314,7 +20316,7 @@
           <a:noFill/>
         </p:spPr>
         <p:txBody>
-          <a:bodyPr wrap="none" lIns="36576" rIns="36576" tIns="36576" bIns="36576" anchor="ctr">
+          <a:bodyPr wrap="square" lIns="36576" rIns="36576" tIns="36576" bIns="36576" anchor="ctr">
             <a:spAutoFit/>
           </a:bodyPr>
           <a:lstStyle/>
@@ -20325,7 +20327,7 @@
                 <a:solidFill>
                   <a:srgbClr val="122034"/>
                 </a:solidFill>
-                <a:latin typeface="Aptos"/>
+                <a:latin typeface="Liberation Sans"/>
               </a:rPr>
               <a:t>Track progress</a:t>
             </a:r>
@@ -20341,26 +20343,26 @@
         <p:spPr>
           <a:xfrm>
             <a:off x="8357616" y="2852928"/>
-            <a:ext cx="3017520" cy="1819656"/>
-          </a:xfrm>
-          <a:prstGeom prst="rect">
-            <a:avLst/>
-          </a:prstGeom>
-          <a:noFill/>
-        </p:spPr>
-        <p:txBody>
-          <a:bodyPr wrap="none" lIns="36576" rIns="36576" tIns="36576" bIns="36576" anchor="ctr">
-            <a:spAutoFit/>
-          </a:bodyPr>
-          <a:lstStyle/>
-          <a:p>
-            <a:pPr algn="l"/>
-            <a:r>
-              <a:rPr sz="1100" b="0">
-                <a:solidFill>
-                  <a:srgbClr val="556982"/>
-                </a:solidFill>
-                <a:latin typeface="Aptos"/>
+            <a:ext cx="3017520" cy="1764792"/>
+          </a:xfrm>
+          <a:prstGeom prst="rect">
+            <a:avLst/>
+          </a:prstGeom>
+          <a:noFill/>
+        </p:spPr>
+        <p:txBody>
+          <a:bodyPr wrap="square" lIns="18288" rIns="18288" tIns="18288" bIns="18288" anchor="t">
+            <a:spAutoFit/>
+          </a:bodyPr>
+          <a:lstStyle/>
+          <a:p>
+            <a:pPr algn="l"/>
+            <a:r>
+              <a:rPr sz="1150" b="0">
+                <a:solidFill>
+                  <a:srgbClr val="37495E"/>
+                </a:solidFill>
+                <a:latin typeface="Liberation Sans"/>
               </a:rPr>
               <a:t>See open requests, updates, documents and closure evidence.</a:t>
             </a:r>
@@ -20384,7 +20386,7 @@
           <a:noFill/>
         </p:spPr>
         <p:txBody>
-          <a:bodyPr wrap="none" lIns="36576" rIns="36576" tIns="36576" bIns="36576" anchor="ctr">
+          <a:bodyPr wrap="square" lIns="36576" rIns="36576" tIns="36576" bIns="36576" anchor="ctr">
             <a:spAutoFit/>
           </a:bodyPr>
           <a:lstStyle/>
@@ -20395,7 +20397,7 @@
                 <a:solidFill>
                   <a:srgbClr val="122034"/>
                 </a:solidFill>
-                <a:latin typeface="Aptos"/>
+                <a:latin typeface="Liberation Sans"/>
               </a:rPr>
               <a:t>Live proof: submit a low-risk issue, note the reference, then continue the same record in Facility Management.</a:t>
             </a:r>
@@ -20464,7 +20466,7 @@
           <a:noFill/>
         </p:spPr>
         <p:txBody>
-          <a:bodyPr wrap="none" lIns="36576" rIns="36576" tIns="36576" bIns="36576" anchor="ctr">
+          <a:bodyPr wrap="square" lIns="36576" rIns="36576" tIns="36576" bIns="36576" anchor="ctr">
             <a:spAutoFit/>
           </a:bodyPr>
           <a:lstStyle/>
@@ -20475,7 +20477,7 @@
                 <a:solidFill>
                   <a:srgbClr val="0A213D"/>
                 </a:solidFill>
-                <a:latin typeface="Aptos"/>
+                <a:latin typeface="Liberation Sans"/>
               </a:rPr>
               <a:t>PROOF</a:t>
             </a:r>
@@ -20499,7 +20501,7 @@
           <a:noFill/>
         </p:spPr>
         <p:txBody>
-          <a:bodyPr wrap="none" lIns="36576" rIns="36576" tIns="36576" bIns="36576" anchor="ctr">
+          <a:bodyPr wrap="square" lIns="36576" rIns="36576" tIns="36576" bIns="36576" anchor="ctr">
             <a:spAutoFit/>
           </a:bodyPr>
           <a:lstStyle/>
@@ -20510,7 +20512,7 @@
                 <a:solidFill>
                   <a:srgbClr val="0A213D"/>
                 </a:solidFill>
-                <a:latin typeface="Aptos"/>
+                <a:latin typeface="Liberation Sans"/>
               </a:rPr>
               <a:t>A tenant request becomes a property-scoped operational transaction—not an email or informal phone call.</a:t>
             </a:r>
@@ -20629,7 +20631,7 @@
           <a:noFill/>
         </p:spPr>
         <p:txBody>
-          <a:bodyPr wrap="none" lIns="36576" rIns="36576" tIns="36576" bIns="36576" anchor="ctr">
+          <a:bodyPr wrap="square" lIns="36576" rIns="36576" tIns="36576" bIns="36576" anchor="ctr">
             <a:spAutoFit/>
           </a:bodyPr>
           <a:lstStyle/>
@@ -20640,7 +20642,7 @@
                 <a:solidFill>
                   <a:srgbClr val="0A213D"/>
                 </a:solidFill>
-                <a:latin typeface="Aptos"/>
+                <a:latin typeface="Liberation Sans"/>
               </a:rPr>
               <a:t>CeEst ERP</a:t>
             </a:r>
@@ -20664,7 +20666,7 @@
           <a:noFill/>
         </p:spPr>
         <p:txBody>
-          <a:bodyPr wrap="none" lIns="36576" rIns="36576" tIns="36576" bIns="36576" anchor="ctr">
+          <a:bodyPr wrap="square" lIns="36576" rIns="36576" tIns="36576" bIns="36576" anchor="ctr">
             <a:spAutoFit/>
           </a:bodyPr>
           <a:lstStyle/>
@@ -20673,9 +20675,9 @@
             <a:r>
               <a:rPr sz="800" b="1">
                 <a:solidFill>
-                  <a:srgbClr val="556982"/>
-                </a:solidFill>
-                <a:latin typeface="Aptos"/>
+                  <a:srgbClr val="37495E"/>
+                </a:solidFill>
+                <a:latin typeface="Liberation Sans"/>
               </a:rPr>
               <a:t>PROPERTY  •  FACILITY  •  PERFORMANCE</a:t>
             </a:r>
@@ -20699,7 +20701,7 @@
           <a:noFill/>
         </p:spPr>
         <p:txBody>
-          <a:bodyPr wrap="none" lIns="36576" rIns="36576" tIns="36576" bIns="36576" anchor="ctr">
+          <a:bodyPr wrap="square" lIns="36576" rIns="36576" tIns="36576" bIns="36576" anchor="ctr">
             <a:spAutoFit/>
           </a:bodyPr>
           <a:lstStyle/>
@@ -20710,7 +20712,7 @@
                 <a:solidFill>
                   <a:srgbClr val="DE232A"/>
                 </a:solidFill>
-                <a:latin typeface="Aptos"/>
+                <a:latin typeface="Liberation Sans"/>
               </a:rPr>
               <a:t>FACILITIES OPERATIONS</a:t>
             </a:r>
@@ -20734,7 +20736,7 @@
           <a:noFill/>
         </p:spPr>
         <p:txBody>
-          <a:bodyPr wrap="none" lIns="36576" rIns="36576" tIns="36576" bIns="36576" anchor="ctr">
+          <a:bodyPr wrap="square" lIns="36576" rIns="36576" tIns="36576" bIns="36576" anchor="ctr">
             <a:spAutoFit/>
           </a:bodyPr>
           <a:lstStyle/>
@@ -20745,7 +20747,7 @@
                 <a:solidFill>
                   <a:srgbClr val="122034"/>
                 </a:solidFill>
-                <a:latin typeface="Aptos"/>
+                <a:latin typeface="Liberation Sans"/>
               </a:rPr>
               <a:t>Turn a reported defect into controlled work</a:t>
             </a:r>
@@ -20769,7 +20771,7 @@
           <a:noFill/>
         </p:spPr>
         <p:txBody>
-          <a:bodyPr wrap="none" lIns="36576" rIns="36576" tIns="36576" bIns="36576" anchor="ctr">
+          <a:bodyPr wrap="square" lIns="36576" rIns="36576" tIns="36576" bIns="36576" anchor="ctr">
             <a:spAutoFit/>
           </a:bodyPr>
           <a:lstStyle/>
@@ -20778,9 +20780,9 @@
             <a:r>
               <a:rPr sz="1300" b="0">
                 <a:solidFill>
-                  <a:srgbClr val="556982"/>
-                </a:solidFill>
-                <a:latin typeface="Aptos"/>
+                  <a:srgbClr val="37495E"/>
+                </a:solidFill>
+                <a:latin typeface="Liberation Sans"/>
               </a:rPr>
               <a:t>Ticket → triage → SLA → assignment → evidence → verification → closure.</a:t>
             </a:r>
@@ -20804,7 +20806,7 @@
           <a:noFill/>
         </p:spPr>
         <p:txBody>
-          <a:bodyPr wrap="none" lIns="36576" rIns="36576" tIns="36576" bIns="36576" anchor="ctr">
+          <a:bodyPr wrap="square" lIns="36576" rIns="36576" tIns="36576" bIns="36576" anchor="ctr">
             <a:spAutoFit/>
           </a:bodyPr>
           <a:lstStyle/>
@@ -20815,7 +20817,7 @@
                 <a:solidFill>
                   <a:srgbClr val="DE232A"/>
                 </a:solidFill>
-                <a:latin typeface="Aptos"/>
+                <a:latin typeface="Liberation Sans"/>
               </a:rPr>
               <a:t>08</a:t>
             </a:r>
@@ -20884,7 +20886,7 @@
           <a:noFill/>
         </p:spPr>
         <p:txBody>
-          <a:bodyPr wrap="none" lIns="36576" rIns="36576" tIns="36576" bIns="36576" anchor="ctr">
+          <a:bodyPr wrap="square" lIns="36576" rIns="36576" tIns="36576" bIns="36576" anchor="ctr">
             <a:spAutoFit/>
           </a:bodyPr>
           <a:lstStyle/>
@@ -20895,7 +20897,7 @@
                 <a:solidFill>
                   <a:srgbClr val="FFFFFF"/>
                 </a:solidFill>
-                <a:latin typeface="Aptos"/>
+                <a:latin typeface="Liberation Sans"/>
               </a:rPr>
               <a:t>REPORT</a:t>
             </a:r>
@@ -20919,7 +20921,7 @@
           <a:noFill/>
         </p:spPr>
         <p:txBody>
-          <a:bodyPr wrap="none" lIns="36576" rIns="36576" tIns="36576" bIns="36576" anchor="ctr">
+          <a:bodyPr wrap="square" lIns="36576" rIns="36576" tIns="36576" bIns="36576" anchor="ctr">
             <a:spAutoFit/>
           </a:bodyPr>
           <a:lstStyle/>
@@ -20928,9 +20930,9 @@
             <a:r>
               <a:rPr sz="1800" b="1">
                 <a:solidFill>
-                  <a:srgbClr val="556982"/>
-                </a:solidFill>
-                <a:latin typeface="Aptos"/>
+                  <a:srgbClr val="37495E"/>
+                </a:solidFill>
+                <a:latin typeface="Liberation Sans"/>
               </a:rPr>
               <a:t>→</a:t>
             </a:r>
@@ -20999,7 +21001,7 @@
           <a:noFill/>
         </p:spPr>
         <p:txBody>
-          <a:bodyPr wrap="none" lIns="36576" rIns="36576" tIns="36576" bIns="36576" anchor="ctr">
+          <a:bodyPr wrap="square" lIns="36576" rIns="36576" tIns="36576" bIns="36576" anchor="ctr">
             <a:spAutoFit/>
           </a:bodyPr>
           <a:lstStyle/>
@@ -21010,7 +21012,7 @@
                 <a:solidFill>
                   <a:srgbClr val="FFFFFF"/>
                 </a:solidFill>
-                <a:latin typeface="Aptos"/>
+                <a:latin typeface="Liberation Sans"/>
               </a:rPr>
               <a:t>TRIAGE</a:t>
             </a:r>
@@ -21034,7 +21036,7 @@
           <a:noFill/>
         </p:spPr>
         <p:txBody>
-          <a:bodyPr wrap="none" lIns="36576" rIns="36576" tIns="36576" bIns="36576" anchor="ctr">
+          <a:bodyPr wrap="square" lIns="36576" rIns="36576" tIns="36576" bIns="36576" anchor="ctr">
             <a:spAutoFit/>
           </a:bodyPr>
           <a:lstStyle/>
@@ -21043,9 +21045,9 @@
             <a:r>
               <a:rPr sz="1800" b="1">
                 <a:solidFill>
-                  <a:srgbClr val="556982"/>
-                </a:solidFill>
-                <a:latin typeface="Aptos"/>
+                  <a:srgbClr val="37495E"/>
+                </a:solidFill>
+                <a:latin typeface="Liberation Sans"/>
               </a:rPr>
               <a:t>→</a:t>
             </a:r>
@@ -21114,7 +21116,7 @@
           <a:noFill/>
         </p:spPr>
         <p:txBody>
-          <a:bodyPr wrap="none" lIns="36576" rIns="36576" tIns="36576" bIns="36576" anchor="ctr">
+          <a:bodyPr wrap="square" lIns="36576" rIns="36576" tIns="36576" bIns="36576" anchor="ctr">
             <a:spAutoFit/>
           </a:bodyPr>
           <a:lstStyle/>
@@ -21125,7 +21127,7 @@
                 <a:solidFill>
                   <a:srgbClr val="FFFFFF"/>
                 </a:solidFill>
-                <a:latin typeface="Aptos"/>
+                <a:latin typeface="Liberation Sans"/>
               </a:rPr>
               <a:t>ASSIGN</a:t>
             </a:r>
@@ -21149,7 +21151,7 @@
           <a:noFill/>
         </p:spPr>
         <p:txBody>
-          <a:bodyPr wrap="none" lIns="36576" rIns="36576" tIns="36576" bIns="36576" anchor="ctr">
+          <a:bodyPr wrap="square" lIns="36576" rIns="36576" tIns="36576" bIns="36576" anchor="ctr">
             <a:spAutoFit/>
           </a:bodyPr>
           <a:lstStyle/>
@@ -21158,9 +21160,9 @@
             <a:r>
               <a:rPr sz="1800" b="1">
                 <a:solidFill>
-                  <a:srgbClr val="556982"/>
-                </a:solidFill>
-                <a:latin typeface="Aptos"/>
+                  <a:srgbClr val="37495E"/>
+                </a:solidFill>
+                <a:latin typeface="Liberation Sans"/>
               </a:rPr>
               <a:t>→</a:t>
             </a:r>
@@ -21229,7 +21231,7 @@
           <a:noFill/>
         </p:spPr>
         <p:txBody>
-          <a:bodyPr wrap="none" lIns="36576" rIns="36576" tIns="36576" bIns="36576" anchor="ctr">
+          <a:bodyPr wrap="square" lIns="36576" rIns="36576" tIns="36576" bIns="36576" anchor="ctr">
             <a:spAutoFit/>
           </a:bodyPr>
           <a:lstStyle/>
@@ -21240,7 +21242,7 @@
                 <a:solidFill>
                   <a:srgbClr val="FFFFFF"/>
                 </a:solidFill>
-                <a:latin typeface="Aptos"/>
+                <a:latin typeface="Liberation Sans"/>
               </a:rPr>
               <a:t>EXECUTE</a:t>
             </a:r>
@@ -21264,7 +21266,7 @@
           <a:noFill/>
         </p:spPr>
         <p:txBody>
-          <a:bodyPr wrap="none" lIns="36576" rIns="36576" tIns="36576" bIns="36576" anchor="ctr">
+          <a:bodyPr wrap="square" lIns="36576" rIns="36576" tIns="36576" bIns="36576" anchor="ctr">
             <a:spAutoFit/>
           </a:bodyPr>
           <a:lstStyle/>
@@ -21273,9 +21275,9 @@
             <a:r>
               <a:rPr sz="1800" b="1">
                 <a:solidFill>
-                  <a:srgbClr val="556982"/>
-                </a:solidFill>
-                <a:latin typeface="Aptos"/>
+                  <a:srgbClr val="37495E"/>
+                </a:solidFill>
+                <a:latin typeface="Liberation Sans"/>
               </a:rPr>
               <a:t>→</a:t>
             </a:r>
@@ -21344,7 +21346,7 @@
           <a:noFill/>
         </p:spPr>
         <p:txBody>
-          <a:bodyPr wrap="none" lIns="36576" rIns="36576" tIns="36576" bIns="36576" anchor="ctr">
+          <a:bodyPr wrap="square" lIns="36576" rIns="36576" tIns="36576" bIns="36576" anchor="ctr">
             <a:spAutoFit/>
           </a:bodyPr>
           <a:lstStyle/>
@@ -21355,7 +21357,7 @@
                 <a:solidFill>
                   <a:srgbClr val="FFFFFF"/>
                 </a:solidFill>
-                <a:latin typeface="Aptos"/>
+                <a:latin typeface="Liberation Sans"/>
               </a:rPr>
               <a:t>VERIFY</a:t>
             </a:r>
@@ -21379,7 +21381,7 @@
           <a:noFill/>
         </p:spPr>
         <p:txBody>
-          <a:bodyPr wrap="none" lIns="36576" rIns="36576" tIns="36576" bIns="36576" anchor="ctr">
+          <a:bodyPr wrap="square" lIns="36576" rIns="36576" tIns="36576" bIns="36576" anchor="ctr">
             <a:spAutoFit/>
           </a:bodyPr>
           <a:lstStyle/>
@@ -21388,9 +21390,9 @@
             <a:r>
               <a:rPr sz="1800" b="1">
                 <a:solidFill>
-                  <a:srgbClr val="556982"/>
-                </a:solidFill>
-                <a:latin typeface="Aptos"/>
+                  <a:srgbClr val="37495E"/>
+                </a:solidFill>
+                <a:latin typeface="Liberation Sans"/>
               </a:rPr>
               <a:t>→</a:t>
             </a:r>
@@ -21459,7 +21461,7 @@
           <a:noFill/>
         </p:spPr>
         <p:txBody>
-          <a:bodyPr wrap="none" lIns="36576" rIns="36576" tIns="36576" bIns="36576" anchor="ctr">
+          <a:bodyPr wrap="square" lIns="36576" rIns="36576" tIns="36576" bIns="36576" anchor="ctr">
             <a:spAutoFit/>
           </a:bodyPr>
           <a:lstStyle/>
@@ -21470,7 +21472,7 @@
                 <a:solidFill>
                   <a:srgbClr val="FFFFFF"/>
                 </a:solidFill>
-                <a:latin typeface="Aptos"/>
+                <a:latin typeface="Liberation Sans"/>
               </a:rPr>
               <a:t>CLOSE</a:t>
             </a:r>
@@ -21507,7 +21509,7 @@
                 <a:solidFill>
                   <a:srgbClr val="122034"/>
                 </a:solidFill>
-                <a:latin typeface="Aptos"/>
+                <a:latin typeface="Liberation Sans"/>
               </a:defRPr>
             </a:pPr>
             <a:r>
@@ -21523,7 +21525,7 @@
                 <a:solidFill>
                   <a:srgbClr val="122034"/>
                 </a:solidFill>
-                <a:latin typeface="Aptos"/>
+                <a:latin typeface="Liberation Sans"/>
               </a:defRPr>
             </a:pPr>
             <a:r>
@@ -21539,7 +21541,7 @@
                 <a:solidFill>
                   <a:srgbClr val="122034"/>
                 </a:solidFill>
-                <a:latin typeface="Aptos"/>
+                <a:latin typeface="Liberation Sans"/>
               </a:defRPr>
             </a:pPr>
             <a:r>
@@ -21555,7 +21557,7 @@
                 <a:solidFill>
                   <a:srgbClr val="122034"/>
                 </a:solidFill>
-                <a:latin typeface="Aptos"/>
+                <a:latin typeface="Liberation Sans"/>
               </a:defRPr>
             </a:pPr>
             <a:r>
@@ -21626,7 +21628,7 @@
           <a:noFill/>
         </p:spPr>
         <p:txBody>
-          <a:bodyPr wrap="none" lIns="36576" rIns="36576" tIns="36576" bIns="36576" anchor="ctr">
+          <a:bodyPr wrap="square" lIns="36576" rIns="36576" tIns="36576" bIns="36576" anchor="ctr">
             <a:spAutoFit/>
           </a:bodyPr>
           <a:lstStyle/>
@@ -21637,7 +21639,7 @@
                 <a:solidFill>
                   <a:srgbClr val="0A213D"/>
                 </a:solidFill>
-                <a:latin typeface="Aptos"/>
+                <a:latin typeface="Liberation Sans"/>
               </a:rPr>
               <a:t>PROOF</a:t>
             </a:r>
@@ -21661,7 +21663,7 @@
           <a:noFill/>
         </p:spPr>
         <p:txBody>
-          <a:bodyPr wrap="none" lIns="36576" rIns="36576" tIns="36576" bIns="36576" anchor="ctr">
+          <a:bodyPr wrap="square" lIns="36576" rIns="36576" tIns="36576" bIns="36576" anchor="ctr">
             <a:spAutoFit/>
           </a:bodyPr>
           <a:lstStyle/>
@@ -21672,7 +21674,7 @@
                 <a:solidFill>
                   <a:srgbClr val="0A213D"/>
                 </a:solidFill>
-                <a:latin typeface="Aptos"/>
+                <a:latin typeface="Liberation Sans"/>
               </a:rPr>
               <a:t>Every maintenance action has ownership, evidence, elapsed time and a measurable outcome.</a:t>
             </a:r>
